--- a/presentations/desk-tidy-weeks-5-6.pptx
+++ b/presentations/desk-tidy-weeks-5-6.pptx
@@ -2,20 +2,20 @@
 <file path=ppt/presentation.xml><?xml version="1.0" encoding="utf-8"?>
 <p:presentation xmlns:p="http://schemas.openxmlformats.org/presentationml/2006/main">
   <p:sldMasterIdLst>
-    <p:sldMasterId xmlns:r="http://schemas.openxmlformats.org/officeDocument/2006/relationships" id="2147483648" r:id="R2dc36dece1034d80"/>
+    <p:sldMasterId xmlns:r="http://schemas.openxmlformats.org/officeDocument/2006/relationships" id="2147483648" r:id="R1e42029fe71e417d"/>
   </p:sldMasterIdLst>
   <p:notesMasterIdLst>
-    <p:notesMasterId xmlns:r="http://schemas.openxmlformats.org/officeDocument/2006/relationships" r:id="R950aa6779dd24356"/>
+    <p:notesMasterId xmlns:r="http://schemas.openxmlformats.org/officeDocument/2006/relationships" r:id="Ra6c2756d159149bb"/>
   </p:notesMasterIdLst>
   <p:sldIdLst>
-    <p:sldId xmlns:r="http://schemas.openxmlformats.org/officeDocument/2006/relationships" id="256" r:id="R80189d20ec6c4fde"/>
-    <p:sldId xmlns:r="http://schemas.openxmlformats.org/officeDocument/2006/relationships" id="257" r:id="Rddaa359c3789433d"/>
-    <p:sldId xmlns:r="http://schemas.openxmlformats.org/officeDocument/2006/relationships" id="258" r:id="Rd264011ed58b413b"/>
-    <p:sldId xmlns:r="http://schemas.openxmlformats.org/officeDocument/2006/relationships" id="259" r:id="R57b2f066a651405b"/>
-    <p:sldId xmlns:r="http://schemas.openxmlformats.org/officeDocument/2006/relationships" id="260" r:id="Ra54aeecba36242a5"/>
-    <p:sldId xmlns:r="http://schemas.openxmlformats.org/officeDocument/2006/relationships" id="261" r:id="R82c6370417e44758"/>
-    <p:sldId xmlns:r="http://schemas.openxmlformats.org/officeDocument/2006/relationships" id="262" r:id="R5a1da3cdafd0481f"/>
-    <p:sldId xmlns:r="http://schemas.openxmlformats.org/officeDocument/2006/relationships" id="263" r:id="R7569732704394972"/>
+    <p:sldId xmlns:r="http://schemas.openxmlformats.org/officeDocument/2006/relationships" id="256" r:id="R322bff447a0b4b34"/>
+    <p:sldId xmlns:r="http://schemas.openxmlformats.org/officeDocument/2006/relationships" id="257" r:id="R15531bea8c5748f9"/>
+    <p:sldId xmlns:r="http://schemas.openxmlformats.org/officeDocument/2006/relationships" id="258" r:id="R99aa42c2ae124a6a"/>
+    <p:sldId xmlns:r="http://schemas.openxmlformats.org/officeDocument/2006/relationships" id="259" r:id="Rc03a01568c5845de"/>
+    <p:sldId xmlns:r="http://schemas.openxmlformats.org/officeDocument/2006/relationships" id="260" r:id="R9feaf1d808ab4df7"/>
+    <p:sldId xmlns:r="http://schemas.openxmlformats.org/officeDocument/2006/relationships" id="261" r:id="Rc79b4b8a51bf4d7d"/>
+    <p:sldId xmlns:r="http://schemas.openxmlformats.org/officeDocument/2006/relationships" id="262" r:id="R31e483f94cd94a96"/>
+    <p:sldId xmlns:r="http://schemas.openxmlformats.org/officeDocument/2006/relationships" id="263" r:id="Rb6b441f194c3403f"/>
   </p:sldIdLst>
   <p:sldSz cx="12192000" cy="6858000"/>
   <p:notesSz cx="6858000" cy="9144000"/>
@@ -449,17 +449,22 @@
           <a:lstStyle xmlns:a="http://schemas.openxmlformats.org/drawingml/2006/main"/>
           <a:p xmlns:a="http://schemas.openxmlformats.org/drawingml/2006/main">
             <a:r>
+              <a:t>Open with the retrieval question. Accept tentative ideas, then direct students to the module theory.</a:t>
+            </a:r>
+          </a:p>
+          <a:p xmlns:a="http://schemas.openxmlformats.org/drawingml/2006/main">
+            <a:r>
+              <a:t/>
+            </a:r>
+          </a:p>
+          <a:p xmlns:a="http://schemas.openxmlformats.org/drawingml/2006/main">
+            <a:r>
               <a:t>[Sources]</a:t>
             </a:r>
           </a:p>
           <a:p xmlns:a="http://schemas.openxmlformats.org/drawingml/2006/main">
             <a:r>
-              <a:t>- Local course theory: weeks5-6/index.html</a:t>
-            </a:r>
-          </a:p>
-          <a:p xmlns:a="http://schemas.openxmlformats.org/drawingml/2006/main">
-            <a:r>
-              <a:t>[/Sources]</a:t>
+              <a:t>- assets/desk-tidy-reference.png</a:t>
             </a:r>
           </a:p>
         </p:txBody>
@@ -529,17 +534,22 @@
           <a:lstStyle xmlns:a="http://schemas.openxmlformats.org/drawingml/2006/main"/>
           <a:p xmlns:a="http://schemas.openxmlformats.org/drawingml/2006/main">
             <a:r>
+              <a:t>Preview the three named theory sections and tell students what evidence they will retain.</a:t>
+            </a:r>
+          </a:p>
+          <a:p xmlns:a="http://schemas.openxmlformats.org/drawingml/2006/main">
+            <a:r>
+              <a:t/>
+            </a:r>
+          </a:p>
+          <a:p xmlns:a="http://schemas.openxmlformats.org/drawingml/2006/main">
+            <a:r>
               <a:t>[Sources]</a:t>
             </a:r>
           </a:p>
           <a:p xmlns:a="http://schemas.openxmlformats.org/drawingml/2006/main">
             <a:r>
-              <a:t>- Local course theory: weeks5-6/index.html</a:t>
-            </a:r>
-          </a:p>
-          <a:p xmlns:a="http://schemas.openxmlformats.org/drawingml/2006/main">
-            <a:r>
-              <a:t>[/Sources]</a:t>
+              <a:t>- weeks5-6/index.html</a:t>
             </a:r>
           </a:p>
         </p:txBody>
@@ -609,17 +619,22 @@
           <a:lstStyle xmlns:a="http://schemas.openxmlformats.org/drawingml/2006/main"/>
           <a:p xmlns:a="http://schemas.openxmlformats.org/drawingml/2006/main">
             <a:r>
+              <a:t>Use the visual to explain the section. Ask students to connect each takeaway to the adjacent course theory; do not add unconfirmed practical details.</a:t>
+            </a:r>
+          </a:p>
+          <a:p xmlns:a="http://schemas.openxmlformats.org/drawingml/2006/main">
+            <a:r>
+              <a:t/>
+            </a:r>
+          </a:p>
+          <a:p xmlns:a="http://schemas.openxmlformats.org/drawingml/2006/main">
+            <a:r>
               <a:t>[Sources]</a:t>
             </a:r>
           </a:p>
           <a:p xmlns:a="http://schemas.openxmlformats.org/drawingml/2006/main">
             <a:r>
-              <a:t>- Local course theory: weeks5-6/index.html</a:t>
-            </a:r>
-          </a:p>
-          <a:p xmlns:a="http://schemas.openxmlformats.org/drawingml/2006/main">
-            <a:r>
-              <a:t>[/Sources]</a:t>
+              <a:t>- assets/combination-square.jpg</a:t>
             </a:r>
           </a:p>
         </p:txBody>
@@ -689,17 +704,22 @@
           <a:lstStyle xmlns:a="http://schemas.openxmlformats.org/drawingml/2006/main"/>
           <a:p xmlns:a="http://schemas.openxmlformats.org/drawingml/2006/main">
             <a:r>
+              <a:t>Use the visual to explain the section. Ask students to connect each takeaway to the adjacent course theory; do not add unconfirmed practical details.</a:t>
+            </a:r>
+          </a:p>
+          <a:p xmlns:a="http://schemas.openxmlformats.org/drawingml/2006/main">
+            <a:r>
+              <a:t/>
+            </a:r>
+          </a:p>
+          <a:p xmlns:a="http://schemas.openxmlformats.org/drawingml/2006/main">
+            <a:r>
               <a:t>[Sources]</a:t>
             </a:r>
           </a:p>
           <a:p xmlns:a="http://schemas.openxmlformats.org/drawingml/2006/main">
             <a:r>
-              <a:t>- Local course theory: weeks5-6/index.html</a:t>
-            </a:r>
-          </a:p>
-          <a:p xmlns:a="http://schemas.openxmlformats.org/drawingml/2006/main">
-            <a:r>
-              <a:t>[/Sources]</a:t>
+              <a:t>- assets/tenon-saw.jpg</a:t>
             </a:r>
           </a:p>
         </p:txBody>
@@ -769,17 +789,22 @@
           <a:lstStyle xmlns:a="http://schemas.openxmlformats.org/drawingml/2006/main"/>
           <a:p xmlns:a="http://schemas.openxmlformats.org/drawingml/2006/main">
             <a:r>
+              <a:t>Use the visual to explain the section. Ask students to connect each takeaway to the adjacent course theory; do not add unconfirmed practical details.</a:t>
+            </a:r>
+          </a:p>
+          <a:p xmlns:a="http://schemas.openxmlformats.org/drawingml/2006/main">
+            <a:r>
+              <a:t/>
+            </a:r>
+          </a:p>
+          <a:p xmlns:a="http://schemas.openxmlformats.org/drawingml/2006/main">
+            <a:r>
               <a:t>[Sources]</a:t>
             </a:r>
           </a:p>
           <a:p xmlns:a="http://schemas.openxmlformats.org/drawingml/2006/main">
             <a:r>
-              <a:t>- Local course theory: weeks5-6/index.html</a:t>
-            </a:r>
-          </a:p>
-          <a:p xmlns:a="http://schemas.openxmlformats.org/drawingml/2006/main">
-            <a:r>
-              <a:t>[/Sources]</a:t>
+              <a:t>- assets/steel-rule.jpeg</a:t>
             </a:r>
           </a:p>
         </p:txBody>
@@ -849,17 +874,22 @@
           <a:lstStyle xmlns:a="http://schemas.openxmlformats.org/drawingml/2006/main"/>
           <a:p xmlns:a="http://schemas.openxmlformats.org/drawingml/2006/main">
             <a:r>
+              <a:t>Use this as a formative pause. Do not display or supply teacher-only answers.</a:t>
+            </a:r>
+          </a:p>
+          <a:p xmlns:a="http://schemas.openxmlformats.org/drawingml/2006/main">
+            <a:r>
+              <a:t/>
+            </a:r>
+          </a:p>
+          <a:p xmlns:a="http://schemas.openxmlformats.org/drawingml/2006/main">
+            <a:r>
               <a:t>[Sources]</a:t>
             </a:r>
           </a:p>
           <a:p xmlns:a="http://schemas.openxmlformats.org/drawingml/2006/main">
             <a:r>
-              <a:t>- Local course theory: weeks5-6/index.html</a:t>
-            </a:r>
-          </a:p>
-          <a:p xmlns:a="http://schemas.openxmlformats.org/drawingml/2006/main">
-            <a:r>
-              <a:t>[/Sources]</a:t>
+              <a:t>- weeks5-6/index.html</a:t>
             </a:r>
           </a:p>
         </p:txBody>
@@ -929,17 +959,22 @@
           <a:lstStyle xmlns:a="http://schemas.openxmlformats.org/drawingml/2006/main"/>
           <a:p xmlns:a="http://schemas.openxmlformats.org/drawingml/2006/main">
             <a:r>
+              <a:t>Model the response process without giving an answer to a live student question.</a:t>
+            </a:r>
+          </a:p>
+          <a:p xmlns:a="http://schemas.openxmlformats.org/drawingml/2006/main">
+            <a:r>
+              <a:t/>
+            </a:r>
+          </a:p>
+          <a:p xmlns:a="http://schemas.openxmlformats.org/drawingml/2006/main">
+            <a:r>
               <a:t>[Sources]</a:t>
             </a:r>
           </a:p>
           <a:p xmlns:a="http://schemas.openxmlformats.org/drawingml/2006/main">
             <a:r>
-              <a:t>- Local course theory: weeks5-6/index.html</a:t>
-            </a:r>
-          </a:p>
-          <a:p xmlns:a="http://schemas.openxmlformats.org/drawingml/2006/main">
-            <a:r>
-              <a:t>[/Sources]</a:t>
+              <a:t>- weeks5-6/index.html</a:t>
             </a:r>
           </a:p>
         </p:txBody>
@@ -1009,17 +1044,22 @@
           <a:lstStyle xmlns:a="http://schemas.openxmlformats.org/drawingml/2006/main"/>
           <a:p xmlns:a="http://schemas.openxmlformats.org/drawingml/2006/main">
             <a:r>
+              <a:t>Finish with a student response, then return to the course module for checks, written evidence and folio saving.</a:t>
+            </a:r>
+          </a:p>
+          <a:p xmlns:a="http://schemas.openxmlformats.org/drawingml/2006/main">
+            <a:r>
+              <a:t/>
+            </a:r>
+          </a:p>
+          <a:p xmlns:a="http://schemas.openxmlformats.org/drawingml/2006/main">
+            <a:r>
               <a:t>[Sources]</a:t>
             </a:r>
           </a:p>
           <a:p xmlns:a="http://schemas.openxmlformats.org/drawingml/2006/main">
             <a:r>
-              <a:t>- Local course theory: weeks5-6/index.html</a:t>
-            </a:r>
-          </a:p>
-          <a:p xmlns:a="http://schemas.openxmlformats.org/drawingml/2006/main">
-            <a:r>
-              <a:t>[/Sources]</a:t>
+              <a:t>- assets/desk-tidy-reference.png</a:t>
             </a:r>
           </a:p>
         </p:txBody>
@@ -1087,7 +1127,7 @@
   </p:cSld>
   <p:clrMap bg1="lt1" tx1="dk1" bg2="lt2" tx2="dk2" accent1="accent1" accent2="accent2" accent3="accent3" accent4="accent4" accent5="accent5" accent6="accent6" hlink="hlink" folHlink="folHlink"/>
   <p:sldLayoutIdLst>
-    <p:sldLayoutId xmlns:r="http://schemas.openxmlformats.org/officeDocument/2006/relationships" id="2147483649" r:id="R682da98ec3c24aba"/>
+    <p:sldLayoutId xmlns:r="http://schemas.openxmlformats.org/officeDocument/2006/relationships" id="2147483649" r:id="R75b7f2cf3b9146c8"/>
   </p:sldLayoutIdLst>
   <p:txStyles>
     <p:titleStyle>
@@ -1617,6 +1657,13 @@
 <file path=ppt/slides/slide1.xml><?xml version="1.0" encoding="utf-8"?>
 <p:sld xmlns:p="http://schemas.openxmlformats.org/presentationml/2006/main">
   <p:cSld>
+    <p:bg>
+      <p:bgPr>
+        <a:solidFill xmlns:a="http://schemas.openxmlformats.org/drawingml/2006/main">
+          <a:srgbClr val="F8F2E8"/>
+        </a:solidFill>
+      </p:bgPr>
+    </p:bg>
     <p:spTree>
       <p:nvGrpSpPr>
         <p:cNvPr id="1" name=""/>
@@ -1642,30 +1689,42 @@
         </p:nvSpPr>
         <p:spPr>
           <a:xfrm xmlns:a="http://schemas.openxmlformats.org/drawingml/2006/main">
-            <a:off x="393668" y="1738789"/>
-            <a:ext cx="9448800" cy="2491454"/>
+            <a:off x="590550" y="1238250"/>
+            <a:ext cx="4953000" cy="2190750"/>
           </a:xfrm>
           <a:prstGeom xmlns:a="http://schemas.openxmlformats.org/drawingml/2006/main" prst="rect">
             <a:avLst/>
           </a:prstGeom>
         </p:spPr>
         <p:txBody>
-          <a:bodyPr xmlns:a="http://schemas.openxmlformats.org/drawingml/2006/main" lIns="0" tIns="0" rIns="0" bIns="0" anchor="b">
-            <a:noAutofit/>
+          <a:bodyPr xmlns:a="http://schemas.openxmlformats.org/drawingml/2006/main" lIns="38100" tIns="38100" rIns="38100" bIns="38100" anchor="ctr">
+            <a:normAutofit fontScale="100000"/>
           </a:bodyPr>
           <a:lstStyle xmlns:a="http://schemas.openxmlformats.org/drawingml/2006/main"/>
           <a:p xmlns:a="http://schemas.openxmlformats.org/drawingml/2006/main">
             <a:pPr algn="l">
-              <a:defRPr sz="6000">
-                <a:solidFill>
-                  <a:srgbClr val="000000"/>
-                </a:solidFill>
-                <a:latin typeface="Helvetica Neue"/>
-                <a:ea typeface="Helvetica Neue"/>
-                <a:cs typeface="Helvetica Neue"/>
-              </a:defRPr>
-            </a:pPr>
-            <a:r>
+              <a:lnSpc>
+                <a:spcPct val="105000"/>
+              </a:lnSpc>
+              <a:buNone/>
+              <a:defRPr sz="5000" b="1">
+                <a:solidFill>
+                  <a:srgbClr val="173126"/>
+                </a:solidFill>
+                <a:latin typeface="Aptos"/>
+                <a:ea typeface="Aptos"/>
+                <a:cs typeface="Aptos"/>
+              </a:defRPr>
+            </a:pPr>
+            <a:r>
+              <a:rPr sz="5000" b="1">
+                <a:solidFill>
+                  <a:srgbClr val="173126"/>
+                </a:solidFill>
+                <a:latin typeface="Aptos"/>
+                <a:ea typeface="Aptos"/>
+                <a:cs typeface="Aptos"/>
+              </a:rPr>
               <a:t>Plan before production</a:t>
             </a:r>
           </a:p>
@@ -1687,30 +1746,42 @@
         </p:nvSpPr>
         <p:spPr>
           <a:xfrm xmlns:a="http://schemas.openxmlformats.org/drawingml/2006/main">
-            <a:off x="393668" y="4742212"/>
-            <a:ext cx="5702332" cy="1080230"/>
+            <a:off x="628650" y="3571875"/>
+            <a:ext cx="4762500" cy="1066800"/>
           </a:xfrm>
           <a:prstGeom xmlns:a="http://schemas.openxmlformats.org/drawingml/2006/main" prst="rect">
             <a:avLst/>
           </a:prstGeom>
         </p:spPr>
         <p:txBody>
-          <a:bodyPr xmlns:a="http://schemas.openxmlformats.org/drawingml/2006/main" lIns="0" tIns="0" rIns="0" bIns="0">
-            <a:noAutofit/>
+          <a:bodyPr xmlns:a="http://schemas.openxmlformats.org/drawingml/2006/main" lIns="38100" tIns="38100" rIns="38100" bIns="38100" anchor="t">
+            <a:normAutofit fontScale="100000"/>
           </a:bodyPr>
           <a:lstStyle xmlns:a="http://schemas.openxmlformats.org/drawingml/2006/main"/>
           <a:p xmlns:a="http://schemas.openxmlformats.org/drawingml/2006/main">
             <a:pPr algn="l">
-              <a:defRPr sz="2400">
-                <a:solidFill>
-                  <a:srgbClr val="000000"/>
-                </a:solidFill>
-                <a:latin typeface="Helvetica Neue"/>
-                <a:ea typeface="Helvetica Neue"/>
-                <a:cs typeface="Helvetica Neue"/>
-              </a:defRPr>
-            </a:pPr>
-            <a:r>
+              <a:lnSpc>
+                <a:spcPct val="115000"/>
+              </a:lnSpc>
+              <a:buNone/>
+              <a:defRPr sz="2000" b="0">
+                <a:solidFill>
+                  <a:srgbClr val="5A665F"/>
+                </a:solidFill>
+                <a:latin typeface="Aptos"/>
+                <a:ea typeface="Aptos"/>
+                <a:cs typeface="Aptos"/>
+              </a:defRPr>
+            </a:pPr>
+            <a:r>
+              <a:rPr sz="2000" b="0">
+                <a:solidFill>
+                  <a:srgbClr val="5A665F"/>
+                </a:solidFill>
+                <a:latin typeface="Aptos"/>
+                <a:ea typeface="Aptos"/>
+                <a:cs typeface="Aptos"/>
+              </a:rPr>
               <a:t>Read the theory, check your understanding and save your own evidence.</a:t>
             </a:r>
           </a:p>
@@ -1732,31 +1803,192 @@
         </p:nvSpPr>
         <p:spPr>
           <a:xfrm xmlns:a="http://schemas.openxmlformats.org/drawingml/2006/main">
-            <a:off x="393668" y="392240"/>
-            <a:ext cx="5702332" cy="649129"/>
+            <a:off x="628650" y="781050"/>
+            <a:ext cx="4381500" cy="266700"/>
           </a:xfrm>
           <a:prstGeom xmlns:a="http://schemas.openxmlformats.org/drawingml/2006/main" prst="rect">
             <a:avLst/>
           </a:prstGeom>
         </p:spPr>
         <p:txBody>
-          <a:bodyPr xmlns:a="http://schemas.openxmlformats.org/drawingml/2006/main" lIns="0" tIns="0" rIns="0" bIns="0">
-            <a:noAutofit/>
+          <a:bodyPr xmlns:a="http://schemas.openxmlformats.org/drawingml/2006/main" lIns="38100" tIns="38100" rIns="38100" bIns="38100" anchor="t">
+            <a:normAutofit fontScale="85034"/>
           </a:bodyPr>
           <a:lstStyle xmlns:a="http://schemas.openxmlformats.org/drawingml/2006/main"/>
           <a:p xmlns:a="http://schemas.openxmlformats.org/drawingml/2006/main">
             <a:pPr algn="l">
-              <a:defRPr sz="2400">
-                <a:solidFill>
-                  <a:srgbClr val="000000"/>
-                </a:solidFill>
-                <a:latin typeface="Helvetica Neue"/>
-                <a:ea typeface="Helvetica Neue"/>
-                <a:cs typeface="Helvetica Neue"/>
-              </a:defRPr>
-            </a:pPr>
-            <a:r>
-              <a:t>DESK TIDY · Weeks 5–6</a:t>
+              <a:lnSpc>
+                <a:spcPct val="105000"/>
+              </a:lnSpc>
+              <a:buNone/>
+              <a:defRPr sz="1400" b="1">
+                <a:solidFill>
+                  <a:srgbClr val="D8941C"/>
+                </a:solidFill>
+                <a:latin typeface="Aptos"/>
+                <a:ea typeface="Aptos"/>
+                <a:cs typeface="Aptos"/>
+              </a:defRPr>
+            </a:pPr>
+            <a:r>
+              <a:rPr sz="1400" b="1">
+                <a:solidFill>
+                  <a:srgbClr val="D8941C"/>
+                </a:solidFill>
+                <a:latin typeface="Aptos"/>
+                <a:ea typeface="Aptos"/>
+                <a:cs typeface="Aptos"/>
+              </a:rPr>
+              <a:t>DESK TIDY · WEEKS 5-6</a:t>
+            </a:r>
+          </a:p>
+        </p:txBody>
+      </p:sp>
+      <p:sp>
+        <p:nvSpPr>
+          <p:cNvPr id="5" name="">
+            <a:extLst xmlns:a="http://schemas.openxmlformats.org/drawingml/2006/main">
+              <a:ext uri="{FF2B5EF4-FFF2-40B4-BE49-F238E27FC236}">
+                <a16:creationId xmlns:a16="http://schemas.microsoft.com/office/drawing/2014/main" id="{E6D3FEC9-763A-45F4-858A-76C4D2C60BFC}"/>
+              </a:ext>
+            </a:extLst>
+          </p:cNvPr>
+          <p:cNvSpPr>
+            <a:spLocks xmlns:a="http://schemas.openxmlformats.org/drawingml/2006/main" noGrp="1"/>
+          </p:cNvSpPr>
+          <p:nvPr/>
+        </p:nvSpPr>
+        <p:spPr>
+          <a:xfrm xmlns:a="http://schemas.openxmlformats.org/drawingml/2006/main">
+            <a:off x="5857875" y="438150"/>
+            <a:ext cx="5810250" cy="5676900"/>
+          </a:xfrm>
+          <a:prstGeom xmlns:a="http://schemas.openxmlformats.org/drawingml/2006/main" prst="roundRect">
+            <a:avLst>
+              <a:gd name="adj" fmla="val 2013"/>
+            </a:avLst>
+          </a:prstGeom>
+          <a:noFill xmlns:a="http://schemas.openxmlformats.org/drawingml/2006/main"/>
+          <a:ln xmlns:a="http://schemas.openxmlformats.org/drawingml/2006/main" w="9525">
+            <a:solidFill>
+              <a:srgbClr val="D8941C"/>
+            </a:solidFill>
+            <a:prstDash val="solid"/>
+          </a:ln>
+        </p:spPr>
+      </p:sp>
+      <p:pic>
+        <p:nvPicPr>
+          <p:cNvPr id="12" name=""/>
+          <p:cNvPicPr>
+            <a:picLocks xmlns:a="http://schemas.openxmlformats.org/drawingml/2006/main" noChangeAspect="1"/>
+          </p:cNvPicPr>
+          <p:nvPr/>
+        </p:nvPicPr>
+        <p:blipFill>
+          <a:blip xmlns:r="http://schemas.openxmlformats.org/officeDocument/2006/relationships" xmlns:a="http://schemas.openxmlformats.org/drawingml/2006/main" r:embed="R69cd31e177f94338"/>
+          <a:srcRect xmlns:a="http://schemas.openxmlformats.org/drawingml/2006/main" l="0" t="1228" r="0" b="1228"/>
+          <a:stretch xmlns:a="http://schemas.openxmlformats.org/drawingml/2006/main">
+            <a:fillRect l="0" t="0" r="0" b="0"/>
+          </a:stretch>
+        </p:blipFill>
+        <p:spPr>
+          <a:xfrm xmlns:a="http://schemas.openxmlformats.org/drawingml/2006/main">
+            <a:off x="6048375" y="628650"/>
+            <a:ext cx="5429250" cy="5295900"/>
+          </a:xfrm>
+          <a:prstGeom xmlns:a="http://schemas.openxmlformats.org/drawingml/2006/main" prst="roundRect">
+            <a:avLst>
+              <a:gd name="adj" fmla="val 2158"/>
+            </a:avLst>
+          </a:prstGeom>
+        </p:spPr>
+      </p:pic>
+      <p:sp>
+        <p:nvSpPr>
+          <p:cNvPr id="7" name="">
+            <a:extLst xmlns:a="http://schemas.openxmlformats.org/drawingml/2006/main">
+              <a:ext uri="{FF2B5EF4-FFF2-40B4-BE49-F238E27FC236}">
+                <a16:creationId xmlns:a16="http://schemas.microsoft.com/office/drawing/2014/main" id="{84E3563D-C5BC-4152-B95B-2D7C6B28BB09}"/>
+              </a:ext>
+            </a:extLst>
+          </p:cNvPr>
+          <p:cNvSpPr>
+            <a:spLocks xmlns:a="http://schemas.openxmlformats.org/drawingml/2006/main" noGrp="1"/>
+          </p:cNvSpPr>
+          <p:nvPr/>
+        </p:nvSpPr>
+        <p:spPr>
+          <a:xfrm xmlns:a="http://schemas.openxmlformats.org/drawingml/2006/main">
+            <a:off x="628650" y="4953000"/>
+            <a:ext cx="4762500" cy="876300"/>
+          </a:xfrm>
+          <a:prstGeom xmlns:a="http://schemas.openxmlformats.org/drawingml/2006/main" prst="rect">
+            <a:avLst/>
+          </a:prstGeom>
+          <a:noFill xmlns:a="http://schemas.openxmlformats.org/drawingml/2006/main"/>
+          <a:ln xmlns:a="http://schemas.openxmlformats.org/drawingml/2006/main" w="0">
+            <a:noFill/>
+            <a:prstDash val="solid"/>
+          </a:ln>
+        </p:spPr>
+        <p:txBody>
+          <a:bodyPr xmlns:a="http://schemas.openxmlformats.org/drawingml/2006/main" lIns="38100" tIns="38100" rIns="38100" bIns="38100" anchor="ctr">
+            <a:normAutofit fontScale="92593"/>
+          </a:bodyPr>
+          <a:lstStyle xmlns:a="http://schemas.openxmlformats.org/drawingml/2006/main"/>
+          <a:p xmlns:a="http://schemas.openxmlformats.org/drawingml/2006/main">
+            <a:pPr algn="l">
+              <a:lnSpc>
+                <a:spcPct val="105000"/>
+              </a:lnSpc>
+              <a:buNone/>
+              <a:defRPr sz="1800" b="0">
+                <a:solidFill>
+                  <a:srgbClr val="173126"/>
+                </a:solidFill>
+                <a:latin typeface="Aptos"/>
+                <a:ea typeface="Aptos"/>
+                <a:cs typeface="Aptos"/>
+              </a:defRPr>
+            </a:pPr>
+            <a:r>
+              <a:rPr sz="1800" b="0">
+                <a:solidFill>
+                  <a:srgbClr val="173126"/>
+                </a:solidFill>
+                <a:latin typeface="Aptos"/>
+                <a:ea typeface="Aptos"/>
+                <a:cs typeface="Aptos"/>
+              </a:rPr>
+              <a:t>BEFORE YOU BEGIN</a:t>
+            </a:r>
+          </a:p>
+          <a:p xmlns:a="http://schemas.openxmlformats.org/drawingml/2006/main">
+            <a:pPr algn="l">
+              <a:lnSpc>
+                <a:spcPct val="105000"/>
+              </a:lnSpc>
+              <a:buNone/>
+              <a:defRPr sz="1800" b="0">
+                <a:solidFill>
+                  <a:srgbClr val="173126"/>
+                </a:solidFill>
+                <a:latin typeface="Aptos"/>
+                <a:ea typeface="Aptos"/>
+                <a:cs typeface="Aptos"/>
+              </a:defRPr>
+            </a:pPr>
+            <a:r>
+              <a:rPr sz="1800" b="0">
+                <a:solidFill>
+                  <a:srgbClr val="173126"/>
+                </a:solidFill>
+                <a:latin typeface="Aptos"/>
+                <a:ea typeface="Aptos"/>
+                <a:cs typeface="Aptos"/>
+              </a:rPr>
+              <a:t>What do you already know—and what evidence would prove it?</a:t>
             </a:r>
           </a:p>
         </p:txBody>
@@ -1774,6 +2006,13 @@
 <file path=ppt/slides/slide2.xml><?xml version="1.0" encoding="utf-8"?>
 <p:sld xmlns:p="http://schemas.openxmlformats.org/presentationml/2006/main">
   <p:cSld>
+    <p:bg>
+      <p:bgPr>
+        <a:solidFill xmlns:a="http://schemas.openxmlformats.org/drawingml/2006/main">
+          <a:srgbClr val="F8F2E8"/>
+        </a:solidFill>
+      </p:bgPr>
+    </p:bg>
     <p:spTree>
       <p:nvGrpSpPr>
         <p:cNvPr id="1" name=""/>
@@ -1799,19 +2038,441 @@
         </p:nvSpPr>
         <p:spPr>
           <a:xfrm xmlns:a="http://schemas.openxmlformats.org/drawingml/2006/main">
-            <a:off x="11279315" y="6279261"/>
-            <a:ext cx="518922" cy="241268"/>
+            <a:off x="11334750" y="6496050"/>
+            <a:ext cx="400050" cy="190500"/>
           </a:xfrm>
           <a:prstGeom xmlns:a="http://schemas.openxmlformats.org/drawingml/2006/main" prst="rect">
             <a:avLst/>
           </a:prstGeom>
         </p:spPr>
         <p:txBody>
-          <a:bodyPr xmlns:a="http://schemas.openxmlformats.org/drawingml/2006/main" lIns="0" tIns="0" rIns="0" bIns="0" anchor="b"/>
+          <a:bodyPr xmlns:a="http://schemas.openxmlformats.org/drawingml/2006/main" lIns="38100" tIns="38100" rIns="38100" bIns="38100" anchor="ctr">
+            <a:normAutofit fontScale="64935"/>
+          </a:bodyPr>
           <a:lstStyle xmlns:a="http://schemas.openxmlformats.org/drawingml/2006/main"/>
           <a:p xmlns:a="http://schemas.openxmlformats.org/drawingml/2006/main">
             <a:pPr algn="r">
-              <a:defRPr sz="1000">
+              <a:lnSpc>
+                <a:spcPct val="105000"/>
+              </a:lnSpc>
+              <a:buNone/>
+              <a:defRPr sz="1100" b="1">
+                <a:solidFill>
+                  <a:srgbClr val="5A665F"/>
+                </a:solidFill>
+                <a:latin typeface="Aptos"/>
+                <a:ea typeface="Aptos"/>
+                <a:cs typeface="Aptos"/>
+              </a:defRPr>
+            </a:pPr>
+            <a:r>
+              <a:rPr sz="1100" b="1">
+                <a:solidFill>
+                  <a:srgbClr val="5A665F"/>
+                </a:solidFill>
+                <a:latin typeface="Aptos"/>
+                <a:ea typeface="Aptos"/>
+                <a:cs typeface="Aptos"/>
+              </a:rPr>
+              <a:t>2</a:t>
+            </a:r>
+          </a:p>
+        </p:txBody>
+      </p:sp>
+      <p:sp>
+        <p:nvSpPr>
+          <p:cNvPr id="2" name="Title-10-3">
+            <a:extLst xmlns:a="http://schemas.openxmlformats.org/drawingml/2006/main">
+              <a:ext uri="{FF2B5EF4-FFF2-40B4-BE49-F238E27FC236}">
+                <a16:creationId xmlns:a16="http://schemas.microsoft.com/office/drawing/2014/main" id="{B9CE0FEF-51C0-4EA1-B8D6-B8797DAE5D88}"/>
+              </a:ext>
+            </a:extLst>
+          </p:cNvPr>
+          <p:cNvSpPr>
+            <a:spLocks xmlns:a="http://schemas.openxmlformats.org/drawingml/2006/main" noGrp="1"/>
+          </p:cNvSpPr>
+          <p:nvPr/>
+        </p:nvSpPr>
+        <p:spPr>
+          <a:xfrm xmlns:a="http://schemas.openxmlformats.org/drawingml/2006/main">
+            <a:off x="571500" y="514350"/>
+            <a:ext cx="10477500" cy="666750"/>
+          </a:xfrm>
+          <a:prstGeom xmlns:a="http://schemas.openxmlformats.org/drawingml/2006/main" prst="rect">
+            <a:avLst/>
+          </a:prstGeom>
+        </p:spPr>
+        <p:txBody>
+          <a:bodyPr xmlns:a="http://schemas.openxmlformats.org/drawingml/2006/main" lIns="38100" tIns="38100" rIns="38100" bIns="38100" anchor="t">
+            <a:normAutofit fontScale="100000"/>
+          </a:bodyPr>
+          <a:lstStyle xmlns:a="http://schemas.openxmlformats.org/drawingml/2006/main"/>
+          <a:p xmlns:a="http://schemas.openxmlformats.org/drawingml/2006/main">
+            <a:pPr algn="l">
+              <a:lnSpc>
+                <a:spcPct val="105000"/>
+              </a:lnSpc>
+              <a:buNone/>
+              <a:defRPr sz="3600" b="1">
+                <a:solidFill>
+                  <a:srgbClr val="173126"/>
+                </a:solidFill>
+                <a:latin typeface="Aptos"/>
+                <a:ea typeface="Aptos"/>
+                <a:cs typeface="Aptos"/>
+              </a:defRPr>
+            </a:pPr>
+            <a:r>
+              <a:rPr sz="3600" b="1">
+                <a:solidFill>
+                  <a:srgbClr val="173126"/>
+                </a:solidFill>
+                <a:latin typeface="Aptos"/>
+                <a:ea typeface="Aptos"/>
+                <a:cs typeface="Aptos"/>
+              </a:rPr>
+              <a:t>Three ideas build one evidence trail</a:t>
+            </a:r>
+          </a:p>
+        </p:txBody>
+      </p:sp>
+      <p:cxnSp>
+        <p:nvCxnSpPr>
+          <p:cNvPr id="25" name="Google-Shape-2259-p159-4"/>
+          <p:cNvCxnSpPr/>
+          <p:nvPr/>
+        </p:nvCxnSpPr>
+        <p:spPr>
+          <a:xfrm xmlns:a="http://schemas.openxmlformats.org/drawingml/2006/main">
+            <a:off x="0" y="0"/>
+            <a:ext cx="9525" cy="9525"/>
+          </a:xfrm>
+          <a:prstGeom xmlns:a="http://schemas.openxmlformats.org/drawingml/2006/main" prst="straightConnector1">
+            <a:avLst/>
+          </a:prstGeom>
+          <a:ln xmlns:a="http://schemas.openxmlformats.org/drawingml/2006/main" w="0">
+            <a:noFill/>
+            <a:prstDash val="solid"/>
+          </a:ln>
+        </p:spPr>
+      </p:cxnSp>
+      <p:sp>
+        <p:nvSpPr>
+          <p:cNvPr id="4" name="Google-Shape-2260-p159-5">
+            <a:extLst xmlns:a="http://schemas.openxmlformats.org/drawingml/2006/main">
+              <a:ext uri="{FF2B5EF4-FFF2-40B4-BE49-F238E27FC236}">
+                <a16:creationId xmlns:a16="http://schemas.microsoft.com/office/drawing/2014/main" id="{82997E6F-129E-4BF8-9AC6-79F1B91555ED}"/>
+              </a:ext>
+            </a:extLst>
+          </p:cNvPr>
+          <p:cNvSpPr>
+            <a:spLocks xmlns:a="http://schemas.openxmlformats.org/drawingml/2006/main" noGrp="1"/>
+          </p:cNvSpPr>
+          <p:nvPr/>
+        </p:nvSpPr>
+        <p:spPr>
+          <a:xfrm xmlns:a="http://schemas.openxmlformats.org/drawingml/2006/main">
+            <a:off x="0" y="0"/>
+            <a:ext cx="9525" cy="9525"/>
+          </a:xfrm>
+          <a:prstGeom xmlns:a="http://schemas.openxmlformats.org/drawingml/2006/main" prst="ellipse">
+            <a:avLst/>
+          </a:prstGeom>
+          <a:noFill xmlns:a="http://schemas.openxmlformats.org/drawingml/2006/main"/>
+          <a:ln xmlns:a="http://schemas.openxmlformats.org/drawingml/2006/main" w="0">
+            <a:noFill/>
+            <a:prstDash val="solid"/>
+          </a:ln>
+        </p:spPr>
+      </p:sp>
+      <p:sp>
+        <p:nvSpPr>
+          <p:cNvPr id="5" name="Google-Shape-2261-p159-6">
+            <a:extLst xmlns:a="http://schemas.openxmlformats.org/drawingml/2006/main">
+              <a:ext uri="{FF2B5EF4-FFF2-40B4-BE49-F238E27FC236}">
+                <a16:creationId xmlns:a16="http://schemas.microsoft.com/office/drawing/2014/main" id="{60362BB6-7EF4-4DED-AB3C-DCADA7E98B1A}"/>
+              </a:ext>
+            </a:extLst>
+          </p:cNvPr>
+          <p:cNvSpPr>
+            <a:spLocks xmlns:a="http://schemas.openxmlformats.org/drawingml/2006/main" noGrp="1"/>
+          </p:cNvSpPr>
+          <p:nvPr/>
+        </p:nvSpPr>
+        <p:spPr>
+          <a:xfrm xmlns:a="http://schemas.openxmlformats.org/drawingml/2006/main">
+            <a:off x="0" y="0"/>
+            <a:ext cx="9525" cy="9525"/>
+          </a:xfrm>
+          <a:prstGeom xmlns:a="http://schemas.openxmlformats.org/drawingml/2006/main" prst="ellipse">
+            <a:avLst/>
+          </a:prstGeom>
+          <a:noFill xmlns:a="http://schemas.openxmlformats.org/drawingml/2006/main"/>
+          <a:ln xmlns:a="http://schemas.openxmlformats.org/drawingml/2006/main" w="0">
+            <a:noFill/>
+            <a:prstDash val="solid"/>
+          </a:ln>
+        </p:spPr>
+      </p:sp>
+      <p:sp>
+        <p:nvSpPr>
+          <p:cNvPr id="6" name="Google-Shape-2262-p159-7">
+            <a:extLst xmlns:a="http://schemas.openxmlformats.org/drawingml/2006/main">
+              <a:ext uri="{FF2B5EF4-FFF2-40B4-BE49-F238E27FC236}">
+                <a16:creationId xmlns:a16="http://schemas.microsoft.com/office/drawing/2014/main" id="{6070AB5C-EE92-4587-AFA7-4FDD0DBE445E}"/>
+              </a:ext>
+            </a:extLst>
+          </p:cNvPr>
+          <p:cNvSpPr>
+            <a:spLocks xmlns:a="http://schemas.openxmlformats.org/drawingml/2006/main" noGrp="1"/>
+          </p:cNvSpPr>
+          <p:nvPr/>
+        </p:nvSpPr>
+        <p:spPr>
+          <a:xfrm xmlns:a="http://schemas.openxmlformats.org/drawingml/2006/main">
+            <a:off x="0" y="0"/>
+            <a:ext cx="9525" cy="9525"/>
+          </a:xfrm>
+          <a:prstGeom xmlns:a="http://schemas.openxmlformats.org/drawingml/2006/main" prst="ellipse">
+            <a:avLst/>
+          </a:prstGeom>
+          <a:noFill xmlns:a="http://schemas.openxmlformats.org/drawingml/2006/main"/>
+          <a:ln xmlns:a="http://schemas.openxmlformats.org/drawingml/2006/main" w="0">
+            <a:noFill/>
+            <a:prstDash val="solid"/>
+          </a:ln>
+        </p:spPr>
+      </p:sp>
+      <p:sp>
+        <p:nvSpPr>
+          <p:cNvPr id="7" name="Content-Placeholder-15-8">
+            <a:extLst xmlns:a="http://schemas.openxmlformats.org/drawingml/2006/main">
+              <a:ext uri="{FF2B5EF4-FFF2-40B4-BE49-F238E27FC236}">
+                <a16:creationId xmlns:a16="http://schemas.microsoft.com/office/drawing/2014/main" id="{1BB47680-0EA5-4476-9BC4-C970FDD82927}"/>
+              </a:ext>
+            </a:extLst>
+          </p:cNvPr>
+          <p:cNvSpPr>
+            <a:spLocks xmlns:a="http://schemas.openxmlformats.org/drawingml/2006/main" noGrp="1"/>
+          </p:cNvSpPr>
+          <p:nvPr/>
+        </p:nvSpPr>
+        <p:spPr>
+          <a:xfrm xmlns:a="http://schemas.openxmlformats.org/drawingml/2006/main">
+            <a:off x="933450" y="2171700"/>
+            <a:ext cx="666750" cy="571500"/>
+          </a:xfrm>
+          <a:prstGeom xmlns:a="http://schemas.openxmlformats.org/drawingml/2006/main" prst="rect">
+            <a:avLst/>
+          </a:prstGeom>
+        </p:spPr>
+        <p:txBody>
+          <a:bodyPr xmlns:a="http://schemas.openxmlformats.org/drawingml/2006/main" lIns="38100" tIns="38100" rIns="38100" bIns="38100" anchor="t">
+            <a:normAutofit fontScale="100000"/>
+          </a:bodyPr>
+          <a:lstStyle xmlns:a="http://schemas.openxmlformats.org/drawingml/2006/main"/>
+          <a:p xmlns:a="http://schemas.openxmlformats.org/drawingml/2006/main">
+            <a:pPr algn="l">
+              <a:lnSpc>
+                <a:spcPct val="105000"/>
+              </a:lnSpc>
+              <a:buNone/>
+              <a:defRPr sz="2800" b="1">
+                <a:solidFill>
+                  <a:srgbClr val="D8941C"/>
+                </a:solidFill>
+                <a:latin typeface="Aptos"/>
+                <a:ea typeface="Aptos"/>
+                <a:cs typeface="Aptos"/>
+              </a:defRPr>
+            </a:pPr>
+            <a:r>
+              <a:rPr sz="2800" b="1">
+                <a:solidFill>
+                  <a:srgbClr val="D8941C"/>
+                </a:solidFill>
+                <a:latin typeface="Aptos"/>
+                <a:ea typeface="Aptos"/>
+                <a:cs typeface="Aptos"/>
+              </a:rPr>
+              <a:t>01</a:t>
+            </a:r>
+          </a:p>
+        </p:txBody>
+      </p:sp>
+      <p:sp>
+        <p:nvSpPr>
+          <p:cNvPr id="8" name="Content-Placeholder-15-9">
+            <a:extLst xmlns:a="http://schemas.openxmlformats.org/drawingml/2006/main">
+              <a:ext uri="{FF2B5EF4-FFF2-40B4-BE49-F238E27FC236}">
+                <a16:creationId xmlns:a16="http://schemas.microsoft.com/office/drawing/2014/main" id="{5E4954AE-EFDE-4890-A144-F2E3FC7E1263}"/>
+              </a:ext>
+            </a:extLst>
+          </p:cNvPr>
+          <p:cNvSpPr>
+            <a:spLocks xmlns:a="http://schemas.openxmlformats.org/drawingml/2006/main" noGrp="1"/>
+          </p:cNvSpPr>
+          <p:nvPr/>
+        </p:nvSpPr>
+        <p:spPr>
+          <a:xfrm xmlns:a="http://schemas.openxmlformats.org/drawingml/2006/main">
+            <a:off x="4552950" y="2171700"/>
+            <a:ext cx="666750" cy="571500"/>
+          </a:xfrm>
+          <a:prstGeom xmlns:a="http://schemas.openxmlformats.org/drawingml/2006/main" prst="rect">
+            <a:avLst/>
+          </a:prstGeom>
+        </p:spPr>
+        <p:txBody>
+          <a:bodyPr xmlns:a="http://schemas.openxmlformats.org/drawingml/2006/main" lIns="38100" tIns="38100" rIns="38100" bIns="38100" anchor="t">
+            <a:normAutofit fontScale="100000"/>
+          </a:bodyPr>
+          <a:lstStyle xmlns:a="http://schemas.openxmlformats.org/drawingml/2006/main"/>
+          <a:p xmlns:a="http://schemas.openxmlformats.org/drawingml/2006/main">
+            <a:pPr algn="l">
+              <a:lnSpc>
+                <a:spcPct val="105000"/>
+              </a:lnSpc>
+              <a:buNone/>
+              <a:defRPr sz="2800" b="1">
+                <a:solidFill>
+                  <a:srgbClr val="D8941C"/>
+                </a:solidFill>
+                <a:latin typeface="Aptos"/>
+                <a:ea typeface="Aptos"/>
+                <a:cs typeface="Aptos"/>
+              </a:defRPr>
+            </a:pPr>
+            <a:r>
+              <a:rPr sz="2800" b="1">
+                <a:solidFill>
+                  <a:srgbClr val="D8941C"/>
+                </a:solidFill>
+                <a:latin typeface="Aptos"/>
+                <a:ea typeface="Aptos"/>
+                <a:cs typeface="Aptos"/>
+              </a:rPr>
+              <a:t>02</a:t>
+            </a:r>
+          </a:p>
+        </p:txBody>
+      </p:sp>
+      <p:sp>
+        <p:nvSpPr>
+          <p:cNvPr id="9" name="Content-Placeholder-15-10">
+            <a:extLst xmlns:a="http://schemas.openxmlformats.org/drawingml/2006/main">
+              <a:ext uri="{FF2B5EF4-FFF2-40B4-BE49-F238E27FC236}">
+                <a16:creationId xmlns:a16="http://schemas.microsoft.com/office/drawing/2014/main" id="{ACC1FA45-56F9-4E26-90F5-E8CB99085CAB}"/>
+              </a:ext>
+            </a:extLst>
+          </p:cNvPr>
+          <p:cNvSpPr>
+            <a:spLocks xmlns:a="http://schemas.openxmlformats.org/drawingml/2006/main" noGrp="1"/>
+          </p:cNvSpPr>
+          <p:nvPr/>
+        </p:nvSpPr>
+        <p:spPr>
+          <a:xfrm xmlns:a="http://schemas.openxmlformats.org/drawingml/2006/main">
+            <a:off x="8172450" y="2171700"/>
+            <a:ext cx="666750" cy="571500"/>
+          </a:xfrm>
+          <a:prstGeom xmlns:a="http://schemas.openxmlformats.org/drawingml/2006/main" prst="rect">
+            <a:avLst/>
+          </a:prstGeom>
+        </p:spPr>
+        <p:txBody>
+          <a:bodyPr xmlns:a="http://schemas.openxmlformats.org/drawingml/2006/main" lIns="38100" tIns="38100" rIns="38100" bIns="38100" anchor="t">
+            <a:normAutofit fontScale="100000"/>
+          </a:bodyPr>
+          <a:lstStyle xmlns:a="http://schemas.openxmlformats.org/drawingml/2006/main"/>
+          <a:p xmlns:a="http://schemas.openxmlformats.org/drawingml/2006/main">
+            <a:pPr algn="l">
+              <a:lnSpc>
+                <a:spcPct val="105000"/>
+              </a:lnSpc>
+              <a:buNone/>
+              <a:defRPr sz="2800" b="1">
+                <a:solidFill>
+                  <a:srgbClr val="D8941C"/>
+                </a:solidFill>
+                <a:latin typeface="Aptos"/>
+                <a:ea typeface="Aptos"/>
+                <a:cs typeface="Aptos"/>
+              </a:defRPr>
+            </a:pPr>
+            <a:r>
+              <a:rPr sz="2800" b="1">
+                <a:solidFill>
+                  <a:srgbClr val="D8941C"/>
+                </a:solidFill>
+                <a:latin typeface="Aptos"/>
+                <a:ea typeface="Aptos"/>
+                <a:cs typeface="Aptos"/>
+              </a:rPr>
+              <a:t>03</a:t>
+            </a:r>
+          </a:p>
+        </p:txBody>
+      </p:sp>
+      <p:sp>
+        <p:nvSpPr>
+          <p:cNvPr id="10" name="Text-Placeholder-16-11">
+            <a:extLst xmlns:a="http://schemas.openxmlformats.org/drawingml/2006/main">
+              <a:ext uri="{FF2B5EF4-FFF2-40B4-BE49-F238E27FC236}">
+                <a16:creationId xmlns:a16="http://schemas.microsoft.com/office/drawing/2014/main" id="{08770A78-C138-4414-8E73-CD1E1810868F}"/>
+              </a:ext>
+            </a:extLst>
+          </p:cNvPr>
+          <p:cNvSpPr>
+            <a:spLocks xmlns:a="http://schemas.openxmlformats.org/drawingml/2006/main" noGrp="1"/>
+          </p:cNvSpPr>
+          <p:nvPr/>
+        </p:nvSpPr>
+        <p:spPr>
+          <a:xfrm xmlns:a="http://schemas.openxmlformats.org/drawingml/2006/main">
+            <a:off x="933450" y="2781300"/>
+            <a:ext cx="2419350" cy="2133600"/>
+          </a:xfrm>
+          <a:prstGeom xmlns:a="http://schemas.openxmlformats.org/drawingml/2006/main" prst="rect">
+            <a:avLst/>
+          </a:prstGeom>
+        </p:spPr>
+        <p:txBody>
+          <a:bodyPr xmlns:a="http://schemas.openxmlformats.org/drawingml/2006/main" lIns="38100" tIns="38100" rIns="38100" bIns="38100" anchor="t">
+            <a:normAutofit fontScale="100000"/>
+          </a:bodyPr>
+          <a:lstStyle xmlns:a="http://schemas.openxmlformats.org/drawingml/2006/main"/>
+          <a:p xmlns:a="http://schemas.openxmlformats.org/drawingml/2006/main">
+            <a:pPr algn="l">
+              <a:lnSpc>
+                <a:spcPct val="108000"/>
+              </a:lnSpc>
+              <a:buNone/>
+              <a:defRPr sz="1600" b="0">
+                <a:solidFill>
+                  <a:srgbClr val="173126"/>
+                </a:solidFill>
+                <a:latin typeface="Aptos"/>
+                <a:ea typeface="Aptos"/>
+                <a:cs typeface="Aptos"/>
+              </a:defRPr>
+            </a:pPr>
+            <a:r>
+              <a:rPr sz="1600" b="0">
+                <a:solidFill>
+                  <a:srgbClr val="173126"/>
+                </a:solidFill>
+                <a:latin typeface="Aptos"/>
+                <a:ea typeface="Aptos"/>
+                <a:cs typeface="Aptos"/>
+              </a:rPr>
+              <a:t>Communicating the selected design with working drawings</a:t>
+            </a:r>
+          </a:p>
+          <a:p xmlns:a="http://schemas.openxmlformats.org/drawingml/2006/main">
+            <a:pPr algn="l">
+              <a:buNone/>
+              <a:defRPr sz="2400">
                 <a:solidFill>
                   <a:srgbClr val="000000"/>
                 </a:solidFill>
@@ -1821,42 +2482,97 @@
               </a:defRPr>
             </a:pPr>
             <a:r>
-              <a:t>2</a:t>
-            </a:r>
-          </a:p>
-        </p:txBody>
-      </p:sp>
-      <p:sp>
-        <p:nvSpPr>
-          <p:cNvPr id="2" name="Title-10-3">
-            <a:extLst xmlns:a="http://schemas.openxmlformats.org/drawingml/2006/main">
-              <a:ext uri="{FF2B5EF4-FFF2-40B4-BE49-F238E27FC236}">
-                <a16:creationId xmlns:a16="http://schemas.microsoft.com/office/drawing/2014/main" id="{B9CE0FEF-51C0-4EA1-B8D6-B8797DAE5D88}"/>
-              </a:ext>
-            </a:extLst>
-          </p:cNvPr>
-          <p:cNvSpPr>
-            <a:spLocks xmlns:a="http://schemas.openxmlformats.org/drawingml/2006/main" noGrp="1"/>
-          </p:cNvSpPr>
-          <p:nvPr/>
-        </p:nvSpPr>
-        <p:spPr>
-          <a:xfrm xmlns:a="http://schemas.openxmlformats.org/drawingml/2006/main">
-            <a:off x="393668" y="344043"/>
-            <a:ext cx="11404568" cy="1047464"/>
+              <a:t/>
+            </a:r>
+          </a:p>
+          <a:p xmlns:a="http://schemas.openxmlformats.org/drawingml/2006/main">
+            <a:pPr algn="l">
+              <a:lnSpc>
+                <a:spcPct val="108000"/>
+              </a:lnSpc>
+              <a:buNone/>
+              <a:defRPr sz="1600" b="0">
+                <a:solidFill>
+                  <a:srgbClr val="173126"/>
+                </a:solidFill>
+                <a:latin typeface="Aptos"/>
+                <a:ea typeface="Aptos"/>
+                <a:cs typeface="Aptos"/>
+              </a:defRPr>
+            </a:pPr>
+            <a:r>
+              <a:rPr sz="1600" b="0">
+                <a:solidFill>
+                  <a:srgbClr val="173126"/>
+                </a:solidFill>
+                <a:latin typeface="Aptos"/>
+                <a:ea typeface="Aptos"/>
+                <a:cs typeface="Aptos"/>
+              </a:rPr>
+              <a:t>Match: Confirm the drawings represent the approved design.</a:t>
+            </a:r>
+          </a:p>
+        </p:txBody>
+      </p:sp>
+      <p:sp>
+        <p:nvSpPr>
+          <p:cNvPr id="11" name="Text-Placeholder-16-12">
+            <a:extLst xmlns:a="http://schemas.openxmlformats.org/drawingml/2006/main">
+              <a:ext uri="{FF2B5EF4-FFF2-40B4-BE49-F238E27FC236}">
+                <a16:creationId xmlns:a16="http://schemas.microsoft.com/office/drawing/2014/main" id="{EF75FAE2-2945-439C-89BF-B26B8BA73022}"/>
+              </a:ext>
+            </a:extLst>
+          </p:cNvPr>
+          <p:cNvSpPr>
+            <a:spLocks xmlns:a="http://schemas.openxmlformats.org/drawingml/2006/main" noGrp="1"/>
+          </p:cNvSpPr>
+          <p:nvPr/>
+        </p:nvSpPr>
+        <p:spPr>
+          <a:xfrm xmlns:a="http://schemas.openxmlformats.org/drawingml/2006/main">
+            <a:off x="4552950" y="2781300"/>
+            <a:ext cx="2419350" cy="2133600"/>
           </a:xfrm>
           <a:prstGeom xmlns:a="http://schemas.openxmlformats.org/drawingml/2006/main" prst="rect">
             <a:avLst/>
           </a:prstGeom>
         </p:spPr>
         <p:txBody>
-          <a:bodyPr xmlns:a="http://schemas.openxmlformats.org/drawingml/2006/main" lIns="0" tIns="0" rIns="0" bIns="0" anchor="t">
+          <a:bodyPr xmlns:a="http://schemas.openxmlformats.org/drawingml/2006/main" lIns="38100" tIns="38100" rIns="38100" bIns="38100" anchor="t">
             <a:normAutofit fontScale="100000"/>
           </a:bodyPr>
           <a:lstStyle xmlns:a="http://schemas.openxmlformats.org/drawingml/2006/main"/>
           <a:p xmlns:a="http://schemas.openxmlformats.org/drawingml/2006/main">
             <a:pPr algn="l">
-              <a:defRPr sz="2900">
+              <a:lnSpc>
+                <a:spcPct val="108000"/>
+              </a:lnSpc>
+              <a:buNone/>
+              <a:defRPr sz="1600" b="0">
+                <a:solidFill>
+                  <a:srgbClr val="173126"/>
+                </a:solidFill>
+                <a:latin typeface="Aptos"/>
+                <a:ea typeface="Aptos"/>
+                <a:cs typeface="Aptos"/>
+              </a:defRPr>
+            </a:pPr>
+            <a:r>
+              <a:rPr sz="1600" b="0">
+                <a:solidFill>
+                  <a:srgbClr val="173126"/>
+                </a:solidFill>
+                <a:latin typeface="Aptos"/>
+                <a:ea typeface="Aptos"/>
+                <a:cs typeface="Aptos"/>
+              </a:rPr>
+              <a:t>Cutting lists and a realistic production schedule</a:t>
+            </a:r>
+          </a:p>
+          <a:p xmlns:a="http://schemas.openxmlformats.org/drawingml/2006/main">
+            <a:pPr algn="l">
+              <a:buNone/>
+              <a:defRPr sz="2400">
                 <a:solidFill>
                   <a:srgbClr val="000000"/>
                 </a:solidFill>
@@ -1866,428 +2582,298 @@
               </a:defRPr>
             </a:pPr>
             <a:r>
-              <a:t>Weeks 5–6: three connected learning sections</a:t>
-            </a:r>
-          </a:p>
-        </p:txBody>
-      </p:sp>
-      <p:cxnSp>
-        <p:nvCxnSpPr>
-          <p:cNvPr id="15" name="Google-Shape-2259-p159-4"/>
-          <p:cNvCxnSpPr/>
-          <p:nvPr/>
-        </p:nvCxnSpPr>
-        <p:spPr>
-          <a:xfrm xmlns:a="http://schemas.openxmlformats.org/drawingml/2006/main">
-            <a:off x="337757" y="3373755"/>
-            <a:ext cx="12245435" cy="286"/>
-          </a:xfrm>
-          <a:prstGeom xmlns:a="http://schemas.openxmlformats.org/drawingml/2006/main" prst="straightConnector1">
-            <a:avLst/>
-          </a:prstGeom>
+              <a:t/>
+            </a:r>
+          </a:p>
+          <a:p xmlns:a="http://schemas.openxmlformats.org/drawingml/2006/main">
+            <a:pPr algn="l">
+              <a:lnSpc>
+                <a:spcPct val="108000"/>
+              </a:lnSpc>
+              <a:buNone/>
+              <a:defRPr sz="1600" b="0">
+                <a:solidFill>
+                  <a:srgbClr val="173126"/>
+                </a:solidFill>
+                <a:latin typeface="Aptos"/>
+                <a:ea typeface="Aptos"/>
+                <a:cs typeface="Aptos"/>
+              </a:defRPr>
+            </a:pPr>
+            <a:r>
+              <a:rPr sz="1600" b="0">
+                <a:solidFill>
+                  <a:srgbClr val="173126"/>
+                </a:solidFill>
+                <a:latin typeface="Aptos"/>
+                <a:ea typeface="Aptos"/>
+                <a:cs typeface="Aptos"/>
+              </a:rPr>
+              <a:t>Good production starts with accurate information and a realistic sequence.</a:t>
+            </a:r>
+          </a:p>
+        </p:txBody>
+      </p:sp>
+      <p:sp>
+        <p:nvSpPr>
+          <p:cNvPr id="12" name="Text-Placeholder-16-13">
+            <a:extLst xmlns:a="http://schemas.openxmlformats.org/drawingml/2006/main">
+              <a:ext uri="{FF2B5EF4-FFF2-40B4-BE49-F238E27FC236}">
+                <a16:creationId xmlns:a16="http://schemas.microsoft.com/office/drawing/2014/main" id="{71B2876A-0BF6-4157-B18A-EF70B1BF539D}"/>
+              </a:ext>
+            </a:extLst>
+          </p:cNvPr>
+          <p:cNvSpPr>
+            <a:spLocks xmlns:a="http://schemas.openxmlformats.org/drawingml/2006/main" noGrp="1"/>
+          </p:cNvSpPr>
+          <p:nvPr/>
+        </p:nvSpPr>
+        <p:spPr>
+          <a:xfrm xmlns:a="http://schemas.openxmlformats.org/drawingml/2006/main">
+            <a:off x="8172450" y="2781300"/>
+            <a:ext cx="2419350" cy="2133600"/>
+          </a:xfrm>
+          <a:prstGeom xmlns:a="http://schemas.openxmlformats.org/drawingml/2006/main" prst="rect">
+            <a:avLst/>
+          </a:prstGeom>
+        </p:spPr>
+        <p:txBody>
+          <a:bodyPr xmlns:a="http://schemas.openxmlformats.org/drawingml/2006/main" lIns="38100" tIns="38100" rIns="38100" bIns="38100" anchor="t">
+            <a:normAutofit fontScale="100000"/>
+          </a:bodyPr>
+          <a:lstStyle xmlns:a="http://schemas.openxmlformats.org/drawingml/2006/main"/>
+          <a:p xmlns:a="http://schemas.openxmlformats.org/drawingml/2006/main">
+            <a:pPr algn="l">
+              <a:lnSpc>
+                <a:spcPct val="108000"/>
+              </a:lnSpc>
+              <a:buNone/>
+              <a:defRPr sz="1600" b="0">
+                <a:solidFill>
+                  <a:srgbClr val="173126"/>
+                </a:solidFill>
+                <a:latin typeface="Aptos"/>
+                <a:ea typeface="Aptos"/>
+                <a:cs typeface="Aptos"/>
+              </a:defRPr>
+            </a:pPr>
+            <a:r>
+              <a:rPr sz="1600" b="0">
+                <a:solidFill>
+                  <a:srgbClr val="173126"/>
+                </a:solidFill>
+                <a:latin typeface="Aptos"/>
+                <a:ea typeface="Aptos"/>
+                <a:cs typeface="Aptos"/>
+              </a:rPr>
+              <a:t>Datums and accurate marking out</a:t>
+            </a:r>
+          </a:p>
+          <a:p xmlns:a="http://schemas.openxmlformats.org/drawingml/2006/main">
+            <a:pPr algn="l">
+              <a:buNone/>
+              <a:defRPr sz="2400">
+                <a:solidFill>
+                  <a:srgbClr val="000000"/>
+                </a:solidFill>
+                <a:latin typeface="Helvetica Neue"/>
+                <a:ea typeface="Helvetica Neue"/>
+                <a:cs typeface="Helvetica Neue"/>
+              </a:defRPr>
+            </a:pPr>
+            <a:r>
+              <a:t/>
+            </a:r>
+          </a:p>
+          <a:p xmlns:a="http://schemas.openxmlformats.org/drawingml/2006/main">
+            <a:pPr algn="l">
+              <a:lnSpc>
+                <a:spcPct val="108000"/>
+              </a:lnSpc>
+              <a:buNone/>
+              <a:defRPr sz="1600" b="0">
+                <a:solidFill>
+                  <a:srgbClr val="173126"/>
+                </a:solidFill>
+                <a:latin typeface="Aptos"/>
+                <a:ea typeface="Aptos"/>
+                <a:cs typeface="Aptos"/>
+              </a:defRPr>
+            </a:pPr>
+            <a:r>
+              <a:rPr sz="1600" b="0">
+                <a:solidFill>
+                  <a:srgbClr val="173126"/>
+                </a:solidFill>
+                <a:latin typeface="Aptos"/>
+                <a:ea typeface="Aptos"/>
+                <a:cs typeface="Aptos"/>
+              </a:rPr>
+              <a:t>Select: Identify the reliable datum or reference edge.</a:t>
+            </a:r>
+          </a:p>
+        </p:txBody>
+      </p:sp>
+      <p:sp>
+        <p:nvSpPr>
+          <p:cNvPr id="19" name="">
+            <a:extLst xmlns:a="http://schemas.openxmlformats.org/drawingml/2006/main">
+              <a:ext uri="{FF2B5EF4-FFF2-40B4-BE49-F238E27FC236}">
+                <a16:creationId xmlns:a16="http://schemas.microsoft.com/office/drawing/2014/main" id="{E488D932-45C4-4802-BC53-EFEAD8922EE5}"/>
+              </a:ext>
+            </a:extLst>
+          </p:cNvPr>
+          <p:cNvSpPr>
+            <a:spLocks xmlns:a="http://schemas.openxmlformats.org/drawingml/2006/main" noGrp="1"/>
+          </p:cNvSpPr>
+          <p:nvPr/>
+        </p:nvSpPr>
+        <p:spPr>
+          <a:xfrm xmlns:a="http://schemas.openxmlformats.org/drawingml/2006/main">
+            <a:off x="590550" y="1190625"/>
+            <a:ext cx="9334500" cy="381000"/>
+          </a:xfrm>
+          <a:prstGeom xmlns:a="http://schemas.openxmlformats.org/drawingml/2006/main" prst="rect">
+            <a:avLst/>
+          </a:prstGeom>
+          <a:noFill xmlns:a="http://schemas.openxmlformats.org/drawingml/2006/main"/>
+          <a:ln xmlns:a="http://schemas.openxmlformats.org/drawingml/2006/main" w="0">
+            <a:noFill/>
+            <a:prstDash val="solid"/>
+          </a:ln>
+        </p:spPr>
+        <p:txBody>
+          <a:bodyPr xmlns:a="http://schemas.openxmlformats.org/drawingml/2006/main" lIns="38100" tIns="38100" rIns="38100" bIns="38100" anchor="t">
+            <a:normAutofit fontScale="95238"/>
+          </a:bodyPr>
+          <a:lstStyle xmlns:a="http://schemas.openxmlformats.org/drawingml/2006/main"/>
+          <a:p xmlns:a="http://schemas.openxmlformats.org/drawingml/2006/main">
+            <a:pPr algn="l">
+              <a:lnSpc>
+                <a:spcPct val="105000"/>
+              </a:lnSpc>
+              <a:buNone/>
+              <a:defRPr sz="2000" b="0">
+                <a:solidFill>
+                  <a:srgbClr val="5A665F"/>
+                </a:solidFill>
+                <a:latin typeface="Aptos"/>
+                <a:ea typeface="Aptos"/>
+                <a:cs typeface="Aptos"/>
+              </a:defRPr>
+            </a:pPr>
+            <a:r>
+              <a:rPr sz="2000" b="0">
+                <a:solidFill>
+                  <a:srgbClr val="5A665F"/>
+                </a:solidFill>
+                <a:latin typeface="Aptos"/>
+                <a:ea typeface="Aptos"/>
+                <a:cs typeface="Aptos"/>
+              </a:rPr>
+              <a:t>Move from understanding → safe application → evidence you can explain.</a:t>
+            </a:r>
+          </a:p>
+        </p:txBody>
+      </p:sp>
+      <p:sp>
+        <p:nvSpPr>
+          <p:cNvPr id="20" name="">
+            <a:extLst xmlns:a="http://schemas.openxmlformats.org/drawingml/2006/main">
+              <a:ext uri="{FF2B5EF4-FFF2-40B4-BE49-F238E27FC236}">
+                <a16:creationId xmlns:a16="http://schemas.microsoft.com/office/drawing/2014/main" id="{0D94DEEA-B87C-4FC7-B911-F7FE85CB503D}"/>
+              </a:ext>
+            </a:extLst>
+          </p:cNvPr>
+          <p:cNvSpPr>
+            <a:spLocks xmlns:a="http://schemas.openxmlformats.org/drawingml/2006/main" noGrp="1"/>
+          </p:cNvSpPr>
+          <p:nvPr/>
+        </p:nvSpPr>
+        <p:spPr>
+          <a:xfrm xmlns:a="http://schemas.openxmlformats.org/drawingml/2006/main">
+            <a:off x="666750" y="1952625"/>
+            <a:ext cx="2952750" cy="3333750"/>
+          </a:xfrm>
+          <a:prstGeom xmlns:a="http://schemas.openxmlformats.org/drawingml/2006/main" prst="roundRect">
+            <a:avLst>
+              <a:gd name="adj" fmla="val 3871"/>
+            </a:avLst>
+          </a:prstGeom>
+          <a:noFill xmlns:a="http://schemas.openxmlformats.org/drawingml/2006/main"/>
           <a:ln xmlns:a="http://schemas.openxmlformats.org/drawingml/2006/main" w="9525">
             <a:solidFill>
-              <a:srgbClr val="000000"/>
+              <a:srgbClr val="EAD2AE"/>
             </a:solidFill>
             <a:prstDash val="solid"/>
           </a:ln>
         </p:spPr>
-      </p:cxnSp>
-      <p:sp>
-        <p:nvSpPr>
-          <p:cNvPr id="4" name="Google-Shape-2260-p159-5">
-            <a:extLst xmlns:a="http://schemas.openxmlformats.org/drawingml/2006/main">
-              <a:ext uri="{FF2B5EF4-FFF2-40B4-BE49-F238E27FC236}">
-                <a16:creationId xmlns:a16="http://schemas.microsoft.com/office/drawing/2014/main" id="{82997E6F-129E-4BF8-9AC6-79F1B91555ED}"/>
-              </a:ext>
-            </a:extLst>
-          </p:cNvPr>
-          <p:cNvSpPr>
-            <a:spLocks xmlns:a="http://schemas.openxmlformats.org/drawingml/2006/main" noGrp="1"/>
-          </p:cNvSpPr>
-          <p:nvPr/>
-        </p:nvSpPr>
-        <p:spPr>
-          <a:xfrm xmlns:a="http://schemas.openxmlformats.org/drawingml/2006/main">
-            <a:off x="337757" y="3320225"/>
-            <a:ext cx="107061" cy="107061"/>
-          </a:xfrm>
-          <a:prstGeom xmlns:a="http://schemas.openxmlformats.org/drawingml/2006/main" prst="ellipse">
-            <a:avLst/>
-          </a:prstGeom>
-          <a:solidFill xmlns:a="http://schemas.openxmlformats.org/drawingml/2006/main">
-            <a:srgbClr val="000000"/>
-          </a:solidFill>
-        </p:spPr>
-      </p:sp>
-      <p:sp>
-        <p:nvSpPr>
-          <p:cNvPr id="5" name="Google-Shape-2261-p159-6">
-            <a:extLst xmlns:a="http://schemas.openxmlformats.org/drawingml/2006/main">
-              <a:ext uri="{FF2B5EF4-FFF2-40B4-BE49-F238E27FC236}">
-                <a16:creationId xmlns:a16="http://schemas.microsoft.com/office/drawing/2014/main" id="{60362BB6-7EF4-4DED-AB3C-DCADA7E98B1A}"/>
-              </a:ext>
-            </a:extLst>
-          </p:cNvPr>
-          <p:cNvSpPr>
-            <a:spLocks xmlns:a="http://schemas.openxmlformats.org/drawingml/2006/main" noGrp="1"/>
-          </p:cNvSpPr>
-          <p:nvPr/>
-        </p:nvSpPr>
-        <p:spPr>
-          <a:xfrm xmlns:a="http://schemas.openxmlformats.org/drawingml/2006/main">
-            <a:off x="4251770" y="3320225"/>
-            <a:ext cx="107061" cy="107061"/>
-          </a:xfrm>
-          <a:prstGeom xmlns:a="http://schemas.openxmlformats.org/drawingml/2006/main" prst="ellipse">
-            <a:avLst/>
-          </a:prstGeom>
-          <a:solidFill xmlns:a="http://schemas.openxmlformats.org/drawingml/2006/main">
-            <a:srgbClr val="000000"/>
-          </a:solidFill>
-        </p:spPr>
-      </p:sp>
-      <p:sp>
-        <p:nvSpPr>
-          <p:cNvPr id="6" name="Google-Shape-2262-p159-7">
-            <a:extLst xmlns:a="http://schemas.openxmlformats.org/drawingml/2006/main">
-              <a:ext uri="{FF2B5EF4-FFF2-40B4-BE49-F238E27FC236}">
-                <a16:creationId xmlns:a16="http://schemas.microsoft.com/office/drawing/2014/main" id="{6070AB5C-EE92-4587-AFA7-4FDD0DBE445E}"/>
-              </a:ext>
-            </a:extLst>
-          </p:cNvPr>
-          <p:cNvSpPr>
-            <a:spLocks xmlns:a="http://schemas.openxmlformats.org/drawingml/2006/main" noGrp="1"/>
-          </p:cNvSpPr>
-          <p:nvPr/>
-        </p:nvSpPr>
-        <p:spPr>
-          <a:xfrm xmlns:a="http://schemas.openxmlformats.org/drawingml/2006/main">
-            <a:off x="8176070" y="3320225"/>
-            <a:ext cx="107061" cy="107061"/>
-          </a:xfrm>
-          <a:prstGeom xmlns:a="http://schemas.openxmlformats.org/drawingml/2006/main" prst="ellipse">
-            <a:avLst/>
-          </a:prstGeom>
-          <a:solidFill xmlns:a="http://schemas.openxmlformats.org/drawingml/2006/main">
-            <a:srgbClr val="000000"/>
-          </a:solidFill>
-        </p:spPr>
-      </p:sp>
-      <p:sp>
-        <p:nvSpPr>
-          <p:cNvPr id="7" name="Content-Placeholder-15-8">
-            <a:extLst xmlns:a="http://schemas.openxmlformats.org/drawingml/2006/main">
-              <a:ext uri="{FF2B5EF4-FFF2-40B4-BE49-F238E27FC236}">
-                <a16:creationId xmlns:a16="http://schemas.microsoft.com/office/drawing/2014/main" id="{1BB47680-0EA5-4476-9BC4-C970FDD82927}"/>
-              </a:ext>
-            </a:extLst>
-          </p:cNvPr>
-          <p:cNvSpPr>
-            <a:spLocks xmlns:a="http://schemas.openxmlformats.org/drawingml/2006/main" noGrp="1"/>
-          </p:cNvSpPr>
-          <p:nvPr/>
-        </p:nvSpPr>
-        <p:spPr>
-          <a:xfrm xmlns:a="http://schemas.openxmlformats.org/drawingml/2006/main">
-            <a:off x="393668" y="2843308"/>
-            <a:ext cx="1612868" cy="262414"/>
-          </a:xfrm>
-          <a:prstGeom xmlns:a="http://schemas.openxmlformats.org/drawingml/2006/main" prst="rect">
-            <a:avLst/>
-          </a:prstGeom>
-        </p:spPr>
-        <p:txBody>
-          <a:bodyPr xmlns:a="http://schemas.openxmlformats.org/drawingml/2006/main" lIns="0" tIns="0" rIns="0" bIns="0">
-            <a:noAutofit/>
-          </a:bodyPr>
-          <a:lstStyle xmlns:a="http://schemas.openxmlformats.org/drawingml/2006/main"/>
-          <a:p xmlns:a="http://schemas.openxmlformats.org/drawingml/2006/main">
-            <a:pPr algn="l">
-              <a:defRPr sz="1600">
-                <a:solidFill>
-                  <a:srgbClr val="000000"/>
-                </a:solidFill>
-                <a:latin typeface="Helvetica Neue"/>
-                <a:ea typeface="Helvetica Neue"/>
-                <a:cs typeface="Helvetica Neue"/>
-              </a:defRPr>
-            </a:pPr>
-            <a:r>
-              <a:t>LEARN</a:t>
-            </a:r>
-          </a:p>
-        </p:txBody>
-      </p:sp>
-      <p:sp>
-        <p:nvSpPr>
-          <p:cNvPr id="8" name="Content-Placeholder-15-9">
-            <a:extLst xmlns:a="http://schemas.openxmlformats.org/drawingml/2006/main">
-              <a:ext uri="{FF2B5EF4-FFF2-40B4-BE49-F238E27FC236}">
-                <a16:creationId xmlns:a16="http://schemas.microsoft.com/office/drawing/2014/main" id="{5E4954AE-EFDE-4890-A144-F2E3FC7E1263}"/>
-              </a:ext>
-            </a:extLst>
-          </p:cNvPr>
-          <p:cNvSpPr>
-            <a:spLocks xmlns:a="http://schemas.openxmlformats.org/drawingml/2006/main" noGrp="1"/>
-          </p:cNvSpPr>
-          <p:nvPr/>
-        </p:nvSpPr>
-        <p:spPr>
-          <a:xfrm xmlns:a="http://schemas.openxmlformats.org/drawingml/2006/main">
-            <a:off x="4294156" y="2843308"/>
-            <a:ext cx="1612868" cy="262414"/>
-          </a:xfrm>
-          <a:prstGeom xmlns:a="http://schemas.openxmlformats.org/drawingml/2006/main" prst="rect">
-            <a:avLst/>
-          </a:prstGeom>
-        </p:spPr>
-        <p:txBody>
-          <a:bodyPr xmlns:a="http://schemas.openxmlformats.org/drawingml/2006/main" lIns="0" tIns="0" rIns="0" bIns="0">
-            <a:noAutofit/>
-          </a:bodyPr>
-          <a:lstStyle xmlns:a="http://schemas.openxmlformats.org/drawingml/2006/main"/>
-          <a:p xmlns:a="http://schemas.openxmlformats.org/drawingml/2006/main">
-            <a:pPr algn="l">
-              <a:defRPr sz="1600">
-                <a:solidFill>
-                  <a:srgbClr val="000000"/>
-                </a:solidFill>
-                <a:latin typeface="Helvetica Neue"/>
-                <a:ea typeface="Helvetica Neue"/>
-                <a:cs typeface="Helvetica Neue"/>
-              </a:defRPr>
-            </a:pPr>
-            <a:r>
-              <a:t>DECIDE</a:t>
-            </a:r>
-          </a:p>
-        </p:txBody>
-      </p:sp>
-      <p:sp>
-        <p:nvSpPr>
-          <p:cNvPr id="9" name="Content-Placeholder-15-10">
-            <a:extLst xmlns:a="http://schemas.openxmlformats.org/drawingml/2006/main">
-              <a:ext uri="{FF2B5EF4-FFF2-40B4-BE49-F238E27FC236}">
-                <a16:creationId xmlns:a16="http://schemas.microsoft.com/office/drawing/2014/main" id="{ACC1FA45-56F9-4E26-90F5-E8CB99085CAB}"/>
-              </a:ext>
-            </a:extLst>
-          </p:cNvPr>
-          <p:cNvSpPr>
-            <a:spLocks xmlns:a="http://schemas.openxmlformats.org/drawingml/2006/main" noGrp="1"/>
-          </p:cNvSpPr>
-          <p:nvPr/>
-        </p:nvSpPr>
-        <p:spPr>
-          <a:xfrm xmlns:a="http://schemas.openxmlformats.org/drawingml/2006/main">
-            <a:off x="8223218" y="2843308"/>
-            <a:ext cx="1612868" cy="262414"/>
-          </a:xfrm>
-          <a:prstGeom xmlns:a="http://schemas.openxmlformats.org/drawingml/2006/main" prst="rect">
-            <a:avLst/>
-          </a:prstGeom>
-        </p:spPr>
-        <p:txBody>
-          <a:bodyPr xmlns:a="http://schemas.openxmlformats.org/drawingml/2006/main" lIns="0" tIns="0" rIns="0" bIns="0">
-            <a:noAutofit/>
-          </a:bodyPr>
-          <a:lstStyle xmlns:a="http://schemas.openxmlformats.org/drawingml/2006/main"/>
-          <a:p xmlns:a="http://schemas.openxmlformats.org/drawingml/2006/main">
-            <a:pPr algn="l">
-              <a:defRPr sz="1600">
-                <a:solidFill>
-                  <a:srgbClr val="000000"/>
-                </a:solidFill>
-                <a:latin typeface="Helvetica Neue"/>
-                <a:ea typeface="Helvetica Neue"/>
-                <a:cs typeface="Helvetica Neue"/>
-              </a:defRPr>
-            </a:pPr>
-            <a:r>
-              <a:t>EVIDENCE</a:t>
-            </a:r>
-          </a:p>
-        </p:txBody>
-      </p:sp>
-      <p:sp>
-        <p:nvSpPr>
-          <p:cNvPr id="10" name="Text-Placeholder-16-11">
-            <a:extLst xmlns:a="http://schemas.openxmlformats.org/drawingml/2006/main">
-              <a:ext uri="{FF2B5EF4-FFF2-40B4-BE49-F238E27FC236}">
-                <a16:creationId xmlns:a16="http://schemas.microsoft.com/office/drawing/2014/main" id="{08770A78-C138-4414-8E73-CD1E1810868F}"/>
-              </a:ext>
-            </a:extLst>
-          </p:cNvPr>
-          <p:cNvSpPr>
-            <a:spLocks xmlns:a="http://schemas.openxmlformats.org/drawingml/2006/main" noGrp="1"/>
-          </p:cNvSpPr>
-          <p:nvPr/>
-        </p:nvSpPr>
-        <p:spPr>
-          <a:xfrm xmlns:a="http://schemas.openxmlformats.org/drawingml/2006/main">
-            <a:off x="4317111" y="3822668"/>
-            <a:ext cx="3156109" cy="1586294"/>
-          </a:xfrm>
-          <a:prstGeom xmlns:a="http://schemas.openxmlformats.org/drawingml/2006/main" prst="rect">
-            <a:avLst/>
-          </a:prstGeom>
-        </p:spPr>
-        <p:txBody>
-          <a:bodyPr xmlns:a="http://schemas.openxmlformats.org/drawingml/2006/main" lIns="0" tIns="0" rIns="0" bIns="0">
-            <a:noAutofit/>
-          </a:bodyPr>
-          <a:lstStyle xmlns:a="http://schemas.openxmlformats.org/drawingml/2006/main"/>
-          <a:p xmlns:a="http://schemas.openxmlformats.org/drawingml/2006/main">
-            <a:pPr algn="l">
-              <a:defRPr sz="2400">
-                <a:solidFill>
-                  <a:srgbClr val="000000"/>
-                </a:solidFill>
-                <a:latin typeface="Helvetica Neue"/>
-                <a:ea typeface="Helvetica Neue"/>
-                <a:cs typeface="Helvetica Neue"/>
-              </a:defRPr>
-            </a:pPr>
-            <a:r>
-              <a:t>Plan parts and time</a:t>
-            </a:r>
-          </a:p>
-          <a:p xmlns:a="http://schemas.openxmlformats.org/drawingml/2006/main">
-            <a:pPr algn="l">
-              <a:defRPr sz="2400">
-                <a:solidFill>
-                  <a:srgbClr val="000000"/>
-                </a:solidFill>
-                <a:latin typeface="Helvetica Neue"/>
-                <a:ea typeface="Helvetica Neue"/>
-                <a:cs typeface="Helvetica Neue"/>
-              </a:defRPr>
-            </a:pPr>
-            <a:r>
-              <a:t>List each part, quantity, material and dimension</a:t>
-            </a:r>
-          </a:p>
-        </p:txBody>
-      </p:sp>
-      <p:sp>
-        <p:nvSpPr>
-          <p:cNvPr id="11" name="Text-Placeholder-16-12">
-            <a:extLst xmlns:a="http://schemas.openxmlformats.org/drawingml/2006/main">
-              <a:ext uri="{FF2B5EF4-FFF2-40B4-BE49-F238E27FC236}">
-                <a16:creationId xmlns:a16="http://schemas.microsoft.com/office/drawing/2014/main" id="{EF75FAE2-2945-439C-89BF-B26B8BA73022}"/>
-              </a:ext>
-            </a:extLst>
-          </p:cNvPr>
-          <p:cNvSpPr>
-            <a:spLocks xmlns:a="http://schemas.openxmlformats.org/drawingml/2006/main" noGrp="1"/>
-          </p:cNvSpPr>
-          <p:nvPr/>
-        </p:nvSpPr>
-        <p:spPr>
-          <a:xfrm xmlns:a="http://schemas.openxmlformats.org/drawingml/2006/main">
-            <a:off x="399859" y="3822668"/>
-            <a:ext cx="3156109" cy="1586294"/>
-          </a:xfrm>
-          <a:prstGeom xmlns:a="http://schemas.openxmlformats.org/drawingml/2006/main" prst="rect">
-            <a:avLst/>
-          </a:prstGeom>
-        </p:spPr>
-        <p:txBody>
-          <a:bodyPr xmlns:a="http://schemas.openxmlformats.org/drawingml/2006/main" lIns="0" tIns="0" rIns="0" bIns="0">
-            <a:noAutofit/>
-          </a:bodyPr>
-          <a:lstStyle xmlns:a="http://schemas.openxmlformats.org/drawingml/2006/main"/>
-          <a:p xmlns:a="http://schemas.openxmlformats.org/drawingml/2006/main">
-            <a:pPr algn="l">
-              <a:defRPr sz="2400">
-                <a:solidFill>
-                  <a:srgbClr val="000000"/>
-                </a:solidFill>
-                <a:latin typeface="Helvetica Neue"/>
-                <a:ea typeface="Helvetica Neue"/>
-                <a:cs typeface="Helvetica Neue"/>
-              </a:defRPr>
-            </a:pPr>
-            <a:r>
-              <a:t>Make drawings control production</a:t>
-            </a:r>
-          </a:p>
-          <a:p xmlns:a="http://schemas.openxmlformats.org/drawingml/2006/main">
-            <a:pPr algn="l">
-              <a:defRPr sz="2400">
-                <a:solidFill>
-                  <a:srgbClr val="000000"/>
-                </a:solidFill>
-                <a:latin typeface="Helvetica Neue"/>
-                <a:ea typeface="Helvetica Neue"/>
-                <a:cs typeface="Helvetica Neue"/>
-              </a:defRPr>
-            </a:pPr>
-            <a:r>
-              <a:t>Show related orthographic views</a:t>
-            </a:r>
-          </a:p>
-        </p:txBody>
-      </p:sp>
-      <p:sp>
-        <p:nvSpPr>
-          <p:cNvPr id="12" name="Text-Placeholder-16-13">
-            <a:extLst xmlns:a="http://schemas.openxmlformats.org/drawingml/2006/main">
-              <a:ext uri="{FF2B5EF4-FFF2-40B4-BE49-F238E27FC236}">
-                <a16:creationId xmlns:a16="http://schemas.microsoft.com/office/drawing/2014/main" id="{71B2876A-0BF6-4157-B18A-EF70B1BF539D}"/>
-              </a:ext>
-            </a:extLst>
-          </p:cNvPr>
-          <p:cNvSpPr>
-            <a:spLocks xmlns:a="http://schemas.openxmlformats.org/drawingml/2006/main" noGrp="1"/>
-          </p:cNvSpPr>
-          <p:nvPr/>
-        </p:nvSpPr>
-        <p:spPr>
-          <a:xfrm xmlns:a="http://schemas.openxmlformats.org/drawingml/2006/main">
-            <a:off x="8177879" y="3822668"/>
-            <a:ext cx="3156109" cy="1586294"/>
-          </a:xfrm>
-          <a:prstGeom xmlns:a="http://schemas.openxmlformats.org/drawingml/2006/main" prst="rect">
-            <a:avLst/>
-          </a:prstGeom>
-        </p:spPr>
-        <p:txBody>
-          <a:bodyPr xmlns:a="http://schemas.openxmlformats.org/drawingml/2006/main" lIns="0" tIns="0" rIns="0" bIns="0">
-            <a:noAutofit/>
-          </a:bodyPr>
-          <a:lstStyle xmlns:a="http://schemas.openxmlformats.org/drawingml/2006/main"/>
-          <a:p xmlns:a="http://schemas.openxmlformats.org/drawingml/2006/main">
-            <a:pPr algn="l">
-              <a:defRPr sz="2400">
-                <a:solidFill>
-                  <a:srgbClr val="000000"/>
-                </a:solidFill>
-                <a:latin typeface="Helvetica Neue"/>
-                <a:ea typeface="Helvetica Neue"/>
-                <a:cs typeface="Helvetica Neue"/>
-              </a:defRPr>
-            </a:pPr>
-            <a:r>
-              <a:t>Mark from a reliable datum</a:t>
-            </a:r>
-          </a:p>
-          <a:p xmlns:a="http://schemas.openxmlformats.org/drawingml/2006/main">
-            <a:pPr algn="l">
-              <a:defRPr sz="2400">
-                <a:solidFill>
-                  <a:srgbClr val="000000"/>
-                </a:solidFill>
-                <a:latin typeface="Helvetica Neue"/>
-                <a:ea typeface="Helvetica Neue"/>
-                <a:cs typeface="Helvetica Neue"/>
-              </a:defRPr>
-            </a:pPr>
-            <a:r>
-              <a:t>Align the rule zero with the datum</a:t>
-            </a:r>
-          </a:p>
-        </p:txBody>
+      </p:sp>
+      <p:sp>
+        <p:nvSpPr>
+          <p:cNvPr id="21" name="">
+            <a:extLst xmlns:a="http://schemas.openxmlformats.org/drawingml/2006/main">
+              <a:ext uri="{FF2B5EF4-FFF2-40B4-BE49-F238E27FC236}">
+                <a16:creationId xmlns:a16="http://schemas.microsoft.com/office/drawing/2014/main" id="{29143DE2-4970-48E3-8CBE-827D55F9EAF0}"/>
+              </a:ext>
+            </a:extLst>
+          </p:cNvPr>
+          <p:cNvSpPr>
+            <a:spLocks xmlns:a="http://schemas.openxmlformats.org/drawingml/2006/main" noGrp="1"/>
+          </p:cNvSpPr>
+          <p:nvPr/>
+        </p:nvSpPr>
+        <p:spPr>
+          <a:xfrm xmlns:a="http://schemas.openxmlformats.org/drawingml/2006/main">
+            <a:off x="4286250" y="1952625"/>
+            <a:ext cx="2952750" cy="3333750"/>
+          </a:xfrm>
+          <a:prstGeom xmlns:a="http://schemas.openxmlformats.org/drawingml/2006/main" prst="roundRect">
+            <a:avLst>
+              <a:gd name="adj" fmla="val 3871"/>
+            </a:avLst>
+          </a:prstGeom>
+          <a:noFill xmlns:a="http://schemas.openxmlformats.org/drawingml/2006/main"/>
+          <a:ln xmlns:a="http://schemas.openxmlformats.org/drawingml/2006/main" w="9525">
+            <a:solidFill>
+              <a:srgbClr val="D8941C"/>
+            </a:solidFill>
+            <a:prstDash val="solid"/>
+          </a:ln>
+        </p:spPr>
+      </p:sp>
+      <p:sp>
+        <p:nvSpPr>
+          <p:cNvPr id="22" name="">
+            <a:extLst xmlns:a="http://schemas.openxmlformats.org/drawingml/2006/main">
+              <a:ext uri="{FF2B5EF4-FFF2-40B4-BE49-F238E27FC236}">
+                <a16:creationId xmlns:a16="http://schemas.microsoft.com/office/drawing/2014/main" id="{9B0C3839-D2CF-41F5-9E87-9BBBA9E84C08}"/>
+              </a:ext>
+            </a:extLst>
+          </p:cNvPr>
+          <p:cNvSpPr>
+            <a:spLocks xmlns:a="http://schemas.openxmlformats.org/drawingml/2006/main" noGrp="1"/>
+          </p:cNvSpPr>
+          <p:nvPr/>
+        </p:nvSpPr>
+        <p:spPr>
+          <a:xfrm xmlns:a="http://schemas.openxmlformats.org/drawingml/2006/main">
+            <a:off x="7905750" y="1952625"/>
+            <a:ext cx="2952750" cy="3333750"/>
+          </a:xfrm>
+          <a:prstGeom xmlns:a="http://schemas.openxmlformats.org/drawingml/2006/main" prst="roundRect">
+            <a:avLst>
+              <a:gd name="adj" fmla="val 3871"/>
+            </a:avLst>
+          </a:prstGeom>
+          <a:noFill xmlns:a="http://schemas.openxmlformats.org/drawingml/2006/main"/>
+          <a:ln xmlns:a="http://schemas.openxmlformats.org/drawingml/2006/main" w="9525">
+            <a:solidFill>
+              <a:srgbClr val="EAD2AE"/>
+            </a:solidFill>
+            <a:prstDash val="solid"/>
+          </a:ln>
+        </p:spPr>
       </p:sp>
     </p:spTree>
     <p:extLst>
@@ -2302,6 +2888,13 @@
 <file path=ppt/slides/slide3.xml><?xml version="1.0" encoding="utf-8"?>
 <p:sld xmlns:p="http://schemas.openxmlformats.org/presentationml/2006/main">
   <p:cSld>
+    <p:bg>
+      <p:bgPr>
+        <a:solidFill xmlns:a="http://schemas.openxmlformats.org/drawingml/2006/main">
+          <a:srgbClr val="F8F2E8"/>
+        </a:solidFill>
+      </p:bgPr>
+    </p:bg>
     <p:spTree>
       <p:nvGrpSpPr>
         <p:cNvPr id="1" name=""/>
@@ -2327,28 +2920,42 @@
         </p:nvSpPr>
         <p:spPr>
           <a:xfrm xmlns:a="http://schemas.openxmlformats.org/drawingml/2006/main">
-            <a:off x="11279219" y="6278594"/>
-            <a:ext cx="519113" cy="241268"/>
+            <a:off x="11334750" y="6496050"/>
+            <a:ext cx="400050" cy="190500"/>
           </a:xfrm>
           <a:prstGeom xmlns:a="http://schemas.openxmlformats.org/drawingml/2006/main" prst="rect">
             <a:avLst/>
           </a:prstGeom>
         </p:spPr>
         <p:txBody>
-          <a:bodyPr xmlns:a="http://schemas.openxmlformats.org/drawingml/2006/main" lIns="0" tIns="0" rIns="0" bIns="0" anchor="b"/>
+          <a:bodyPr xmlns:a="http://schemas.openxmlformats.org/drawingml/2006/main" lIns="38100" tIns="38100" rIns="38100" bIns="38100" anchor="ctr">
+            <a:normAutofit fontScale="64935"/>
+          </a:bodyPr>
           <a:lstStyle xmlns:a="http://schemas.openxmlformats.org/drawingml/2006/main"/>
           <a:p xmlns:a="http://schemas.openxmlformats.org/drawingml/2006/main">
             <a:pPr algn="r">
-              <a:defRPr sz="1000">
-                <a:solidFill>
-                  <a:srgbClr val="000000"/>
-                </a:solidFill>
-                <a:latin typeface="Helvetica Neue"/>
-                <a:ea typeface="Helvetica Neue"/>
-                <a:cs typeface="Helvetica Neue"/>
-              </a:defRPr>
-            </a:pPr>
-            <a:r>
+              <a:lnSpc>
+                <a:spcPct val="105000"/>
+              </a:lnSpc>
+              <a:buNone/>
+              <a:defRPr sz="1100" b="1">
+                <a:solidFill>
+                  <a:srgbClr val="5A665F"/>
+                </a:solidFill>
+                <a:latin typeface="Aptos"/>
+                <a:ea typeface="Aptos"/>
+                <a:cs typeface="Aptos"/>
+              </a:defRPr>
+            </a:pPr>
+            <a:r>
+              <a:rPr sz="1100" b="1">
+                <a:solidFill>
+                  <a:srgbClr val="5A665F"/>
+                </a:solidFill>
+                <a:latin typeface="Aptos"/>
+                <a:ea typeface="Aptos"/>
+                <a:cs typeface="Aptos"/>
+              </a:rPr>
               <a:t>3</a:t>
             </a:r>
           </a:p>
@@ -2370,267 +2977,455 @@
         </p:nvSpPr>
         <p:spPr>
           <a:xfrm xmlns:a="http://schemas.openxmlformats.org/drawingml/2006/main">
-            <a:off x="393668" y="344043"/>
-            <a:ext cx="11404568" cy="1047464"/>
+            <a:off x="571500" y="533400"/>
+            <a:ext cx="5191125" cy="1504950"/>
           </a:xfrm>
           <a:prstGeom xmlns:a="http://schemas.openxmlformats.org/drawingml/2006/main" prst="rect">
             <a:avLst/>
           </a:prstGeom>
         </p:spPr>
         <p:txBody>
-          <a:bodyPr xmlns:a="http://schemas.openxmlformats.org/drawingml/2006/main" lIns="0" tIns="0" rIns="0" bIns="0" anchor="t">
+          <a:bodyPr xmlns:a="http://schemas.openxmlformats.org/drawingml/2006/main" lIns="38100" tIns="38100" rIns="38100" bIns="38100" anchor="t">
+            <a:normAutofit fontScale="91108"/>
+          </a:bodyPr>
+          <a:lstStyle xmlns:a="http://schemas.openxmlformats.org/drawingml/2006/main"/>
+          <a:p xmlns:a="http://schemas.openxmlformats.org/drawingml/2006/main">
+            <a:pPr algn="l">
+              <a:lnSpc>
+                <a:spcPct val="98000"/>
+              </a:lnSpc>
+              <a:buNone/>
+              <a:defRPr sz="3500" b="1">
+                <a:solidFill>
+                  <a:srgbClr val="173126"/>
+                </a:solidFill>
+                <a:latin typeface="Aptos"/>
+                <a:ea typeface="Aptos"/>
+                <a:cs typeface="Aptos"/>
+              </a:defRPr>
+            </a:pPr>
+            <a:r>
+              <a:rPr sz="3500" b="1">
+                <a:solidFill>
+                  <a:srgbClr val="173126"/>
+                </a:solidFill>
+                <a:latin typeface="Aptos"/>
+                <a:ea typeface="Aptos"/>
+                <a:cs typeface="Aptos"/>
+              </a:rPr>
+              <a:t>Communicating the selected design with working drawings</a:t>
+            </a:r>
+          </a:p>
+        </p:txBody>
+      </p:sp>
+      <p:sp>
+        <p:nvSpPr>
+          <p:cNvPr id="3" name="Content-Placeholder-9-4">
+            <a:extLst xmlns:a="http://schemas.openxmlformats.org/drawingml/2006/main">
+              <a:ext uri="{FF2B5EF4-FFF2-40B4-BE49-F238E27FC236}">
+                <a16:creationId xmlns:a16="http://schemas.microsoft.com/office/drawing/2014/main" id="{7B53DDFF-7032-4002-B0B5-03F6646F6DC9}"/>
+              </a:ext>
+            </a:extLst>
+          </p:cNvPr>
+          <p:cNvSpPr>
+            <a:spLocks xmlns:a="http://schemas.openxmlformats.org/drawingml/2006/main" noGrp="1"/>
+          </p:cNvSpPr>
+          <p:nvPr/>
+        </p:nvSpPr>
+        <p:spPr>
+          <a:xfrm xmlns:a="http://schemas.openxmlformats.org/drawingml/2006/main">
+            <a:off x="685800" y="2095500"/>
+            <a:ext cx="4905375" cy="723900"/>
+          </a:xfrm>
+          <a:prstGeom xmlns:a="http://schemas.openxmlformats.org/drawingml/2006/main" prst="rect">
+            <a:avLst/>
+          </a:prstGeom>
+        </p:spPr>
+        <p:txBody>
+          <a:bodyPr xmlns:a="http://schemas.openxmlformats.org/drawingml/2006/main" lIns="38100" tIns="38100" rIns="38100" bIns="38100" anchor="ctr">
             <a:normAutofit fontScale="100000"/>
           </a:bodyPr>
           <a:lstStyle xmlns:a="http://schemas.openxmlformats.org/drawingml/2006/main"/>
           <a:p xmlns:a="http://schemas.openxmlformats.org/drawingml/2006/main">
             <a:pPr algn="l">
-              <a:defRPr sz="2900">
-                <a:solidFill>
-                  <a:srgbClr val="000000"/>
-                </a:solidFill>
-                <a:latin typeface="Helvetica Neue"/>
-                <a:ea typeface="Helvetica Neue"/>
-                <a:cs typeface="Helvetica Neue"/>
-              </a:defRPr>
-            </a:pPr>
-            <a:r>
-              <a:t>Make drawings control production</a:t>
-            </a:r>
-          </a:p>
-        </p:txBody>
-      </p:sp>
-      <p:sp>
-        <p:nvSpPr>
-          <p:cNvPr id="3" name="Content-Placeholder-9-4">
-            <a:extLst xmlns:a="http://schemas.openxmlformats.org/drawingml/2006/main">
-              <a:ext uri="{FF2B5EF4-FFF2-40B4-BE49-F238E27FC236}">
-                <a16:creationId xmlns:a16="http://schemas.microsoft.com/office/drawing/2014/main" id="{7B53DDFF-7032-4002-B0B5-03F6646F6DC9}"/>
-              </a:ext>
-            </a:extLst>
-          </p:cNvPr>
-          <p:cNvSpPr>
-            <a:spLocks xmlns:a="http://schemas.openxmlformats.org/drawingml/2006/main" noGrp="1"/>
-          </p:cNvSpPr>
-          <p:nvPr/>
-        </p:nvSpPr>
-        <p:spPr>
-          <a:xfrm xmlns:a="http://schemas.openxmlformats.org/drawingml/2006/main">
-            <a:off x="393668" y="2031968"/>
-            <a:ext cx="5537168" cy="1643063"/>
+              <a:lnSpc>
+                <a:spcPct val="108000"/>
+              </a:lnSpc>
+              <a:buNone/>
+              <a:defRPr sz="1700" b="0">
+                <a:solidFill>
+                  <a:srgbClr val="173126"/>
+                </a:solidFill>
+                <a:latin typeface="Aptos"/>
+                <a:ea typeface="Aptos"/>
+                <a:cs typeface="Aptos"/>
+              </a:defRPr>
+            </a:pPr>
+            <a:r>
+              <a:rPr sz="1700" b="0">
+                <a:solidFill>
+                  <a:srgbClr val="173126"/>
+                </a:solidFill>
+                <a:latin typeface="Aptos"/>
+                <a:ea typeface="Aptos"/>
+                <a:cs typeface="Aptos"/>
+              </a:rPr>
+              <a:t>01 Match: Confirm the drawings represent the approved design.</a:t>
+            </a:r>
+          </a:p>
+        </p:txBody>
+      </p:sp>
+      <p:sp>
+        <p:nvSpPr>
+          <p:cNvPr id="4" name="Content-Placeholder-10-5">
+            <a:extLst xmlns:a="http://schemas.openxmlformats.org/drawingml/2006/main">
+              <a:ext uri="{FF2B5EF4-FFF2-40B4-BE49-F238E27FC236}">
+                <a16:creationId xmlns:a16="http://schemas.microsoft.com/office/drawing/2014/main" id="{155182AC-9F56-4419-9671-535D93DAFCC4}"/>
+              </a:ext>
+            </a:extLst>
+          </p:cNvPr>
+          <p:cNvSpPr>
+            <a:spLocks xmlns:a="http://schemas.openxmlformats.org/drawingml/2006/main" noGrp="1"/>
+          </p:cNvSpPr>
+          <p:nvPr/>
+        </p:nvSpPr>
+        <p:spPr>
+          <a:xfrm xmlns:a="http://schemas.openxmlformats.org/drawingml/2006/main">
+            <a:off x="685800" y="2905125"/>
+            <a:ext cx="4905375" cy="723900"/>
           </a:xfrm>
           <a:prstGeom xmlns:a="http://schemas.openxmlformats.org/drawingml/2006/main" prst="rect">
             <a:avLst/>
           </a:prstGeom>
         </p:spPr>
         <p:txBody>
-          <a:bodyPr xmlns:a="http://schemas.openxmlformats.org/drawingml/2006/main" lIns="91440" tIns="45720" rIns="91440" bIns="45720"/>
-          <a:lstStyle xmlns:a="http://schemas.openxmlformats.org/drawingml/2006/main"/>
-          <a:p xmlns:a="http://schemas.openxmlformats.org/drawingml/2006/main">
-            <a:pPr algn="l">
-              <a:defRPr sz="2400">
-                <a:solidFill>
-                  <a:srgbClr val="000000"/>
-                </a:solidFill>
-                <a:latin typeface="Helvetica Neue"/>
-                <a:ea typeface="Helvetica Neue"/>
-                <a:cs typeface="Helvetica Neue"/>
-              </a:defRPr>
-            </a:pPr>
-            <a:r>
-              <a:t>1</a:t>
-            </a:r>
-          </a:p>
-          <a:p xmlns:a="http://schemas.openxmlformats.org/drawingml/2006/main">
-            <a:pPr algn="l">
-              <a:defRPr sz="2400">
-                <a:solidFill>
-                  <a:srgbClr val="000000"/>
-                </a:solidFill>
-                <a:latin typeface="Helvetica Neue"/>
-                <a:ea typeface="Helvetica Neue"/>
-                <a:cs typeface="Helvetica Neue"/>
-              </a:defRPr>
-            </a:pPr>
-            <a:r>
-              <a:t>Show related orthographic views</a:t>
-            </a:r>
-          </a:p>
-        </p:txBody>
-      </p:sp>
-      <p:sp>
-        <p:nvSpPr>
-          <p:cNvPr id="4" name="Content-Placeholder-10-5">
-            <a:extLst xmlns:a="http://schemas.openxmlformats.org/drawingml/2006/main">
-              <a:ext uri="{FF2B5EF4-FFF2-40B4-BE49-F238E27FC236}">
-                <a16:creationId xmlns:a16="http://schemas.microsoft.com/office/drawing/2014/main" id="{155182AC-9F56-4419-9671-535D93DAFCC4}"/>
-              </a:ext>
-            </a:extLst>
-          </p:cNvPr>
-          <p:cNvSpPr>
-            <a:spLocks xmlns:a="http://schemas.openxmlformats.org/drawingml/2006/main" noGrp="1"/>
-          </p:cNvSpPr>
-          <p:nvPr/>
-        </p:nvSpPr>
-        <p:spPr>
-          <a:xfrm xmlns:a="http://schemas.openxmlformats.org/drawingml/2006/main">
-            <a:off x="6256592" y="2031968"/>
-            <a:ext cx="5537168" cy="1643063"/>
-          </a:xfrm>
-          <a:prstGeom xmlns:a="http://schemas.openxmlformats.org/drawingml/2006/main" prst="rect">
-            <a:avLst/>
-          </a:prstGeom>
-        </p:spPr>
-        <p:txBody>
-          <a:bodyPr xmlns:a="http://schemas.openxmlformats.org/drawingml/2006/main" lIns="91440" tIns="45720" rIns="91440" bIns="45720"/>
-          <a:lstStyle xmlns:a="http://schemas.openxmlformats.org/drawingml/2006/main"/>
-          <a:p xmlns:a="http://schemas.openxmlformats.org/drawingml/2006/main">
-            <a:pPr algn="l">
-              <a:defRPr sz="2400">
-                <a:solidFill>
-                  <a:srgbClr val="000000"/>
-                </a:solidFill>
-                <a:latin typeface="Helvetica Neue"/>
-                <a:ea typeface="Helvetica Neue"/>
-                <a:cs typeface="Helvetica Neue"/>
-              </a:defRPr>
-            </a:pPr>
-            <a:r>
-              <a:t>2</a:t>
-            </a:r>
-          </a:p>
-          <a:p xmlns:a="http://schemas.openxmlformats.org/drawingml/2006/main">
-            <a:pPr algn="l">
-              <a:defRPr sz="2400">
-                <a:solidFill>
-                  <a:srgbClr val="000000"/>
-                </a:solidFill>
-                <a:latin typeface="Helvetica Neue"/>
-                <a:ea typeface="Helvetica Neue"/>
-                <a:cs typeface="Helvetica Neue"/>
-              </a:defRPr>
-            </a:pPr>
-            <a:r>
-              <a:t>Use the authorised 1:10 scale</a:t>
-            </a:r>
-          </a:p>
-        </p:txBody>
-      </p:sp>
-      <p:sp>
-        <p:nvSpPr>
-          <p:cNvPr id="5" name="Content-Placeholder-9-6">
-            <a:extLst xmlns:a="http://schemas.openxmlformats.org/drawingml/2006/main">
-              <a:ext uri="{FF2B5EF4-FFF2-40B4-BE49-F238E27FC236}">
-                <a16:creationId xmlns:a16="http://schemas.microsoft.com/office/drawing/2014/main" id="{65F57BF0-CC08-4CF5-A0B5-2788DCE22712}"/>
-              </a:ext>
-            </a:extLst>
-          </p:cNvPr>
-          <p:cNvSpPr>
-            <a:spLocks xmlns:a="http://schemas.openxmlformats.org/drawingml/2006/main" noGrp="1"/>
-          </p:cNvSpPr>
-          <p:nvPr/>
-        </p:nvSpPr>
-        <p:spPr>
-          <a:xfrm xmlns:a="http://schemas.openxmlformats.org/drawingml/2006/main">
-            <a:off x="393668" y="4016978"/>
-            <a:ext cx="5537168" cy="1643158"/>
-          </a:xfrm>
-          <a:prstGeom xmlns:a="http://schemas.openxmlformats.org/drawingml/2006/main" prst="rect">
-            <a:avLst/>
-          </a:prstGeom>
-        </p:spPr>
-        <p:txBody>
-          <a:bodyPr xmlns:a="http://schemas.openxmlformats.org/drawingml/2006/main" lIns="0" tIns="0" rIns="0" bIns="0">
+          <a:bodyPr xmlns:a="http://schemas.openxmlformats.org/drawingml/2006/main" lIns="38100" tIns="38100" rIns="38100" bIns="38100" anchor="ctr">
             <a:normAutofit fontScale="100000"/>
           </a:bodyPr>
           <a:lstStyle xmlns:a="http://schemas.openxmlformats.org/drawingml/2006/main"/>
           <a:p xmlns:a="http://schemas.openxmlformats.org/drawingml/2006/main">
             <a:pPr algn="l">
-              <a:defRPr sz="2400">
-                <a:solidFill>
-                  <a:srgbClr val="000000"/>
-                </a:solidFill>
-                <a:latin typeface="Helvetica Neue"/>
-                <a:ea typeface="Helvetica Neue"/>
-                <a:cs typeface="Helvetica Neue"/>
-              </a:defRPr>
-            </a:pPr>
-            <a:r>
-              <a:t>3</a:t>
-            </a:r>
-          </a:p>
-          <a:p xmlns:a="http://schemas.openxmlformats.org/drawingml/2006/main">
-            <a:pPr algn="l">
-              <a:defRPr sz="2400">
-                <a:solidFill>
-                  <a:srgbClr val="000000"/>
-                </a:solidFill>
-                <a:latin typeface="Helvetica Neue"/>
-                <a:ea typeface="Helvetica Neue"/>
-                <a:cs typeface="Helvetica Neue"/>
-              </a:defRPr>
-            </a:pPr>
-            <a:r>
-              <a:t>Write dimensions in millimetres</a:t>
-            </a:r>
-          </a:p>
-        </p:txBody>
-      </p:sp>
-      <p:sp>
-        <p:nvSpPr>
-          <p:cNvPr id="6" name="Content-Placeholder-10-7">
-            <a:extLst xmlns:a="http://schemas.openxmlformats.org/drawingml/2006/main">
-              <a:ext uri="{FF2B5EF4-FFF2-40B4-BE49-F238E27FC236}">
-                <a16:creationId xmlns:a16="http://schemas.microsoft.com/office/drawing/2014/main" id="{A3DCB6C1-837D-4326-B39C-D94416A36807}"/>
-              </a:ext>
-            </a:extLst>
-          </p:cNvPr>
-          <p:cNvSpPr>
-            <a:spLocks xmlns:a="http://schemas.openxmlformats.org/drawingml/2006/main" noGrp="1"/>
-          </p:cNvSpPr>
-          <p:nvPr/>
-        </p:nvSpPr>
-        <p:spPr>
-          <a:xfrm xmlns:a="http://schemas.openxmlformats.org/drawingml/2006/main">
-            <a:off x="6256592" y="4016978"/>
-            <a:ext cx="5537168" cy="1643158"/>
+              <a:lnSpc>
+                <a:spcPct val="108000"/>
+              </a:lnSpc>
+              <a:buNone/>
+              <a:defRPr sz="1700" b="0">
+                <a:solidFill>
+                  <a:srgbClr val="173126"/>
+                </a:solidFill>
+                <a:latin typeface="Aptos"/>
+                <a:ea typeface="Aptos"/>
+                <a:cs typeface="Aptos"/>
+              </a:defRPr>
+            </a:pPr>
+            <a:r>
+              <a:rPr sz="1700" b="0">
+                <a:solidFill>
+                  <a:srgbClr val="173126"/>
+                </a:solidFill>
+                <a:latin typeface="Aptos"/>
+                <a:ea typeface="Aptos"/>
+                <a:cs typeface="Aptos"/>
+              </a:rPr>
+              <a:t>02 Compare: Check that components align across all views.</a:t>
+            </a:r>
+          </a:p>
+        </p:txBody>
+      </p:sp>
+      <p:sp>
+        <p:nvSpPr>
+          <p:cNvPr id="5" name="Content-Placeholder-9-6">
+            <a:extLst xmlns:a="http://schemas.openxmlformats.org/drawingml/2006/main">
+              <a:ext uri="{FF2B5EF4-FFF2-40B4-BE49-F238E27FC236}">
+                <a16:creationId xmlns:a16="http://schemas.microsoft.com/office/drawing/2014/main" id="{65F57BF0-CC08-4CF5-A0B5-2788DCE22712}"/>
+              </a:ext>
+            </a:extLst>
+          </p:cNvPr>
+          <p:cNvSpPr>
+            <a:spLocks xmlns:a="http://schemas.openxmlformats.org/drawingml/2006/main" noGrp="1"/>
+          </p:cNvSpPr>
+          <p:nvPr/>
+        </p:nvSpPr>
+        <p:spPr>
+          <a:xfrm xmlns:a="http://schemas.openxmlformats.org/drawingml/2006/main">
+            <a:off x="685800" y="3714750"/>
+            <a:ext cx="4905375" cy="723900"/>
           </a:xfrm>
           <a:prstGeom xmlns:a="http://schemas.openxmlformats.org/drawingml/2006/main" prst="rect">
             <a:avLst/>
           </a:prstGeom>
         </p:spPr>
         <p:txBody>
-          <a:bodyPr xmlns:a="http://schemas.openxmlformats.org/drawingml/2006/main" lIns="0" tIns="0" rIns="0" bIns="0">
+          <a:bodyPr xmlns:a="http://schemas.openxmlformats.org/drawingml/2006/main" lIns="38100" tIns="38100" rIns="38100" bIns="38100" anchor="ctr">
             <a:normAutofit fontScale="100000"/>
           </a:bodyPr>
           <a:lstStyle xmlns:a="http://schemas.openxmlformats.org/drawingml/2006/main"/>
           <a:p xmlns:a="http://schemas.openxmlformats.org/drawingml/2006/main">
             <a:pPr algn="l">
-              <a:defRPr sz="2400">
-                <a:solidFill>
-                  <a:srgbClr val="000000"/>
-                </a:solidFill>
-                <a:latin typeface="Helvetica Neue"/>
-                <a:ea typeface="Helvetica Neue"/>
-                <a:cs typeface="Helvetica Neue"/>
-              </a:defRPr>
-            </a:pPr>
-            <a:r>
-              <a:t>4</a:t>
-            </a:r>
-          </a:p>
-          <a:p xmlns:a="http://schemas.openxmlformats.org/drawingml/2006/main">
-            <a:pPr algn="l">
-              <a:defRPr sz="2400">
-                <a:solidFill>
-                  <a:srgbClr val="000000"/>
-                </a:solidFill>
-                <a:latin typeface="Helvetica Neue"/>
-                <a:ea typeface="Helvetica Neue"/>
-                <a:cs typeface="Helvetica Neue"/>
-              </a:defRPr>
-            </a:pPr>
-            <a:r>
-              <a:t>Check every view against the approved design</a:t>
+              <a:lnSpc>
+                <a:spcPct val="108000"/>
+              </a:lnSpc>
+              <a:buNone/>
+              <a:defRPr sz="1700" b="0">
+                <a:solidFill>
+                  <a:srgbClr val="173126"/>
+                </a:solidFill>
+                <a:latin typeface="Aptos"/>
+                <a:ea typeface="Aptos"/>
+                <a:cs typeface="Aptos"/>
+              </a:defRPr>
+            </a:pPr>
+            <a:r>
+              <a:rPr sz="1700" b="0">
+                <a:solidFill>
+                  <a:srgbClr val="173126"/>
+                </a:solidFill>
+                <a:latin typeface="Aptos"/>
+                <a:ea typeface="Aptos"/>
+                <a:cs typeface="Aptos"/>
+              </a:rPr>
+              <a:t>03 Dimension: Record required sizes clearly in millimetres.</a:t>
+            </a:r>
+          </a:p>
+        </p:txBody>
+      </p:sp>
+      <p:sp>
+        <p:nvSpPr>
+          <p:cNvPr id="6" name="Content-Placeholder-10-7">
+            <a:extLst xmlns:a="http://schemas.openxmlformats.org/drawingml/2006/main">
+              <a:ext uri="{FF2B5EF4-FFF2-40B4-BE49-F238E27FC236}">
+                <a16:creationId xmlns:a16="http://schemas.microsoft.com/office/drawing/2014/main" id="{A3DCB6C1-837D-4326-B39C-D94416A36807}"/>
+              </a:ext>
+            </a:extLst>
+          </p:cNvPr>
+          <p:cNvSpPr>
+            <a:spLocks xmlns:a="http://schemas.openxmlformats.org/drawingml/2006/main" noGrp="1"/>
+          </p:cNvSpPr>
+          <p:nvPr/>
+        </p:nvSpPr>
+        <p:spPr>
+          <a:xfrm xmlns:a="http://schemas.openxmlformats.org/drawingml/2006/main">
+            <a:off x="685800" y="4524375"/>
+            <a:ext cx="4905375" cy="723900"/>
+          </a:xfrm>
+          <a:prstGeom xmlns:a="http://schemas.openxmlformats.org/drawingml/2006/main" prst="rect">
+            <a:avLst/>
+          </a:prstGeom>
+        </p:spPr>
+        <p:txBody>
+          <a:bodyPr xmlns:a="http://schemas.openxmlformats.org/drawingml/2006/main" lIns="38100" tIns="38100" rIns="38100" bIns="38100" anchor="ctr">
+            <a:normAutofit fontScale="100000"/>
+          </a:bodyPr>
+          <a:lstStyle xmlns:a="http://schemas.openxmlformats.org/drawingml/2006/main"/>
+          <a:p xmlns:a="http://schemas.openxmlformats.org/drawingml/2006/main">
+            <a:pPr algn="l">
+              <a:lnSpc>
+                <a:spcPct val="108000"/>
+              </a:lnSpc>
+              <a:buNone/>
+              <a:defRPr sz="1600" b="1">
+                <a:solidFill>
+                  <a:srgbClr val="5A665F"/>
+                </a:solidFill>
+                <a:latin typeface="Aptos"/>
+                <a:ea typeface="Aptos"/>
+                <a:cs typeface="Aptos"/>
+              </a:defRPr>
+            </a:pPr>
+            <a:r>
+              <a:rPr sz="1600" b="1">
+                <a:solidFill>
+                  <a:srgbClr val="5A665F"/>
+                </a:solidFill>
+                <a:latin typeface="Aptos"/>
+                <a:ea typeface="Aptos"/>
+                <a:cs typeface="Aptos"/>
+              </a:rPr>
+              <a:t>EVIDENCE Save a labelled note, check or photograph that proves your decision.</a:t>
+            </a:r>
+          </a:p>
+        </p:txBody>
+      </p:sp>
+      <p:sp>
+        <p:nvSpPr>
+          <p:cNvPr id="8" name="">
+            <a:extLst xmlns:a="http://schemas.openxmlformats.org/drawingml/2006/main">
+              <a:ext uri="{FF2B5EF4-FFF2-40B4-BE49-F238E27FC236}">
+                <a16:creationId xmlns:a16="http://schemas.microsoft.com/office/drawing/2014/main" id="{18173229-EE14-4FF0-8FAF-2CBB761E075A}"/>
+              </a:ext>
+            </a:extLst>
+          </p:cNvPr>
+          <p:cNvSpPr>
+            <a:spLocks xmlns:a="http://schemas.openxmlformats.org/drawingml/2006/main" noGrp="1"/>
+          </p:cNvSpPr>
+          <p:nvPr/>
+        </p:nvSpPr>
+        <p:spPr>
+          <a:xfrm xmlns:a="http://schemas.openxmlformats.org/drawingml/2006/main">
+            <a:off x="590550" y="285750"/>
+            <a:ext cx="2476500" cy="238125"/>
+          </a:xfrm>
+          <a:prstGeom xmlns:a="http://schemas.openxmlformats.org/drawingml/2006/main" prst="rect">
+            <a:avLst/>
+          </a:prstGeom>
+          <a:noFill xmlns:a="http://schemas.openxmlformats.org/drawingml/2006/main"/>
+          <a:ln xmlns:a="http://schemas.openxmlformats.org/drawingml/2006/main" w="0">
+            <a:noFill/>
+            <a:prstDash val="solid"/>
+          </a:ln>
+        </p:spPr>
+        <p:txBody>
+          <a:bodyPr xmlns:a="http://schemas.openxmlformats.org/drawingml/2006/main" lIns="38100" tIns="38100" rIns="38100" bIns="38100" anchor="t">
+            <a:normAutofit fontScale="77839"/>
+          </a:bodyPr>
+          <a:lstStyle xmlns:a="http://schemas.openxmlformats.org/drawingml/2006/main"/>
+          <a:p xmlns:a="http://schemas.openxmlformats.org/drawingml/2006/main">
+            <a:pPr algn="l">
+              <a:lnSpc>
+                <a:spcPct val="105000"/>
+              </a:lnSpc>
+              <a:buNone/>
+              <a:defRPr sz="1300" b="1">
+                <a:solidFill>
+                  <a:srgbClr val="D8941C"/>
+                </a:solidFill>
+                <a:latin typeface="Aptos"/>
+                <a:ea typeface="Aptos"/>
+                <a:cs typeface="Aptos"/>
+              </a:defRPr>
+            </a:pPr>
+            <a:r>
+              <a:rPr sz="1300" b="1">
+                <a:solidFill>
+                  <a:srgbClr val="D8941C"/>
+                </a:solidFill>
+                <a:latin typeface="Aptos"/>
+                <a:ea typeface="Aptos"/>
+                <a:cs typeface="Aptos"/>
+              </a:rPr>
+              <a:t>THEORY 1 OF 3</a:t>
+            </a:r>
+          </a:p>
+        </p:txBody>
+      </p:sp>
+      <p:sp>
+        <p:nvSpPr>
+          <p:cNvPr id="9" name="">
+            <a:extLst xmlns:a="http://schemas.openxmlformats.org/drawingml/2006/main">
+              <a:ext uri="{FF2B5EF4-FFF2-40B4-BE49-F238E27FC236}">
+                <a16:creationId xmlns:a16="http://schemas.microsoft.com/office/drawing/2014/main" id="{C56D041F-DFAF-4CD2-B67D-BFF14696FB65}"/>
+              </a:ext>
+            </a:extLst>
+          </p:cNvPr>
+          <p:cNvSpPr>
+            <a:spLocks xmlns:a="http://schemas.openxmlformats.org/drawingml/2006/main" noGrp="1"/>
+          </p:cNvSpPr>
+          <p:nvPr/>
+        </p:nvSpPr>
+        <p:spPr>
+          <a:xfrm xmlns:a="http://schemas.openxmlformats.org/drawingml/2006/main">
+            <a:off x="6048375" y="552450"/>
+            <a:ext cx="5619750" cy="5524500"/>
+          </a:xfrm>
+          <a:prstGeom xmlns:a="http://schemas.openxmlformats.org/drawingml/2006/main" prst="roundRect">
+            <a:avLst>
+              <a:gd name="adj" fmla="val 2069"/>
+            </a:avLst>
+          </a:prstGeom>
+          <a:noFill xmlns:a="http://schemas.openxmlformats.org/drawingml/2006/main"/>
+          <a:ln xmlns:a="http://schemas.openxmlformats.org/drawingml/2006/main" w="9525">
+            <a:solidFill>
+              <a:srgbClr val="D8941C"/>
+            </a:solidFill>
+            <a:prstDash val="solid"/>
+          </a:ln>
+        </p:spPr>
+      </p:sp>
+      <p:pic>
+        <p:nvPicPr>
+          <p:cNvPr id="20" name=""/>
+          <p:cNvPicPr>
+            <a:picLocks xmlns:a="http://schemas.openxmlformats.org/drawingml/2006/main" noChangeAspect="1"/>
+          </p:cNvPicPr>
+          <p:nvPr/>
+        </p:nvPicPr>
+        <p:blipFill>
+          <a:blip xmlns:r="http://schemas.openxmlformats.org/officeDocument/2006/relationships" xmlns:a="http://schemas.openxmlformats.org/drawingml/2006/main" r:embed="R38bceb75ecbc465f"/>
+          <a:srcRect xmlns:a="http://schemas.openxmlformats.org/drawingml/2006/main" l="0" t="12366" r="0" b="12366"/>
+          <a:stretch xmlns:a="http://schemas.openxmlformats.org/drawingml/2006/main">
+            <a:fillRect l="0" t="0" r="0" b="0"/>
+          </a:stretch>
+        </p:blipFill>
+        <p:spPr>
+          <a:xfrm xmlns:a="http://schemas.openxmlformats.org/drawingml/2006/main">
+            <a:off x="6200775" y="704850"/>
+            <a:ext cx="5314950" cy="4000500"/>
+          </a:xfrm>
+          <a:prstGeom xmlns:a="http://schemas.openxmlformats.org/drawingml/2006/main" prst="roundRect">
+            <a:avLst>
+              <a:gd name="adj" fmla="val 2857"/>
+            </a:avLst>
+          </a:prstGeom>
+        </p:spPr>
+      </p:pic>
+      <p:sp>
+        <p:nvSpPr>
+          <p:cNvPr id="11" name="">
+            <a:extLst xmlns:a="http://schemas.openxmlformats.org/drawingml/2006/main">
+              <a:ext uri="{FF2B5EF4-FFF2-40B4-BE49-F238E27FC236}">
+                <a16:creationId xmlns:a16="http://schemas.microsoft.com/office/drawing/2014/main" id="{F82D330E-D61F-4A90-8067-A0F005F24FAC}"/>
+              </a:ext>
+            </a:extLst>
+          </p:cNvPr>
+          <p:cNvSpPr>
+            <a:spLocks xmlns:a="http://schemas.openxmlformats.org/drawingml/2006/main" noGrp="1"/>
+          </p:cNvSpPr>
+          <p:nvPr/>
+        </p:nvSpPr>
+        <p:spPr>
+          <a:xfrm xmlns:a="http://schemas.openxmlformats.org/drawingml/2006/main">
+            <a:off x="6267450" y="4810125"/>
+            <a:ext cx="5162550" cy="1123950"/>
+          </a:xfrm>
+          <a:prstGeom xmlns:a="http://schemas.openxmlformats.org/drawingml/2006/main" prst="rect">
+            <a:avLst/>
+          </a:prstGeom>
+          <a:noFill xmlns:a="http://schemas.openxmlformats.org/drawingml/2006/main"/>
+          <a:ln xmlns:a="http://schemas.openxmlformats.org/drawingml/2006/main" w="0">
+            <a:noFill/>
+            <a:prstDash val="solid"/>
+          </a:ln>
+        </p:spPr>
+        <p:txBody>
+          <a:bodyPr xmlns:a="http://schemas.openxmlformats.org/drawingml/2006/main" lIns="38100" tIns="38100" rIns="38100" bIns="38100" anchor="t">
+            <a:normAutofit fontScale="100000"/>
+          </a:bodyPr>
+          <a:lstStyle xmlns:a="http://schemas.openxmlformats.org/drawingml/2006/main"/>
+          <a:p xmlns:a="http://schemas.openxmlformats.org/drawingml/2006/main">
+            <a:pPr algn="l">
+              <a:lnSpc>
+                <a:spcPct val="105000"/>
+              </a:lnSpc>
+              <a:buNone/>
+              <a:defRPr sz="1600" b="0">
+                <a:solidFill>
+                  <a:srgbClr val="5A665F"/>
+                </a:solidFill>
+                <a:latin typeface="Aptos"/>
+                <a:ea typeface="Aptos"/>
+                <a:cs typeface="Aptos"/>
+              </a:defRPr>
+            </a:pPr>
+            <a:r>
+              <a:rPr sz="1600" b="0">
+                <a:solidFill>
+                  <a:srgbClr val="5A665F"/>
+                </a:solidFill>
+                <a:latin typeface="Aptos"/>
+                <a:ea typeface="Aptos"/>
+                <a:cs typeface="Aptos"/>
+              </a:rPr>
+              <a:t>A drawing controls production only when its dimensions and conventions are checked.</a:t>
             </a:r>
           </a:p>
         </p:txBody>
@@ -2648,6 +3443,13 @@
 <file path=ppt/slides/slide4.xml><?xml version="1.0" encoding="utf-8"?>
 <p:sld xmlns:p="http://schemas.openxmlformats.org/presentationml/2006/main">
   <p:cSld>
+    <p:bg>
+      <p:bgPr>
+        <a:solidFill xmlns:a="http://schemas.openxmlformats.org/drawingml/2006/main">
+          <a:srgbClr val="F8F2E8"/>
+        </a:solidFill>
+      </p:bgPr>
+    </p:bg>
     <p:spTree>
       <p:nvGrpSpPr>
         <p:cNvPr id="1" name=""/>
@@ -2673,28 +3475,42 @@
         </p:nvSpPr>
         <p:spPr>
           <a:xfrm xmlns:a="http://schemas.openxmlformats.org/drawingml/2006/main">
-            <a:off x="11279315" y="6279261"/>
-            <a:ext cx="518922" cy="241268"/>
+            <a:off x="11334750" y="6496050"/>
+            <a:ext cx="400050" cy="190500"/>
           </a:xfrm>
           <a:prstGeom xmlns:a="http://schemas.openxmlformats.org/drawingml/2006/main" prst="rect">
             <a:avLst/>
           </a:prstGeom>
         </p:spPr>
         <p:txBody>
-          <a:bodyPr xmlns:a="http://schemas.openxmlformats.org/drawingml/2006/main" lIns="0" tIns="0" rIns="0" bIns="0" anchor="b"/>
+          <a:bodyPr xmlns:a="http://schemas.openxmlformats.org/drawingml/2006/main" lIns="38100" tIns="38100" rIns="38100" bIns="38100" anchor="ctr">
+            <a:normAutofit fontScale="64935"/>
+          </a:bodyPr>
           <a:lstStyle xmlns:a="http://schemas.openxmlformats.org/drawingml/2006/main"/>
           <a:p xmlns:a="http://schemas.openxmlformats.org/drawingml/2006/main">
             <a:pPr algn="r">
-              <a:defRPr sz="1000">
-                <a:solidFill>
-                  <a:srgbClr val="000000"/>
-                </a:solidFill>
-                <a:latin typeface="Helvetica Neue"/>
-                <a:ea typeface="Helvetica Neue"/>
-                <a:cs typeface="Helvetica Neue"/>
-              </a:defRPr>
-            </a:pPr>
-            <a:r>
+              <a:lnSpc>
+                <a:spcPct val="105000"/>
+              </a:lnSpc>
+              <a:buNone/>
+              <a:defRPr sz="1100" b="1">
+                <a:solidFill>
+                  <a:srgbClr val="5A665F"/>
+                </a:solidFill>
+                <a:latin typeface="Aptos"/>
+                <a:ea typeface="Aptos"/>
+                <a:cs typeface="Aptos"/>
+              </a:defRPr>
+            </a:pPr>
+            <a:r>
+              <a:rPr sz="1100" b="1">
+                <a:solidFill>
+                  <a:srgbClr val="5A665F"/>
+                </a:solidFill>
+                <a:latin typeface="Aptos"/>
+                <a:ea typeface="Aptos"/>
+                <a:cs typeface="Aptos"/>
+              </a:rPr>
               <a:t>4</a:t>
             </a:r>
           </a:p>
@@ -2716,449 +3532,676 @@
         </p:nvSpPr>
         <p:spPr>
           <a:xfrm xmlns:a="http://schemas.openxmlformats.org/drawingml/2006/main">
-            <a:off x="393668" y="344043"/>
-            <a:ext cx="11404568" cy="1047464"/>
+            <a:off x="571500" y="533400"/>
+            <a:ext cx="5191125" cy="1504950"/>
           </a:xfrm>
           <a:prstGeom xmlns:a="http://schemas.openxmlformats.org/drawingml/2006/main" prst="rect">
             <a:avLst/>
           </a:prstGeom>
         </p:spPr>
         <p:txBody>
-          <a:bodyPr xmlns:a="http://schemas.openxmlformats.org/drawingml/2006/main" lIns="0" tIns="0" rIns="0" bIns="0" anchor="t">
+          <a:bodyPr xmlns:a="http://schemas.openxmlformats.org/drawingml/2006/main" lIns="38100" tIns="38100" rIns="38100" bIns="38100" anchor="t">
+            <a:normAutofit fontScale="95245"/>
+          </a:bodyPr>
+          <a:lstStyle xmlns:a="http://schemas.openxmlformats.org/drawingml/2006/main"/>
+          <a:p xmlns:a="http://schemas.openxmlformats.org/drawingml/2006/main">
+            <a:pPr algn="l">
+              <a:lnSpc>
+                <a:spcPct val="98000"/>
+              </a:lnSpc>
+              <a:buNone/>
+              <a:defRPr sz="3500" b="1">
+                <a:solidFill>
+                  <a:srgbClr val="173126"/>
+                </a:solidFill>
+                <a:latin typeface="Aptos"/>
+                <a:ea typeface="Aptos"/>
+                <a:cs typeface="Aptos"/>
+              </a:defRPr>
+            </a:pPr>
+            <a:r>
+              <a:rPr sz="3500" b="1">
+                <a:solidFill>
+                  <a:srgbClr val="173126"/>
+                </a:solidFill>
+                <a:latin typeface="Aptos"/>
+                <a:ea typeface="Aptos"/>
+                <a:cs typeface="Aptos"/>
+              </a:rPr>
+              <a:t>Cutting lists and a realistic production schedule</a:t>
+            </a:r>
+          </a:p>
+        </p:txBody>
+      </p:sp>
+      <p:cxnSp>
+        <p:nvCxnSpPr>
+          <p:cNvPr id="25" name="Google-Shape-2259-p159-4"/>
+          <p:cNvCxnSpPr/>
+          <p:nvPr/>
+        </p:nvCxnSpPr>
+        <p:spPr>
+          <a:xfrm xmlns:a="http://schemas.openxmlformats.org/drawingml/2006/main">
+            <a:off x="0" y="0"/>
+            <a:ext cx="9525" cy="9525"/>
+          </a:xfrm>
+          <a:prstGeom xmlns:a="http://schemas.openxmlformats.org/drawingml/2006/main" prst="straightConnector1">
+            <a:avLst/>
+          </a:prstGeom>
+          <a:ln xmlns:a="http://schemas.openxmlformats.org/drawingml/2006/main" w="0">
+            <a:noFill/>
+            <a:prstDash val="solid"/>
+          </a:ln>
+        </p:spPr>
+      </p:cxnSp>
+      <p:sp>
+        <p:nvSpPr>
+          <p:cNvPr id="4" name="Google-Shape-2260-p159-5">
+            <a:extLst xmlns:a="http://schemas.openxmlformats.org/drawingml/2006/main">
+              <a:ext uri="{FF2B5EF4-FFF2-40B4-BE49-F238E27FC236}">
+                <a16:creationId xmlns:a16="http://schemas.microsoft.com/office/drawing/2014/main" id="{6E402547-1390-4B42-9353-7FE3ACE2B3DF}"/>
+              </a:ext>
+            </a:extLst>
+          </p:cNvPr>
+          <p:cNvSpPr>
+            <a:spLocks xmlns:a="http://schemas.openxmlformats.org/drawingml/2006/main" noGrp="1"/>
+          </p:cNvSpPr>
+          <p:nvPr/>
+        </p:nvSpPr>
+        <p:spPr>
+          <a:xfrm xmlns:a="http://schemas.openxmlformats.org/drawingml/2006/main">
+            <a:off x="0" y="0"/>
+            <a:ext cx="9525" cy="9525"/>
+          </a:xfrm>
+          <a:prstGeom xmlns:a="http://schemas.openxmlformats.org/drawingml/2006/main" prst="ellipse">
+            <a:avLst/>
+          </a:prstGeom>
+          <a:noFill xmlns:a="http://schemas.openxmlformats.org/drawingml/2006/main"/>
+          <a:ln xmlns:a="http://schemas.openxmlformats.org/drawingml/2006/main" w="0">
+            <a:noFill/>
+            <a:prstDash val="solid"/>
+          </a:ln>
+        </p:spPr>
+      </p:sp>
+      <p:sp>
+        <p:nvSpPr>
+          <p:cNvPr id="5" name="Google-Shape-2261-p159-6">
+            <a:extLst xmlns:a="http://schemas.openxmlformats.org/drawingml/2006/main">
+              <a:ext uri="{FF2B5EF4-FFF2-40B4-BE49-F238E27FC236}">
+                <a16:creationId xmlns:a16="http://schemas.microsoft.com/office/drawing/2014/main" id="{814462C4-1309-4274-AC31-FB1F60D5281C}"/>
+              </a:ext>
+            </a:extLst>
+          </p:cNvPr>
+          <p:cNvSpPr>
+            <a:spLocks xmlns:a="http://schemas.openxmlformats.org/drawingml/2006/main" noGrp="1"/>
+          </p:cNvSpPr>
+          <p:nvPr/>
+        </p:nvSpPr>
+        <p:spPr>
+          <a:xfrm xmlns:a="http://schemas.openxmlformats.org/drawingml/2006/main">
+            <a:off x="0" y="0"/>
+            <a:ext cx="9525" cy="9525"/>
+          </a:xfrm>
+          <a:prstGeom xmlns:a="http://schemas.openxmlformats.org/drawingml/2006/main" prst="ellipse">
+            <a:avLst/>
+          </a:prstGeom>
+          <a:noFill xmlns:a="http://schemas.openxmlformats.org/drawingml/2006/main"/>
+          <a:ln xmlns:a="http://schemas.openxmlformats.org/drawingml/2006/main" w="0">
+            <a:noFill/>
+            <a:prstDash val="solid"/>
+          </a:ln>
+        </p:spPr>
+      </p:sp>
+      <p:sp>
+        <p:nvSpPr>
+          <p:cNvPr id="6" name="Google-Shape-2262-p159-7">
+            <a:extLst xmlns:a="http://schemas.openxmlformats.org/drawingml/2006/main">
+              <a:ext uri="{FF2B5EF4-FFF2-40B4-BE49-F238E27FC236}">
+                <a16:creationId xmlns:a16="http://schemas.microsoft.com/office/drawing/2014/main" id="{76F463FE-0949-4E8F-81F5-A8D44743A99C}"/>
+              </a:ext>
+            </a:extLst>
+          </p:cNvPr>
+          <p:cNvSpPr>
+            <a:spLocks xmlns:a="http://schemas.openxmlformats.org/drawingml/2006/main" noGrp="1"/>
+          </p:cNvSpPr>
+          <p:nvPr/>
+        </p:nvSpPr>
+        <p:spPr>
+          <a:xfrm xmlns:a="http://schemas.openxmlformats.org/drawingml/2006/main">
+            <a:off x="0" y="0"/>
+            <a:ext cx="9525" cy="9525"/>
+          </a:xfrm>
+          <a:prstGeom xmlns:a="http://schemas.openxmlformats.org/drawingml/2006/main" prst="ellipse">
+            <a:avLst/>
+          </a:prstGeom>
+          <a:noFill xmlns:a="http://schemas.openxmlformats.org/drawingml/2006/main"/>
+          <a:ln xmlns:a="http://schemas.openxmlformats.org/drawingml/2006/main" w="0">
+            <a:noFill/>
+            <a:prstDash val="solid"/>
+          </a:ln>
+        </p:spPr>
+      </p:sp>
+      <p:sp>
+        <p:nvSpPr>
+          <p:cNvPr id="7" name="Content-Placeholder-15-8">
+            <a:extLst xmlns:a="http://schemas.openxmlformats.org/drawingml/2006/main">
+              <a:ext uri="{FF2B5EF4-FFF2-40B4-BE49-F238E27FC236}">
+                <a16:creationId xmlns:a16="http://schemas.microsoft.com/office/drawing/2014/main" id="{BD3881D8-3C4A-4F46-8102-3815338CA1BD}"/>
+              </a:ext>
+            </a:extLst>
+          </p:cNvPr>
+          <p:cNvSpPr>
+            <a:spLocks xmlns:a="http://schemas.openxmlformats.org/drawingml/2006/main" noGrp="1"/>
+          </p:cNvSpPr>
+          <p:nvPr/>
+        </p:nvSpPr>
+        <p:spPr>
+          <a:xfrm xmlns:a="http://schemas.openxmlformats.org/drawingml/2006/main">
+            <a:off x="647700" y="2209800"/>
+            <a:ext cx="495300" cy="552450"/>
+          </a:xfrm>
+          <a:prstGeom xmlns:a="http://schemas.openxmlformats.org/drawingml/2006/main" prst="rect">
+            <a:avLst/>
+          </a:prstGeom>
+        </p:spPr>
+        <p:txBody>
+          <a:bodyPr xmlns:a="http://schemas.openxmlformats.org/drawingml/2006/main" lIns="38100" tIns="38100" rIns="38100" bIns="38100" anchor="ctr">
             <a:normAutofit fontScale="100000"/>
           </a:bodyPr>
           <a:lstStyle xmlns:a="http://schemas.openxmlformats.org/drawingml/2006/main"/>
           <a:p xmlns:a="http://schemas.openxmlformats.org/drawingml/2006/main">
             <a:pPr algn="l">
-              <a:defRPr sz="2900">
-                <a:solidFill>
-                  <a:srgbClr val="000000"/>
-                </a:solidFill>
-                <a:latin typeface="Helvetica Neue"/>
-                <a:ea typeface="Helvetica Neue"/>
-                <a:cs typeface="Helvetica Neue"/>
-              </a:defRPr>
-            </a:pPr>
-            <a:r>
-              <a:t>Use evidence before committing to a decision</a:t>
-            </a:r>
-          </a:p>
-        </p:txBody>
-      </p:sp>
-      <p:cxnSp>
-        <p:nvCxnSpPr>
-          <p:cNvPr id="15" name="Google-Shape-2259-p159-4"/>
-          <p:cNvCxnSpPr/>
-          <p:nvPr/>
-        </p:nvCxnSpPr>
-        <p:spPr>
-          <a:xfrm xmlns:a="http://schemas.openxmlformats.org/drawingml/2006/main">
-            <a:off x="337757" y="3373755"/>
-            <a:ext cx="12245435" cy="286"/>
-          </a:xfrm>
-          <a:prstGeom xmlns:a="http://schemas.openxmlformats.org/drawingml/2006/main" prst="straightConnector1">
-            <a:avLst/>
-          </a:prstGeom>
+              <a:lnSpc>
+                <a:spcPct val="105000"/>
+              </a:lnSpc>
+              <a:buNone/>
+              <a:defRPr sz="2400" b="1">
+                <a:solidFill>
+                  <a:srgbClr val="D8941C"/>
+                </a:solidFill>
+                <a:latin typeface="Aptos"/>
+                <a:ea typeface="Aptos"/>
+                <a:cs typeface="Aptos"/>
+              </a:defRPr>
+            </a:pPr>
+            <a:r>
+              <a:rPr sz="2400" b="1">
+                <a:solidFill>
+                  <a:srgbClr val="D8941C"/>
+                </a:solidFill>
+                <a:latin typeface="Aptos"/>
+                <a:ea typeface="Aptos"/>
+                <a:cs typeface="Aptos"/>
+              </a:rPr>
+              <a:t>01</a:t>
+            </a:r>
+          </a:p>
+        </p:txBody>
+      </p:sp>
+      <p:sp>
+        <p:nvSpPr>
+          <p:cNvPr id="8" name="Content-Placeholder-15-9">
+            <a:extLst xmlns:a="http://schemas.openxmlformats.org/drawingml/2006/main">
+              <a:ext uri="{FF2B5EF4-FFF2-40B4-BE49-F238E27FC236}">
+                <a16:creationId xmlns:a16="http://schemas.microsoft.com/office/drawing/2014/main" id="{A24A3E8D-5E18-4B11-BA35-B381228E0DB9}"/>
+              </a:ext>
+            </a:extLst>
+          </p:cNvPr>
+          <p:cNvSpPr>
+            <a:spLocks xmlns:a="http://schemas.openxmlformats.org/drawingml/2006/main" noGrp="1"/>
+          </p:cNvSpPr>
+          <p:nvPr/>
+        </p:nvSpPr>
+        <p:spPr>
+          <a:xfrm xmlns:a="http://schemas.openxmlformats.org/drawingml/2006/main">
+            <a:off x="647700" y="3209925"/>
+            <a:ext cx="495300" cy="552450"/>
+          </a:xfrm>
+          <a:prstGeom xmlns:a="http://schemas.openxmlformats.org/drawingml/2006/main" prst="rect">
+            <a:avLst/>
+          </a:prstGeom>
+        </p:spPr>
+        <p:txBody>
+          <a:bodyPr xmlns:a="http://schemas.openxmlformats.org/drawingml/2006/main" lIns="38100" tIns="38100" rIns="38100" bIns="38100" anchor="ctr">
+            <a:normAutofit fontScale="100000"/>
+          </a:bodyPr>
+          <a:lstStyle xmlns:a="http://schemas.openxmlformats.org/drawingml/2006/main"/>
+          <a:p xmlns:a="http://schemas.openxmlformats.org/drawingml/2006/main">
+            <a:pPr algn="l">
+              <a:lnSpc>
+                <a:spcPct val="105000"/>
+              </a:lnSpc>
+              <a:buNone/>
+              <a:defRPr sz="2400" b="1">
+                <a:solidFill>
+                  <a:srgbClr val="D8941C"/>
+                </a:solidFill>
+                <a:latin typeface="Aptos"/>
+                <a:ea typeface="Aptos"/>
+                <a:cs typeface="Aptos"/>
+              </a:defRPr>
+            </a:pPr>
+            <a:r>
+              <a:rPr sz="2400" b="1">
+                <a:solidFill>
+                  <a:srgbClr val="D8941C"/>
+                </a:solidFill>
+                <a:latin typeface="Aptos"/>
+                <a:ea typeface="Aptos"/>
+                <a:cs typeface="Aptos"/>
+              </a:rPr>
+              <a:t>02</a:t>
+            </a:r>
+          </a:p>
+        </p:txBody>
+      </p:sp>
+      <p:sp>
+        <p:nvSpPr>
+          <p:cNvPr id="9" name="Content-Placeholder-15-10">
+            <a:extLst xmlns:a="http://schemas.openxmlformats.org/drawingml/2006/main">
+              <a:ext uri="{FF2B5EF4-FFF2-40B4-BE49-F238E27FC236}">
+                <a16:creationId xmlns:a16="http://schemas.microsoft.com/office/drawing/2014/main" id="{0FD39088-8A87-4DB3-B5DF-E832453FC9A9}"/>
+              </a:ext>
+            </a:extLst>
+          </p:cNvPr>
+          <p:cNvSpPr>
+            <a:spLocks xmlns:a="http://schemas.openxmlformats.org/drawingml/2006/main" noGrp="1"/>
+          </p:cNvSpPr>
+          <p:nvPr/>
+        </p:nvSpPr>
+        <p:spPr>
+          <a:xfrm xmlns:a="http://schemas.openxmlformats.org/drawingml/2006/main">
+            <a:off x="647700" y="4210050"/>
+            <a:ext cx="495300" cy="552450"/>
+          </a:xfrm>
+          <a:prstGeom xmlns:a="http://schemas.openxmlformats.org/drawingml/2006/main" prst="rect">
+            <a:avLst/>
+          </a:prstGeom>
+        </p:spPr>
+        <p:txBody>
+          <a:bodyPr xmlns:a="http://schemas.openxmlformats.org/drawingml/2006/main" lIns="38100" tIns="38100" rIns="38100" bIns="38100" anchor="ctr">
+            <a:normAutofit fontScale="100000"/>
+          </a:bodyPr>
+          <a:lstStyle xmlns:a="http://schemas.openxmlformats.org/drawingml/2006/main"/>
+          <a:p xmlns:a="http://schemas.openxmlformats.org/drawingml/2006/main">
+            <a:pPr algn="l">
+              <a:lnSpc>
+                <a:spcPct val="105000"/>
+              </a:lnSpc>
+              <a:buNone/>
+              <a:defRPr sz="2400" b="1">
+                <a:solidFill>
+                  <a:srgbClr val="D8941C"/>
+                </a:solidFill>
+                <a:latin typeface="Aptos"/>
+                <a:ea typeface="Aptos"/>
+                <a:cs typeface="Aptos"/>
+              </a:defRPr>
+            </a:pPr>
+            <a:r>
+              <a:rPr sz="2400" b="1">
+                <a:solidFill>
+                  <a:srgbClr val="D8941C"/>
+                </a:solidFill>
+                <a:latin typeface="Aptos"/>
+                <a:ea typeface="Aptos"/>
+                <a:cs typeface="Aptos"/>
+              </a:rPr>
+              <a:t>03</a:t>
+            </a:r>
+          </a:p>
+        </p:txBody>
+      </p:sp>
+      <p:sp>
+        <p:nvSpPr>
+          <p:cNvPr id="10" name="Text-Placeholder-16-11">
+            <a:extLst xmlns:a="http://schemas.openxmlformats.org/drawingml/2006/main">
+              <a:ext uri="{FF2B5EF4-FFF2-40B4-BE49-F238E27FC236}">
+                <a16:creationId xmlns:a16="http://schemas.microsoft.com/office/drawing/2014/main" id="{BE1DA11A-B9F8-4548-B0CC-CE94121D1724}"/>
+              </a:ext>
+            </a:extLst>
+          </p:cNvPr>
+          <p:cNvSpPr>
+            <a:spLocks xmlns:a="http://schemas.openxmlformats.org/drawingml/2006/main" noGrp="1"/>
+          </p:cNvSpPr>
+          <p:nvPr/>
+        </p:nvSpPr>
+        <p:spPr>
+          <a:xfrm xmlns:a="http://schemas.openxmlformats.org/drawingml/2006/main">
+            <a:off x="1200150" y="2114550"/>
+            <a:ext cx="4429125" cy="857250"/>
+          </a:xfrm>
+          <a:prstGeom xmlns:a="http://schemas.openxmlformats.org/drawingml/2006/main" prst="rect">
+            <a:avLst/>
+          </a:prstGeom>
+        </p:spPr>
+        <p:txBody>
+          <a:bodyPr xmlns:a="http://schemas.openxmlformats.org/drawingml/2006/main" lIns="38100" tIns="38100" rIns="38100" bIns="38100" anchor="ctr">
+            <a:normAutofit fontScale="100000"/>
+          </a:bodyPr>
+          <a:lstStyle xmlns:a="http://schemas.openxmlformats.org/drawingml/2006/main"/>
+          <a:p xmlns:a="http://schemas.openxmlformats.org/drawingml/2006/main">
+            <a:pPr algn="l">
+              <a:lnSpc>
+                <a:spcPct val="108000"/>
+              </a:lnSpc>
+              <a:buNone/>
+              <a:defRPr sz="1700" b="0">
+                <a:solidFill>
+                  <a:srgbClr val="173126"/>
+                </a:solidFill>
+                <a:latin typeface="Aptos"/>
+                <a:ea typeface="Aptos"/>
+                <a:cs typeface="Aptos"/>
+              </a:defRPr>
+            </a:pPr>
+            <a:r>
+              <a:rPr sz="1700" b="0">
+                <a:solidFill>
+                  <a:srgbClr val="173126"/>
+                </a:solidFill>
+                <a:latin typeface="Aptos"/>
+                <a:ea typeface="Aptos"/>
+                <a:cs typeface="Aptos"/>
+              </a:rPr>
+              <a:t>Good production starts with accurate information and a realistic sequence.</a:t>
+            </a:r>
+          </a:p>
+        </p:txBody>
+      </p:sp>
+      <p:sp>
+        <p:nvSpPr>
+          <p:cNvPr id="11" name="Text-Placeholder-16-12">
+            <a:extLst xmlns:a="http://schemas.openxmlformats.org/drawingml/2006/main">
+              <a:ext uri="{FF2B5EF4-FFF2-40B4-BE49-F238E27FC236}">
+                <a16:creationId xmlns:a16="http://schemas.microsoft.com/office/drawing/2014/main" id="{5654AE80-6622-4D94-94B6-DA9CD2609436}"/>
+              </a:ext>
+            </a:extLst>
+          </p:cNvPr>
+          <p:cNvSpPr>
+            <a:spLocks xmlns:a="http://schemas.openxmlformats.org/drawingml/2006/main" noGrp="1"/>
+          </p:cNvSpPr>
+          <p:nvPr/>
+        </p:nvSpPr>
+        <p:spPr>
+          <a:xfrm xmlns:a="http://schemas.openxmlformats.org/drawingml/2006/main">
+            <a:off x="1200150" y="3114675"/>
+            <a:ext cx="4429125" cy="857250"/>
+          </a:xfrm>
+          <a:prstGeom xmlns:a="http://schemas.openxmlformats.org/drawingml/2006/main" prst="rect">
+            <a:avLst/>
+          </a:prstGeom>
+        </p:spPr>
+        <p:txBody>
+          <a:bodyPr xmlns:a="http://schemas.openxmlformats.org/drawingml/2006/main" lIns="38100" tIns="38100" rIns="38100" bIns="38100" anchor="ctr">
+            <a:normAutofit fontScale="93046"/>
+          </a:bodyPr>
+          <a:lstStyle xmlns:a="http://schemas.openxmlformats.org/drawingml/2006/main"/>
+          <a:p xmlns:a="http://schemas.openxmlformats.org/drawingml/2006/main">
+            <a:pPr algn="l">
+              <a:lnSpc>
+                <a:spcPct val="108000"/>
+              </a:lnSpc>
+              <a:buNone/>
+              <a:defRPr sz="1700" b="0">
+                <a:solidFill>
+                  <a:srgbClr val="173126"/>
+                </a:solidFill>
+                <a:latin typeface="Aptos"/>
+                <a:ea typeface="Aptos"/>
+                <a:cs typeface="Aptos"/>
+              </a:defRPr>
+            </a:pPr>
+            <a:r>
+              <a:rPr sz="1700" b="0">
+                <a:solidFill>
+                  <a:srgbClr val="173126"/>
+                </a:solidFill>
+                <a:latin typeface="Aptos"/>
+                <a:ea typeface="Aptos"/>
+                <a:cs typeface="Aptos"/>
+              </a:rPr>
+              <a:t>Once the Desk Tidy design and working drawings are approved, the next step is to prepare a cutting list.</a:t>
+            </a:r>
+          </a:p>
+        </p:txBody>
+      </p:sp>
+      <p:sp>
+        <p:nvSpPr>
+          <p:cNvPr id="12" name="Text-Placeholder-16-13">
+            <a:extLst xmlns:a="http://schemas.openxmlformats.org/drawingml/2006/main">
+              <a:ext uri="{FF2B5EF4-FFF2-40B4-BE49-F238E27FC236}">
+                <a16:creationId xmlns:a16="http://schemas.microsoft.com/office/drawing/2014/main" id="{87CB784E-1F10-4E80-911D-B67A4030F9AD}"/>
+              </a:ext>
+            </a:extLst>
+          </p:cNvPr>
+          <p:cNvSpPr>
+            <a:spLocks xmlns:a="http://schemas.openxmlformats.org/drawingml/2006/main" noGrp="1"/>
+          </p:cNvSpPr>
+          <p:nvPr/>
+        </p:nvSpPr>
+        <p:spPr>
+          <a:xfrm xmlns:a="http://schemas.openxmlformats.org/drawingml/2006/main">
+            <a:off x="1200150" y="4114800"/>
+            <a:ext cx="4429125" cy="857250"/>
+          </a:xfrm>
+          <a:prstGeom xmlns:a="http://schemas.openxmlformats.org/drawingml/2006/main" prst="rect">
+            <a:avLst/>
+          </a:prstGeom>
+        </p:spPr>
+        <p:txBody>
+          <a:bodyPr xmlns:a="http://schemas.openxmlformats.org/drawingml/2006/main" lIns="38100" tIns="38100" rIns="38100" bIns="38100" anchor="ctr">
+            <a:normAutofit fontScale="100000"/>
+          </a:bodyPr>
+          <a:lstStyle xmlns:a="http://schemas.openxmlformats.org/drawingml/2006/main"/>
+          <a:p xmlns:a="http://schemas.openxmlformats.org/drawingml/2006/main">
+            <a:pPr algn="l">
+              <a:lnSpc>
+                <a:spcPct val="108000"/>
+              </a:lnSpc>
+              <a:buNone/>
+              <a:defRPr sz="1700" b="0">
+                <a:solidFill>
+                  <a:srgbClr val="173126"/>
+                </a:solidFill>
+                <a:latin typeface="Aptos"/>
+                <a:ea typeface="Aptos"/>
+                <a:cs typeface="Aptos"/>
+              </a:defRPr>
+            </a:pPr>
+            <a:r>
+              <a:rPr sz="1700" b="0">
+                <a:solidFill>
+                  <a:srgbClr val="173126"/>
+                </a:solidFill>
+                <a:latin typeface="Aptos"/>
+                <a:ea typeface="Aptos"/>
+                <a:cs typeface="Aptos"/>
+              </a:rPr>
+              <a:t>Accuracy matters because one mistake can affect several later stages.</a:t>
+            </a:r>
+          </a:p>
+        </p:txBody>
+      </p:sp>
+      <p:sp>
+        <p:nvSpPr>
+          <p:cNvPr id="19" name="">
+            <a:extLst xmlns:a="http://schemas.openxmlformats.org/drawingml/2006/main">
+              <a:ext uri="{FF2B5EF4-FFF2-40B4-BE49-F238E27FC236}">
+                <a16:creationId xmlns:a16="http://schemas.microsoft.com/office/drawing/2014/main" id="{362E22C5-8629-4B65-8C0F-BF81102F0425}"/>
+              </a:ext>
+            </a:extLst>
+          </p:cNvPr>
+          <p:cNvSpPr>
+            <a:spLocks xmlns:a="http://schemas.openxmlformats.org/drawingml/2006/main" noGrp="1"/>
+          </p:cNvSpPr>
+          <p:nvPr/>
+        </p:nvSpPr>
+        <p:spPr>
+          <a:xfrm xmlns:a="http://schemas.openxmlformats.org/drawingml/2006/main">
+            <a:off x="590550" y="285750"/>
+            <a:ext cx="2476500" cy="238125"/>
+          </a:xfrm>
+          <a:prstGeom xmlns:a="http://schemas.openxmlformats.org/drawingml/2006/main" prst="rect">
+            <a:avLst/>
+          </a:prstGeom>
+          <a:noFill xmlns:a="http://schemas.openxmlformats.org/drawingml/2006/main"/>
+          <a:ln xmlns:a="http://schemas.openxmlformats.org/drawingml/2006/main" w="0">
+            <a:noFill/>
+            <a:prstDash val="solid"/>
+          </a:ln>
+        </p:spPr>
+        <p:txBody>
+          <a:bodyPr xmlns:a="http://schemas.openxmlformats.org/drawingml/2006/main" lIns="38100" tIns="38100" rIns="38100" bIns="38100" anchor="t">
+            <a:normAutofit fontScale="77839"/>
+          </a:bodyPr>
+          <a:lstStyle xmlns:a="http://schemas.openxmlformats.org/drawingml/2006/main"/>
+          <a:p xmlns:a="http://schemas.openxmlformats.org/drawingml/2006/main">
+            <a:pPr algn="l">
+              <a:lnSpc>
+                <a:spcPct val="105000"/>
+              </a:lnSpc>
+              <a:buNone/>
+              <a:defRPr sz="1300" b="1">
+                <a:solidFill>
+                  <a:srgbClr val="D8941C"/>
+                </a:solidFill>
+                <a:latin typeface="Aptos"/>
+                <a:ea typeface="Aptos"/>
+                <a:cs typeface="Aptos"/>
+              </a:defRPr>
+            </a:pPr>
+            <a:r>
+              <a:rPr sz="1300" b="1">
+                <a:solidFill>
+                  <a:srgbClr val="D8941C"/>
+                </a:solidFill>
+                <a:latin typeface="Aptos"/>
+                <a:ea typeface="Aptos"/>
+                <a:cs typeface="Aptos"/>
+              </a:rPr>
+              <a:t>THEORY 2 OF 3</a:t>
+            </a:r>
+          </a:p>
+        </p:txBody>
+      </p:sp>
+      <p:sp>
+        <p:nvSpPr>
+          <p:cNvPr id="20" name="">
+            <a:extLst xmlns:a="http://schemas.openxmlformats.org/drawingml/2006/main">
+              <a:ext uri="{FF2B5EF4-FFF2-40B4-BE49-F238E27FC236}">
+                <a16:creationId xmlns:a16="http://schemas.microsoft.com/office/drawing/2014/main" id="{31389AB7-2E92-4801-B629-FF6BE7F72FC6}"/>
+              </a:ext>
+            </a:extLst>
+          </p:cNvPr>
+          <p:cNvSpPr>
+            <a:spLocks xmlns:a="http://schemas.openxmlformats.org/drawingml/2006/main" noGrp="1"/>
+          </p:cNvSpPr>
+          <p:nvPr/>
+        </p:nvSpPr>
+        <p:spPr>
+          <a:xfrm xmlns:a="http://schemas.openxmlformats.org/drawingml/2006/main">
+            <a:off x="6048375" y="552450"/>
+            <a:ext cx="5619750" cy="5524500"/>
+          </a:xfrm>
+          <a:prstGeom xmlns:a="http://schemas.openxmlformats.org/drawingml/2006/main" prst="roundRect">
+            <a:avLst>
+              <a:gd name="adj" fmla="val 2069"/>
+            </a:avLst>
+          </a:prstGeom>
+          <a:noFill xmlns:a="http://schemas.openxmlformats.org/drawingml/2006/main"/>
           <a:ln xmlns:a="http://schemas.openxmlformats.org/drawingml/2006/main" w="9525">
             <a:solidFill>
-              <a:srgbClr val="000000"/>
+              <a:srgbClr val="D8941C"/>
             </a:solidFill>
             <a:prstDash val="solid"/>
           </a:ln>
         </p:spPr>
-      </p:cxnSp>
-      <p:sp>
-        <p:nvSpPr>
-          <p:cNvPr id="4" name="Google-Shape-2260-p159-5">
-            <a:extLst xmlns:a="http://schemas.openxmlformats.org/drawingml/2006/main">
-              <a:ext uri="{FF2B5EF4-FFF2-40B4-BE49-F238E27FC236}">
-                <a16:creationId xmlns:a16="http://schemas.microsoft.com/office/drawing/2014/main" id="{6E402547-1390-4B42-9353-7FE3ACE2B3DF}"/>
-              </a:ext>
-            </a:extLst>
-          </p:cNvPr>
-          <p:cNvSpPr>
-            <a:spLocks xmlns:a="http://schemas.openxmlformats.org/drawingml/2006/main" noGrp="1"/>
-          </p:cNvSpPr>
-          <p:nvPr/>
-        </p:nvSpPr>
-        <p:spPr>
-          <a:xfrm xmlns:a="http://schemas.openxmlformats.org/drawingml/2006/main">
-            <a:off x="337757" y="3320225"/>
-            <a:ext cx="107061" cy="107061"/>
-          </a:xfrm>
-          <a:prstGeom xmlns:a="http://schemas.openxmlformats.org/drawingml/2006/main" prst="ellipse">
-            <a:avLst/>
-          </a:prstGeom>
-          <a:solidFill xmlns:a="http://schemas.openxmlformats.org/drawingml/2006/main">
-            <a:srgbClr val="000000"/>
-          </a:solidFill>
-        </p:spPr>
-      </p:sp>
-      <p:sp>
-        <p:nvSpPr>
-          <p:cNvPr id="5" name="Google-Shape-2261-p159-6">
-            <a:extLst xmlns:a="http://schemas.openxmlformats.org/drawingml/2006/main">
-              <a:ext uri="{FF2B5EF4-FFF2-40B4-BE49-F238E27FC236}">
-                <a16:creationId xmlns:a16="http://schemas.microsoft.com/office/drawing/2014/main" id="{814462C4-1309-4274-AC31-FB1F60D5281C}"/>
-              </a:ext>
-            </a:extLst>
-          </p:cNvPr>
-          <p:cNvSpPr>
-            <a:spLocks xmlns:a="http://schemas.openxmlformats.org/drawingml/2006/main" noGrp="1"/>
-          </p:cNvSpPr>
-          <p:nvPr/>
-        </p:nvSpPr>
-        <p:spPr>
-          <a:xfrm xmlns:a="http://schemas.openxmlformats.org/drawingml/2006/main">
-            <a:off x="4251770" y="3320225"/>
-            <a:ext cx="107061" cy="107061"/>
-          </a:xfrm>
-          <a:prstGeom xmlns:a="http://schemas.openxmlformats.org/drawingml/2006/main" prst="ellipse">
-            <a:avLst/>
-          </a:prstGeom>
-          <a:solidFill xmlns:a="http://schemas.openxmlformats.org/drawingml/2006/main">
-            <a:srgbClr val="000000"/>
-          </a:solidFill>
-        </p:spPr>
-      </p:sp>
-      <p:sp>
-        <p:nvSpPr>
-          <p:cNvPr id="6" name="Google-Shape-2262-p159-7">
-            <a:extLst xmlns:a="http://schemas.openxmlformats.org/drawingml/2006/main">
-              <a:ext uri="{FF2B5EF4-FFF2-40B4-BE49-F238E27FC236}">
-                <a16:creationId xmlns:a16="http://schemas.microsoft.com/office/drawing/2014/main" id="{76F463FE-0949-4E8F-81F5-A8D44743A99C}"/>
-              </a:ext>
-            </a:extLst>
-          </p:cNvPr>
-          <p:cNvSpPr>
-            <a:spLocks xmlns:a="http://schemas.openxmlformats.org/drawingml/2006/main" noGrp="1"/>
-          </p:cNvSpPr>
-          <p:nvPr/>
-        </p:nvSpPr>
-        <p:spPr>
-          <a:xfrm xmlns:a="http://schemas.openxmlformats.org/drawingml/2006/main">
-            <a:off x="8176070" y="3320225"/>
-            <a:ext cx="107061" cy="107061"/>
-          </a:xfrm>
-          <a:prstGeom xmlns:a="http://schemas.openxmlformats.org/drawingml/2006/main" prst="ellipse">
-            <a:avLst/>
-          </a:prstGeom>
-          <a:solidFill xmlns:a="http://schemas.openxmlformats.org/drawingml/2006/main">
-            <a:srgbClr val="000000"/>
-          </a:solidFill>
-        </p:spPr>
-      </p:sp>
-      <p:sp>
-        <p:nvSpPr>
-          <p:cNvPr id="7" name="Content-Placeholder-15-8">
-            <a:extLst xmlns:a="http://schemas.openxmlformats.org/drawingml/2006/main">
-              <a:ext uri="{FF2B5EF4-FFF2-40B4-BE49-F238E27FC236}">
-                <a16:creationId xmlns:a16="http://schemas.microsoft.com/office/drawing/2014/main" id="{BD3881D8-3C4A-4F46-8102-3815338CA1BD}"/>
-              </a:ext>
-            </a:extLst>
-          </p:cNvPr>
-          <p:cNvSpPr>
-            <a:spLocks xmlns:a="http://schemas.openxmlformats.org/drawingml/2006/main" noGrp="1"/>
-          </p:cNvSpPr>
-          <p:nvPr/>
-        </p:nvSpPr>
-        <p:spPr>
-          <a:xfrm xmlns:a="http://schemas.openxmlformats.org/drawingml/2006/main">
-            <a:off x="393668" y="2843308"/>
-            <a:ext cx="1612868" cy="262414"/>
+      </p:sp>
+      <p:pic>
+        <p:nvPicPr>
+          <p:cNvPr id="37" name=""/>
+          <p:cNvPicPr>
+            <a:picLocks xmlns:a="http://schemas.openxmlformats.org/drawingml/2006/main" noChangeAspect="1"/>
+          </p:cNvPicPr>
+          <p:nvPr/>
+        </p:nvPicPr>
+        <p:blipFill>
+          <a:blip xmlns:r="http://schemas.openxmlformats.org/officeDocument/2006/relationships" xmlns:a="http://schemas.openxmlformats.org/drawingml/2006/main" r:embed="R391741c74baa457e"/>
+          <a:srcRect xmlns:a="http://schemas.openxmlformats.org/drawingml/2006/main" l="0" t="12366" r="0" b="12366"/>
+          <a:stretch xmlns:a="http://schemas.openxmlformats.org/drawingml/2006/main">
+            <a:fillRect l="0" t="0" r="0" b="0"/>
+          </a:stretch>
+        </p:blipFill>
+        <p:spPr>
+          <a:xfrm xmlns:a="http://schemas.openxmlformats.org/drawingml/2006/main">
+            <a:off x="6200775" y="704850"/>
+            <a:ext cx="5314950" cy="4000500"/>
+          </a:xfrm>
+          <a:prstGeom xmlns:a="http://schemas.openxmlformats.org/drawingml/2006/main" prst="roundRect">
+            <a:avLst>
+              <a:gd name="adj" fmla="val 2857"/>
+            </a:avLst>
+          </a:prstGeom>
+        </p:spPr>
+      </p:pic>
+      <p:sp>
+        <p:nvSpPr>
+          <p:cNvPr id="22" name="">
+            <a:extLst xmlns:a="http://schemas.openxmlformats.org/drawingml/2006/main">
+              <a:ext uri="{FF2B5EF4-FFF2-40B4-BE49-F238E27FC236}">
+                <a16:creationId xmlns:a16="http://schemas.microsoft.com/office/drawing/2014/main" id="{35AFBA98-14E5-4F8B-A0F3-41ADC8718C2F}"/>
+              </a:ext>
+            </a:extLst>
+          </p:cNvPr>
+          <p:cNvSpPr>
+            <a:spLocks xmlns:a="http://schemas.openxmlformats.org/drawingml/2006/main" noGrp="1"/>
+          </p:cNvSpPr>
+          <p:nvPr/>
+        </p:nvSpPr>
+        <p:spPr>
+          <a:xfrm xmlns:a="http://schemas.openxmlformats.org/drawingml/2006/main">
+            <a:off x="6267450" y="4810125"/>
+            <a:ext cx="5162550" cy="1123950"/>
           </a:xfrm>
           <a:prstGeom xmlns:a="http://schemas.openxmlformats.org/drawingml/2006/main" prst="rect">
             <a:avLst/>
           </a:prstGeom>
-        </p:spPr>
-        <p:txBody>
-          <a:bodyPr xmlns:a="http://schemas.openxmlformats.org/drawingml/2006/main" lIns="0" tIns="0" rIns="0" bIns="0">
-            <a:noAutofit/>
+          <a:noFill xmlns:a="http://schemas.openxmlformats.org/drawingml/2006/main"/>
+          <a:ln xmlns:a="http://schemas.openxmlformats.org/drawingml/2006/main" w="0">
+            <a:noFill/>
+            <a:prstDash val="solid"/>
+          </a:ln>
+        </p:spPr>
+        <p:txBody>
+          <a:bodyPr xmlns:a="http://schemas.openxmlformats.org/drawingml/2006/main" lIns="38100" tIns="38100" rIns="38100" bIns="38100" anchor="t">
+            <a:normAutofit fontScale="100000"/>
           </a:bodyPr>
           <a:lstStyle xmlns:a="http://schemas.openxmlformats.org/drawingml/2006/main"/>
           <a:p xmlns:a="http://schemas.openxmlformats.org/drawingml/2006/main">
             <a:pPr algn="l">
-              <a:defRPr sz="1600">
-                <a:solidFill>
-                  <a:srgbClr val="000000"/>
-                </a:solidFill>
-                <a:latin typeface="Helvetica Neue"/>
-                <a:ea typeface="Helvetica Neue"/>
-                <a:cs typeface="Helvetica Neue"/>
-              </a:defRPr>
-            </a:pPr>
-            <a:r>
-              <a:t>OBSERVE</a:t>
-            </a:r>
-          </a:p>
-        </p:txBody>
-      </p:sp>
-      <p:sp>
-        <p:nvSpPr>
-          <p:cNvPr id="8" name="Content-Placeholder-15-9">
-            <a:extLst xmlns:a="http://schemas.openxmlformats.org/drawingml/2006/main">
-              <a:ext uri="{FF2B5EF4-FFF2-40B4-BE49-F238E27FC236}">
-                <a16:creationId xmlns:a16="http://schemas.microsoft.com/office/drawing/2014/main" id="{A24A3E8D-5E18-4B11-BA35-B381228E0DB9}"/>
-              </a:ext>
-            </a:extLst>
-          </p:cNvPr>
-          <p:cNvSpPr>
-            <a:spLocks xmlns:a="http://schemas.openxmlformats.org/drawingml/2006/main" noGrp="1"/>
-          </p:cNvSpPr>
-          <p:nvPr/>
-        </p:nvSpPr>
-        <p:spPr>
-          <a:xfrm xmlns:a="http://schemas.openxmlformats.org/drawingml/2006/main">
-            <a:off x="4294156" y="2843308"/>
-            <a:ext cx="1612868" cy="262414"/>
-          </a:xfrm>
-          <a:prstGeom xmlns:a="http://schemas.openxmlformats.org/drawingml/2006/main" prst="rect">
-            <a:avLst/>
-          </a:prstGeom>
-        </p:spPr>
-        <p:txBody>
-          <a:bodyPr xmlns:a="http://schemas.openxmlformats.org/drawingml/2006/main" lIns="0" tIns="0" rIns="0" bIns="0">
-            <a:noAutofit/>
-          </a:bodyPr>
-          <a:lstStyle xmlns:a="http://schemas.openxmlformats.org/drawingml/2006/main"/>
-          <a:p xmlns:a="http://schemas.openxmlformats.org/drawingml/2006/main">
-            <a:pPr algn="l">
-              <a:defRPr sz="1600">
-                <a:solidFill>
-                  <a:srgbClr val="000000"/>
-                </a:solidFill>
-                <a:latin typeface="Helvetica Neue"/>
-                <a:ea typeface="Helvetica Neue"/>
-                <a:cs typeface="Helvetica Neue"/>
-              </a:defRPr>
-            </a:pPr>
-            <a:r>
-              <a:t>CHECK</a:t>
-            </a:r>
-          </a:p>
-        </p:txBody>
-      </p:sp>
-      <p:sp>
-        <p:nvSpPr>
-          <p:cNvPr id="9" name="Content-Placeholder-15-10">
-            <a:extLst xmlns:a="http://schemas.openxmlformats.org/drawingml/2006/main">
-              <a:ext uri="{FF2B5EF4-FFF2-40B4-BE49-F238E27FC236}">
-                <a16:creationId xmlns:a16="http://schemas.microsoft.com/office/drawing/2014/main" id="{0FD39088-8A87-4DB3-B5DF-E832453FC9A9}"/>
-              </a:ext>
-            </a:extLst>
-          </p:cNvPr>
-          <p:cNvSpPr>
-            <a:spLocks xmlns:a="http://schemas.openxmlformats.org/drawingml/2006/main" noGrp="1"/>
-          </p:cNvSpPr>
-          <p:nvPr/>
-        </p:nvSpPr>
-        <p:spPr>
-          <a:xfrm xmlns:a="http://schemas.openxmlformats.org/drawingml/2006/main">
-            <a:off x="8223218" y="2843308"/>
-            <a:ext cx="1612868" cy="262414"/>
-          </a:xfrm>
-          <a:prstGeom xmlns:a="http://schemas.openxmlformats.org/drawingml/2006/main" prst="rect">
-            <a:avLst/>
-          </a:prstGeom>
-        </p:spPr>
-        <p:txBody>
-          <a:bodyPr xmlns:a="http://schemas.openxmlformats.org/drawingml/2006/main" lIns="0" tIns="0" rIns="0" bIns="0">
-            <a:noAutofit/>
-          </a:bodyPr>
-          <a:lstStyle xmlns:a="http://schemas.openxmlformats.org/drawingml/2006/main"/>
-          <a:p xmlns:a="http://schemas.openxmlformats.org/drawingml/2006/main">
-            <a:pPr algn="l">
-              <a:defRPr sz="1600">
-                <a:solidFill>
-                  <a:srgbClr val="000000"/>
-                </a:solidFill>
-                <a:latin typeface="Helvetica Neue"/>
-                <a:ea typeface="Helvetica Neue"/>
-                <a:cs typeface="Helvetica Neue"/>
-              </a:defRPr>
-            </a:pPr>
-            <a:r>
-              <a:t>ACT</a:t>
-            </a:r>
-          </a:p>
-        </p:txBody>
-      </p:sp>
-      <p:sp>
-        <p:nvSpPr>
-          <p:cNvPr id="10" name="Text-Placeholder-16-11">
-            <a:extLst xmlns:a="http://schemas.openxmlformats.org/drawingml/2006/main">
-              <a:ext uri="{FF2B5EF4-FFF2-40B4-BE49-F238E27FC236}">
-                <a16:creationId xmlns:a16="http://schemas.microsoft.com/office/drawing/2014/main" id="{BE1DA11A-B9F8-4548-B0CC-CE94121D1724}"/>
-              </a:ext>
-            </a:extLst>
-          </p:cNvPr>
-          <p:cNvSpPr>
-            <a:spLocks xmlns:a="http://schemas.openxmlformats.org/drawingml/2006/main" noGrp="1"/>
-          </p:cNvSpPr>
-          <p:nvPr/>
-        </p:nvSpPr>
-        <p:spPr>
-          <a:xfrm xmlns:a="http://schemas.openxmlformats.org/drawingml/2006/main">
-            <a:off x="4317111" y="3822668"/>
-            <a:ext cx="3156109" cy="1586294"/>
-          </a:xfrm>
-          <a:prstGeom xmlns:a="http://schemas.openxmlformats.org/drawingml/2006/main" prst="rect">
-            <a:avLst/>
-          </a:prstGeom>
-        </p:spPr>
-        <p:txBody>
-          <a:bodyPr xmlns:a="http://schemas.openxmlformats.org/drawingml/2006/main" lIns="0" tIns="0" rIns="0" bIns="0">
-            <a:noAutofit/>
-          </a:bodyPr>
-          <a:lstStyle xmlns:a="http://schemas.openxmlformats.org/drawingml/2006/main"/>
-          <a:p xmlns:a="http://schemas.openxmlformats.org/drawingml/2006/main">
-            <a:pPr algn="l">
-              <a:defRPr sz="2400">
-                <a:solidFill>
-                  <a:srgbClr val="000000"/>
-                </a:solidFill>
-                <a:latin typeface="Helvetica Neue"/>
-                <a:ea typeface="Helvetica Neue"/>
-                <a:cs typeface="Helvetica Neue"/>
-              </a:defRPr>
-            </a:pPr>
-            <a:r>
-              <a:t>Compare</a:t>
-            </a:r>
-          </a:p>
-          <a:p xmlns:a="http://schemas.openxmlformats.org/drawingml/2006/main">
-            <a:pPr algn="l">
-              <a:defRPr sz="2400">
-                <a:solidFill>
-                  <a:srgbClr val="000000"/>
-                </a:solidFill>
-                <a:latin typeface="Helvetica Neue"/>
-                <a:ea typeface="Helvetica Neue"/>
-                <a:cs typeface="Helvetica Neue"/>
-              </a:defRPr>
-            </a:pPr>
-            <a:r>
-              <a:t>Cross-check the drawing and cutting list</a:t>
-            </a:r>
-          </a:p>
-        </p:txBody>
-      </p:sp>
-      <p:sp>
-        <p:nvSpPr>
-          <p:cNvPr id="11" name="Text-Placeholder-16-12">
-            <a:extLst xmlns:a="http://schemas.openxmlformats.org/drawingml/2006/main">
-              <a:ext uri="{FF2B5EF4-FFF2-40B4-BE49-F238E27FC236}">
-                <a16:creationId xmlns:a16="http://schemas.microsoft.com/office/drawing/2014/main" id="{5654AE80-6622-4D94-94B6-DA9CD2609436}"/>
-              </a:ext>
-            </a:extLst>
-          </p:cNvPr>
-          <p:cNvSpPr>
-            <a:spLocks xmlns:a="http://schemas.openxmlformats.org/drawingml/2006/main" noGrp="1"/>
-          </p:cNvSpPr>
-          <p:nvPr/>
-        </p:nvSpPr>
-        <p:spPr>
-          <a:xfrm xmlns:a="http://schemas.openxmlformats.org/drawingml/2006/main">
-            <a:off x="399859" y="3822668"/>
-            <a:ext cx="3156109" cy="1586294"/>
-          </a:xfrm>
-          <a:prstGeom xmlns:a="http://schemas.openxmlformats.org/drawingml/2006/main" prst="rect">
-            <a:avLst/>
-          </a:prstGeom>
-        </p:spPr>
-        <p:txBody>
-          <a:bodyPr xmlns:a="http://schemas.openxmlformats.org/drawingml/2006/main" lIns="0" tIns="0" rIns="0" bIns="0">
-            <a:noAutofit/>
-          </a:bodyPr>
-          <a:lstStyle xmlns:a="http://schemas.openxmlformats.org/drawingml/2006/main"/>
-          <a:p xmlns:a="http://schemas.openxmlformats.org/drawingml/2006/main">
-            <a:pPr algn="l">
-              <a:defRPr sz="2400">
-                <a:solidFill>
-                  <a:srgbClr val="000000"/>
-                </a:solidFill>
-                <a:latin typeface="Helvetica Neue"/>
-                <a:ea typeface="Helvetica Neue"/>
-                <a:cs typeface="Helvetica Neue"/>
-              </a:defRPr>
-            </a:pPr>
-            <a:r>
-              <a:t>Read</a:t>
-            </a:r>
-          </a:p>
-          <a:p xmlns:a="http://schemas.openxmlformats.org/drawingml/2006/main">
-            <a:pPr algn="l">
-              <a:defRPr sz="2400">
-                <a:solidFill>
-                  <a:srgbClr val="000000"/>
-                </a:solidFill>
-                <a:latin typeface="Helvetica Neue"/>
-                <a:ea typeface="Helvetica Neue"/>
-                <a:cs typeface="Helvetica Neue"/>
-              </a:defRPr>
-            </a:pPr>
-            <a:r>
-              <a:t>Use the authorised 1:10 scale</a:t>
-            </a:r>
-          </a:p>
-        </p:txBody>
-      </p:sp>
-      <p:sp>
-        <p:nvSpPr>
-          <p:cNvPr id="12" name="Text-Placeholder-16-13">
-            <a:extLst xmlns:a="http://schemas.openxmlformats.org/drawingml/2006/main">
-              <a:ext uri="{FF2B5EF4-FFF2-40B4-BE49-F238E27FC236}">
-                <a16:creationId xmlns:a16="http://schemas.microsoft.com/office/drawing/2014/main" id="{87CB784E-1F10-4E80-911D-B67A4030F9AD}"/>
-              </a:ext>
-            </a:extLst>
-          </p:cNvPr>
-          <p:cNvSpPr>
-            <a:spLocks xmlns:a="http://schemas.openxmlformats.org/drawingml/2006/main" noGrp="1"/>
-          </p:cNvSpPr>
-          <p:nvPr/>
-        </p:nvSpPr>
-        <p:spPr>
-          <a:xfrm xmlns:a="http://schemas.openxmlformats.org/drawingml/2006/main">
-            <a:off x="8177879" y="3822668"/>
-            <a:ext cx="3156109" cy="1586294"/>
-          </a:xfrm>
-          <a:prstGeom xmlns:a="http://schemas.openxmlformats.org/drawingml/2006/main" prst="rect">
-            <a:avLst/>
-          </a:prstGeom>
-        </p:spPr>
-        <p:txBody>
-          <a:bodyPr xmlns:a="http://schemas.openxmlformats.org/drawingml/2006/main" lIns="0" tIns="0" rIns="0" bIns="0">
-            <a:noAutofit/>
-          </a:bodyPr>
-          <a:lstStyle xmlns:a="http://schemas.openxmlformats.org/drawingml/2006/main"/>
-          <a:p xmlns:a="http://schemas.openxmlformats.org/drawingml/2006/main">
-            <a:pPr algn="l">
-              <a:defRPr sz="2400">
-                <a:solidFill>
-                  <a:srgbClr val="000000"/>
-                </a:solidFill>
-                <a:latin typeface="Helvetica Neue"/>
-                <a:ea typeface="Helvetica Neue"/>
-                <a:cs typeface="Helvetica Neue"/>
-              </a:defRPr>
-            </a:pPr>
-            <a:r>
-              <a:t>Record</a:t>
-            </a:r>
-          </a:p>
-          <a:p xmlns:a="http://schemas.openxmlformats.org/drawingml/2006/main">
-            <a:pPr algn="l">
-              <a:defRPr sz="2400">
-                <a:solidFill>
-                  <a:srgbClr val="000000"/>
-                </a:solidFill>
-                <a:latin typeface="Helvetica Neue"/>
-                <a:ea typeface="Helvetica Neue"/>
-                <a:cs typeface="Helvetica Neue"/>
-              </a:defRPr>
-            </a:pPr>
-            <a:r>
-              <a:t>View the scale directly to avoid parallax</a:t>
+              <a:lnSpc>
+                <a:spcPct val="105000"/>
+              </a:lnSpc>
+              <a:buNone/>
+              <a:defRPr sz="1600" b="0">
+                <a:solidFill>
+                  <a:srgbClr val="5A665F"/>
+                </a:solidFill>
+                <a:latin typeface="Aptos"/>
+                <a:ea typeface="Aptos"/>
+                <a:cs typeface="Aptos"/>
+              </a:defRPr>
+            </a:pPr>
+            <a:r>
+              <a:rPr sz="1600" b="0">
+                <a:solidFill>
+                  <a:srgbClr val="5A665F"/>
+                </a:solidFill>
+                <a:latin typeface="Aptos"/>
+                <a:ea typeface="Aptos"/>
+                <a:cs typeface="Aptos"/>
+              </a:rPr>
+              <a:t>Plan parts, sequence and checkpoints before material is cut.</a:t>
             </a:r>
           </a:p>
         </p:txBody>
@@ -3176,6 +4219,13 @@
 <file path=ppt/slides/slide5.xml><?xml version="1.0" encoding="utf-8"?>
 <p:sld xmlns:p="http://schemas.openxmlformats.org/presentationml/2006/main">
   <p:cSld>
+    <p:bg>
+      <p:bgPr>
+        <a:solidFill xmlns:a="http://schemas.openxmlformats.org/drawingml/2006/main">
+          <a:srgbClr val="F8F2E8"/>
+        </a:solidFill>
+      </p:bgPr>
+    </p:bg>
     <p:spTree>
       <p:nvGrpSpPr>
         <p:cNvPr id="1" name=""/>
@@ -3201,28 +4251,42 @@
         </p:nvSpPr>
         <p:spPr>
           <a:xfrm xmlns:a="http://schemas.openxmlformats.org/drawingml/2006/main">
-            <a:off x="11279219" y="6278594"/>
-            <a:ext cx="519113" cy="241268"/>
+            <a:off x="11334750" y="6496050"/>
+            <a:ext cx="400050" cy="190500"/>
           </a:xfrm>
           <a:prstGeom xmlns:a="http://schemas.openxmlformats.org/drawingml/2006/main" prst="rect">
             <a:avLst/>
           </a:prstGeom>
         </p:spPr>
         <p:txBody>
-          <a:bodyPr xmlns:a="http://schemas.openxmlformats.org/drawingml/2006/main" lIns="0" tIns="0" rIns="0" bIns="0" anchor="b"/>
+          <a:bodyPr xmlns:a="http://schemas.openxmlformats.org/drawingml/2006/main" lIns="38100" tIns="38100" rIns="38100" bIns="38100" anchor="ctr">
+            <a:normAutofit fontScale="64935"/>
+          </a:bodyPr>
           <a:lstStyle xmlns:a="http://schemas.openxmlformats.org/drawingml/2006/main"/>
           <a:p xmlns:a="http://schemas.openxmlformats.org/drawingml/2006/main">
             <a:pPr algn="r">
-              <a:defRPr sz="1000">
-                <a:solidFill>
-                  <a:srgbClr val="000000"/>
-                </a:solidFill>
-                <a:latin typeface="Helvetica Neue"/>
-                <a:ea typeface="Helvetica Neue"/>
-                <a:cs typeface="Helvetica Neue"/>
-              </a:defRPr>
-            </a:pPr>
-            <a:r>
+              <a:lnSpc>
+                <a:spcPct val="105000"/>
+              </a:lnSpc>
+              <a:buNone/>
+              <a:defRPr sz="1100" b="1">
+                <a:solidFill>
+                  <a:srgbClr val="5A665F"/>
+                </a:solidFill>
+                <a:latin typeface="Aptos"/>
+                <a:ea typeface="Aptos"/>
+                <a:cs typeface="Aptos"/>
+              </a:defRPr>
+            </a:pPr>
+            <a:r>
+              <a:rPr sz="1100" b="1">
+                <a:solidFill>
+                  <a:srgbClr val="5A665F"/>
+                </a:solidFill>
+                <a:latin typeface="Aptos"/>
+                <a:ea typeface="Aptos"/>
+                <a:cs typeface="Aptos"/>
+              </a:rPr>
               <a:t>5</a:t>
             </a:r>
           </a:p>
@@ -3244,31 +4308,43 @@
         </p:nvSpPr>
         <p:spPr>
           <a:xfrm xmlns:a="http://schemas.openxmlformats.org/drawingml/2006/main">
-            <a:off x="393668" y="344043"/>
-            <a:ext cx="11404568" cy="1047464"/>
+            <a:off x="571500" y="533400"/>
+            <a:ext cx="5191125" cy="1504950"/>
           </a:xfrm>
           <a:prstGeom xmlns:a="http://schemas.openxmlformats.org/drawingml/2006/main" prst="rect">
             <a:avLst/>
           </a:prstGeom>
         </p:spPr>
         <p:txBody>
-          <a:bodyPr xmlns:a="http://schemas.openxmlformats.org/drawingml/2006/main" lIns="0" tIns="0" rIns="0" bIns="0" anchor="t">
+          <a:bodyPr xmlns:a="http://schemas.openxmlformats.org/drawingml/2006/main" lIns="38100" tIns="38100" rIns="38100" bIns="38100" anchor="t">
             <a:normAutofit fontScale="100000"/>
           </a:bodyPr>
           <a:lstStyle xmlns:a="http://schemas.openxmlformats.org/drawingml/2006/main"/>
           <a:p xmlns:a="http://schemas.openxmlformats.org/drawingml/2006/main">
             <a:pPr algn="l">
-              <a:defRPr sz="2900">
-                <a:solidFill>
-                  <a:srgbClr val="000000"/>
-                </a:solidFill>
-                <a:latin typeface="Helvetica Neue"/>
-                <a:ea typeface="Helvetica Neue"/>
-                <a:cs typeface="Helvetica Neue"/>
-              </a:defRPr>
-            </a:pPr>
-            <a:r>
-              <a:t>Plan parts and time</a:t>
+              <a:lnSpc>
+                <a:spcPct val="98000"/>
+              </a:lnSpc>
+              <a:buNone/>
+              <a:defRPr sz="3500" b="1">
+                <a:solidFill>
+                  <a:srgbClr val="173126"/>
+                </a:solidFill>
+                <a:latin typeface="Aptos"/>
+                <a:ea typeface="Aptos"/>
+                <a:cs typeface="Aptos"/>
+              </a:defRPr>
+            </a:pPr>
+            <a:r>
+              <a:rPr sz="3500" b="1">
+                <a:solidFill>
+                  <a:srgbClr val="173126"/>
+                </a:solidFill>
+                <a:latin typeface="Aptos"/>
+                <a:ea typeface="Aptos"/>
+                <a:cs typeface="Aptos"/>
+              </a:rPr>
+              <a:t>Datums and accurate marking out</a:t>
             </a:r>
           </a:p>
         </p:txBody>
@@ -3289,222 +4365,398 @@
         </p:nvSpPr>
         <p:spPr>
           <a:xfrm xmlns:a="http://schemas.openxmlformats.org/drawingml/2006/main">
-            <a:off x="393668" y="2031968"/>
-            <a:ext cx="5537168" cy="1643063"/>
+            <a:off x="685800" y="2095500"/>
+            <a:ext cx="4905375" cy="723900"/>
           </a:xfrm>
           <a:prstGeom xmlns:a="http://schemas.openxmlformats.org/drawingml/2006/main" prst="rect">
             <a:avLst/>
           </a:prstGeom>
         </p:spPr>
         <p:txBody>
-          <a:bodyPr xmlns:a="http://schemas.openxmlformats.org/drawingml/2006/main" lIns="91440" tIns="45720" rIns="91440" bIns="45720"/>
-          <a:lstStyle xmlns:a="http://schemas.openxmlformats.org/drawingml/2006/main"/>
-          <a:p xmlns:a="http://schemas.openxmlformats.org/drawingml/2006/main">
-            <a:pPr algn="l">
-              <a:defRPr sz="2400">
-                <a:solidFill>
-                  <a:srgbClr val="000000"/>
-                </a:solidFill>
-                <a:latin typeface="Helvetica Neue"/>
-                <a:ea typeface="Helvetica Neue"/>
-                <a:cs typeface="Helvetica Neue"/>
-              </a:defRPr>
-            </a:pPr>
-            <a:r>
-              <a:t>1</a:t>
-            </a:r>
-          </a:p>
-          <a:p xmlns:a="http://schemas.openxmlformats.org/drawingml/2006/main">
-            <a:pPr algn="l">
-              <a:defRPr sz="2400">
-                <a:solidFill>
-                  <a:srgbClr val="000000"/>
-                </a:solidFill>
-                <a:latin typeface="Helvetica Neue"/>
-                <a:ea typeface="Helvetica Neue"/>
-                <a:cs typeface="Helvetica Neue"/>
-              </a:defRPr>
-            </a:pPr>
-            <a:r>
-              <a:t>List each part, quantity, material and dimension</a:t>
-            </a:r>
-          </a:p>
-        </p:txBody>
-      </p:sp>
-      <p:sp>
-        <p:nvSpPr>
-          <p:cNvPr id="4" name="Content-Placeholder-10-5">
-            <a:extLst xmlns:a="http://schemas.openxmlformats.org/drawingml/2006/main">
-              <a:ext uri="{FF2B5EF4-FFF2-40B4-BE49-F238E27FC236}">
-                <a16:creationId xmlns:a16="http://schemas.microsoft.com/office/drawing/2014/main" id="{3E04426F-5491-4A9F-AB48-8C4BBC760AB5}"/>
-              </a:ext>
-            </a:extLst>
-          </p:cNvPr>
-          <p:cNvSpPr>
-            <a:spLocks xmlns:a="http://schemas.openxmlformats.org/drawingml/2006/main" noGrp="1"/>
-          </p:cNvSpPr>
-          <p:nvPr/>
-        </p:nvSpPr>
-        <p:spPr>
-          <a:xfrm xmlns:a="http://schemas.openxmlformats.org/drawingml/2006/main">
-            <a:off x="6256592" y="2031968"/>
-            <a:ext cx="5537168" cy="1643063"/>
-          </a:xfrm>
-          <a:prstGeom xmlns:a="http://schemas.openxmlformats.org/drawingml/2006/main" prst="rect">
-            <a:avLst/>
-          </a:prstGeom>
-        </p:spPr>
-        <p:txBody>
-          <a:bodyPr xmlns:a="http://schemas.openxmlformats.org/drawingml/2006/main" lIns="91440" tIns="45720" rIns="91440" bIns="45720"/>
-          <a:lstStyle xmlns:a="http://schemas.openxmlformats.org/drawingml/2006/main"/>
-          <a:p xmlns:a="http://schemas.openxmlformats.org/drawingml/2006/main">
-            <a:pPr algn="l">
-              <a:defRPr sz="2400">
-                <a:solidFill>
-                  <a:srgbClr val="000000"/>
-                </a:solidFill>
-                <a:latin typeface="Helvetica Neue"/>
-                <a:ea typeface="Helvetica Neue"/>
-                <a:cs typeface="Helvetica Neue"/>
-              </a:defRPr>
-            </a:pPr>
-            <a:r>
-              <a:t>2</a:t>
-            </a:r>
-          </a:p>
-          <a:p xmlns:a="http://schemas.openxmlformats.org/drawingml/2006/main">
-            <a:pPr algn="l">
-              <a:defRPr sz="2400">
-                <a:solidFill>
-                  <a:srgbClr val="000000"/>
-                </a:solidFill>
-                <a:latin typeface="Helvetica Neue"/>
-                <a:ea typeface="Helvetica Neue"/>
-                <a:cs typeface="Helvetica Neue"/>
-              </a:defRPr>
-            </a:pPr>
-            <a:r>
-              <a:t>Cross-check the drawing and cutting list</a:t>
-            </a:r>
-          </a:p>
-        </p:txBody>
-      </p:sp>
-      <p:sp>
-        <p:nvSpPr>
-          <p:cNvPr id="5" name="Content-Placeholder-9-6">
-            <a:extLst xmlns:a="http://schemas.openxmlformats.org/drawingml/2006/main">
-              <a:ext uri="{FF2B5EF4-FFF2-40B4-BE49-F238E27FC236}">
-                <a16:creationId xmlns:a16="http://schemas.microsoft.com/office/drawing/2014/main" id="{D08093EE-2A42-4209-8A61-F30AA602B4B7}"/>
-              </a:ext>
-            </a:extLst>
-          </p:cNvPr>
-          <p:cNvSpPr>
-            <a:spLocks xmlns:a="http://schemas.openxmlformats.org/drawingml/2006/main" noGrp="1"/>
-          </p:cNvSpPr>
-          <p:nvPr/>
-        </p:nvSpPr>
-        <p:spPr>
-          <a:xfrm xmlns:a="http://schemas.openxmlformats.org/drawingml/2006/main">
-            <a:off x="393668" y="4016978"/>
-            <a:ext cx="5537168" cy="1643158"/>
-          </a:xfrm>
-          <a:prstGeom xmlns:a="http://schemas.openxmlformats.org/drawingml/2006/main" prst="rect">
-            <a:avLst/>
-          </a:prstGeom>
-        </p:spPr>
-        <p:txBody>
-          <a:bodyPr xmlns:a="http://schemas.openxmlformats.org/drawingml/2006/main" lIns="0" tIns="0" rIns="0" bIns="0">
+          <a:bodyPr xmlns:a="http://schemas.openxmlformats.org/drawingml/2006/main" lIns="38100" tIns="38100" rIns="38100" bIns="38100" anchor="ctr">
             <a:normAutofit fontScale="100000"/>
           </a:bodyPr>
           <a:lstStyle xmlns:a="http://schemas.openxmlformats.org/drawingml/2006/main"/>
           <a:p xmlns:a="http://schemas.openxmlformats.org/drawingml/2006/main">
             <a:pPr algn="l">
-              <a:defRPr sz="2400">
-                <a:solidFill>
-                  <a:srgbClr val="000000"/>
-                </a:solidFill>
-                <a:latin typeface="Helvetica Neue"/>
-                <a:ea typeface="Helvetica Neue"/>
-                <a:cs typeface="Helvetica Neue"/>
-              </a:defRPr>
-            </a:pPr>
-            <a:r>
-              <a:t>3</a:t>
-            </a:r>
-          </a:p>
-          <a:p xmlns:a="http://schemas.openxmlformats.org/drawingml/2006/main">
-            <a:pPr algn="l">
-              <a:defRPr sz="2400">
-                <a:solidFill>
-                  <a:srgbClr val="000000"/>
-                </a:solidFill>
-                <a:latin typeface="Helvetica Neue"/>
-                <a:ea typeface="Helvetica Neue"/>
-                <a:cs typeface="Helvetica Neue"/>
-              </a:defRPr>
-            </a:pPr>
-            <a:r>
-              <a:t>Sequence dependent stages realistically</a:t>
-            </a:r>
-          </a:p>
-        </p:txBody>
-      </p:sp>
-      <p:sp>
-        <p:nvSpPr>
-          <p:cNvPr id="6" name="Content-Placeholder-10-7">
-            <a:extLst xmlns:a="http://schemas.openxmlformats.org/drawingml/2006/main">
-              <a:ext uri="{FF2B5EF4-FFF2-40B4-BE49-F238E27FC236}">
-                <a16:creationId xmlns:a16="http://schemas.microsoft.com/office/drawing/2014/main" id="{4FAB061D-DD52-4B05-B737-7F3BB11E356A}"/>
-              </a:ext>
-            </a:extLst>
-          </p:cNvPr>
-          <p:cNvSpPr>
-            <a:spLocks xmlns:a="http://schemas.openxmlformats.org/drawingml/2006/main" noGrp="1"/>
-          </p:cNvSpPr>
-          <p:nvPr/>
-        </p:nvSpPr>
-        <p:spPr>
-          <a:xfrm xmlns:a="http://schemas.openxmlformats.org/drawingml/2006/main">
-            <a:off x="6256592" y="4016978"/>
-            <a:ext cx="5537168" cy="1643158"/>
+              <a:lnSpc>
+                <a:spcPct val="108000"/>
+              </a:lnSpc>
+              <a:buNone/>
+              <a:defRPr sz="1700" b="0">
+                <a:solidFill>
+                  <a:srgbClr val="173126"/>
+                </a:solidFill>
+                <a:latin typeface="Aptos"/>
+                <a:ea typeface="Aptos"/>
+                <a:cs typeface="Aptos"/>
+              </a:defRPr>
+            </a:pPr>
+            <a:r>
+              <a:rPr sz="1700" b="0">
+                <a:solidFill>
+                  <a:srgbClr val="173126"/>
+                </a:solidFill>
+                <a:latin typeface="Aptos"/>
+                <a:ea typeface="Aptos"/>
+                <a:cs typeface="Aptos"/>
+              </a:rPr>
+              <a:t>01 Select: Identify the reliable datum or reference edge.</a:t>
+            </a:r>
+          </a:p>
+        </p:txBody>
+      </p:sp>
+      <p:sp>
+        <p:nvSpPr>
+          <p:cNvPr id="4" name="Content-Placeholder-10-5">
+            <a:extLst xmlns:a="http://schemas.openxmlformats.org/drawingml/2006/main">
+              <a:ext uri="{FF2B5EF4-FFF2-40B4-BE49-F238E27FC236}">
+                <a16:creationId xmlns:a16="http://schemas.microsoft.com/office/drawing/2014/main" id="{3E04426F-5491-4A9F-AB48-8C4BBC760AB5}"/>
+              </a:ext>
+            </a:extLst>
+          </p:cNvPr>
+          <p:cNvSpPr>
+            <a:spLocks xmlns:a="http://schemas.openxmlformats.org/drawingml/2006/main" noGrp="1"/>
+          </p:cNvSpPr>
+          <p:nvPr/>
+        </p:nvSpPr>
+        <p:spPr>
+          <a:xfrm xmlns:a="http://schemas.openxmlformats.org/drawingml/2006/main">
+            <a:off x="685800" y="2905125"/>
+            <a:ext cx="4905375" cy="723900"/>
           </a:xfrm>
           <a:prstGeom xmlns:a="http://schemas.openxmlformats.org/drawingml/2006/main" prst="rect">
             <a:avLst/>
           </a:prstGeom>
         </p:spPr>
         <p:txBody>
-          <a:bodyPr xmlns:a="http://schemas.openxmlformats.org/drawingml/2006/main" lIns="0" tIns="0" rIns="0" bIns="0">
+          <a:bodyPr xmlns:a="http://schemas.openxmlformats.org/drawingml/2006/main" lIns="38100" tIns="38100" rIns="38100" bIns="38100" anchor="ctr">
             <a:normAutofit fontScale="100000"/>
           </a:bodyPr>
           <a:lstStyle xmlns:a="http://schemas.openxmlformats.org/drawingml/2006/main"/>
           <a:p xmlns:a="http://schemas.openxmlformats.org/drawingml/2006/main">
             <a:pPr algn="l">
-              <a:defRPr sz="2400">
-                <a:solidFill>
-                  <a:srgbClr val="000000"/>
-                </a:solidFill>
-                <a:latin typeface="Helvetica Neue"/>
-                <a:ea typeface="Helvetica Neue"/>
-                <a:cs typeface="Helvetica Neue"/>
-              </a:defRPr>
-            </a:pPr>
-            <a:r>
-              <a:t>4</a:t>
-            </a:r>
-          </a:p>
-          <a:p xmlns:a="http://schemas.openxmlformats.org/drawingml/2006/main">
-            <a:pPr algn="l">
-              <a:defRPr sz="2400">
-                <a:solidFill>
-                  <a:srgbClr val="000000"/>
-                </a:solidFill>
-                <a:latin typeface="Helvetica Neue"/>
-                <a:ea typeface="Helvetica Neue"/>
-                <a:cs typeface="Helvetica Neue"/>
-              </a:defRPr>
-            </a:pPr>
-            <a:r>
-              <a:t>Use milestones and contingency time</a:t>
+              <a:lnSpc>
+                <a:spcPct val="108000"/>
+              </a:lnSpc>
+              <a:buNone/>
+              <a:defRPr sz="1700" b="0">
+                <a:solidFill>
+                  <a:srgbClr val="173126"/>
+                </a:solidFill>
+                <a:latin typeface="Aptos"/>
+                <a:ea typeface="Aptos"/>
+                <a:cs typeface="Aptos"/>
+              </a:defRPr>
+            </a:pPr>
+            <a:r>
+              <a:rPr sz="1700" b="0">
+                <a:solidFill>
+                  <a:srgbClr val="173126"/>
+                </a:solidFill>
+                <a:latin typeface="Aptos"/>
+                <a:ea typeface="Aptos"/>
+                <a:cs typeface="Aptos"/>
+              </a:rPr>
+              <a:t>02 Measure: Work from zero and read directly above the rule.</a:t>
+            </a:r>
+          </a:p>
+        </p:txBody>
+      </p:sp>
+      <p:sp>
+        <p:nvSpPr>
+          <p:cNvPr id="5" name="Content-Placeholder-9-6">
+            <a:extLst xmlns:a="http://schemas.openxmlformats.org/drawingml/2006/main">
+              <a:ext uri="{FF2B5EF4-FFF2-40B4-BE49-F238E27FC236}">
+                <a16:creationId xmlns:a16="http://schemas.microsoft.com/office/drawing/2014/main" id="{D08093EE-2A42-4209-8A61-F30AA602B4B7}"/>
+              </a:ext>
+            </a:extLst>
+          </p:cNvPr>
+          <p:cNvSpPr>
+            <a:spLocks xmlns:a="http://schemas.openxmlformats.org/drawingml/2006/main" noGrp="1"/>
+          </p:cNvSpPr>
+          <p:nvPr/>
+        </p:nvSpPr>
+        <p:spPr>
+          <a:xfrm xmlns:a="http://schemas.openxmlformats.org/drawingml/2006/main">
+            <a:off x="685800" y="3714750"/>
+            <a:ext cx="4905375" cy="723900"/>
+          </a:xfrm>
+          <a:prstGeom xmlns:a="http://schemas.openxmlformats.org/drawingml/2006/main" prst="rect">
+            <a:avLst/>
+          </a:prstGeom>
+        </p:spPr>
+        <p:txBody>
+          <a:bodyPr xmlns:a="http://schemas.openxmlformats.org/drawingml/2006/main" lIns="38100" tIns="38100" rIns="38100" bIns="38100" anchor="ctr">
+            <a:normAutofit fontScale="100000"/>
+          </a:bodyPr>
+          <a:lstStyle xmlns:a="http://schemas.openxmlformats.org/drawingml/2006/main"/>
+          <a:p xmlns:a="http://schemas.openxmlformats.org/drawingml/2006/main">
+            <a:pPr algn="l">
+              <a:lnSpc>
+                <a:spcPct val="108000"/>
+              </a:lnSpc>
+              <a:buNone/>
+              <a:defRPr sz="1700" b="0">
+                <a:solidFill>
+                  <a:srgbClr val="173126"/>
+                </a:solidFill>
+                <a:latin typeface="Aptos"/>
+                <a:ea typeface="Aptos"/>
+                <a:cs typeface="Aptos"/>
+              </a:defRPr>
+            </a:pPr>
+            <a:r>
+              <a:rPr sz="1700" b="0">
+                <a:solidFill>
+                  <a:srgbClr val="173126"/>
+                </a:solidFill>
+                <a:latin typeface="Aptos"/>
+                <a:ea typeface="Aptos"/>
+                <a:cs typeface="Aptos"/>
+              </a:rPr>
+              <a:t>03 Mark: Use a sharp pencil and extend square lines clearly.</a:t>
+            </a:r>
+          </a:p>
+        </p:txBody>
+      </p:sp>
+      <p:sp>
+        <p:nvSpPr>
+          <p:cNvPr id="6" name="Content-Placeholder-10-7">
+            <a:extLst xmlns:a="http://schemas.openxmlformats.org/drawingml/2006/main">
+              <a:ext uri="{FF2B5EF4-FFF2-40B4-BE49-F238E27FC236}">
+                <a16:creationId xmlns:a16="http://schemas.microsoft.com/office/drawing/2014/main" id="{4FAB061D-DD52-4B05-B737-7F3BB11E356A}"/>
+              </a:ext>
+            </a:extLst>
+          </p:cNvPr>
+          <p:cNvSpPr>
+            <a:spLocks xmlns:a="http://schemas.openxmlformats.org/drawingml/2006/main" noGrp="1"/>
+          </p:cNvSpPr>
+          <p:nvPr/>
+        </p:nvSpPr>
+        <p:spPr>
+          <a:xfrm xmlns:a="http://schemas.openxmlformats.org/drawingml/2006/main">
+            <a:off x="685800" y="4524375"/>
+            <a:ext cx="4905375" cy="723900"/>
+          </a:xfrm>
+          <a:prstGeom xmlns:a="http://schemas.openxmlformats.org/drawingml/2006/main" prst="rect">
+            <a:avLst/>
+          </a:prstGeom>
+        </p:spPr>
+        <p:txBody>
+          <a:bodyPr xmlns:a="http://schemas.openxmlformats.org/drawingml/2006/main" lIns="38100" tIns="38100" rIns="38100" bIns="38100" anchor="ctr">
+            <a:normAutofit fontScale="100000"/>
+          </a:bodyPr>
+          <a:lstStyle xmlns:a="http://schemas.openxmlformats.org/drawingml/2006/main"/>
+          <a:p xmlns:a="http://schemas.openxmlformats.org/drawingml/2006/main">
+            <a:pPr algn="l">
+              <a:lnSpc>
+                <a:spcPct val="108000"/>
+              </a:lnSpc>
+              <a:buNone/>
+              <a:defRPr sz="1600" b="1">
+                <a:solidFill>
+                  <a:srgbClr val="5A665F"/>
+                </a:solidFill>
+                <a:latin typeface="Aptos"/>
+                <a:ea typeface="Aptos"/>
+                <a:cs typeface="Aptos"/>
+              </a:defRPr>
+            </a:pPr>
+            <a:r>
+              <a:rPr sz="1600" b="1">
+                <a:solidFill>
+                  <a:srgbClr val="5A665F"/>
+                </a:solidFill>
+                <a:latin typeface="Aptos"/>
+                <a:ea typeface="Aptos"/>
+                <a:cs typeface="Aptos"/>
+              </a:rPr>
+              <a:t>EVIDENCE Save a labelled note, check or photograph that proves your decision.</a:t>
+            </a:r>
+          </a:p>
+        </p:txBody>
+      </p:sp>
+      <p:sp>
+        <p:nvSpPr>
+          <p:cNvPr id="8" name="">
+            <a:extLst xmlns:a="http://schemas.openxmlformats.org/drawingml/2006/main">
+              <a:ext uri="{FF2B5EF4-FFF2-40B4-BE49-F238E27FC236}">
+                <a16:creationId xmlns:a16="http://schemas.microsoft.com/office/drawing/2014/main" id="{DD27D29F-C449-4387-BA00-523245E59CFA}"/>
+              </a:ext>
+            </a:extLst>
+          </p:cNvPr>
+          <p:cNvSpPr>
+            <a:spLocks xmlns:a="http://schemas.openxmlformats.org/drawingml/2006/main" noGrp="1"/>
+          </p:cNvSpPr>
+          <p:nvPr/>
+        </p:nvSpPr>
+        <p:spPr>
+          <a:xfrm xmlns:a="http://schemas.openxmlformats.org/drawingml/2006/main">
+            <a:off x="590550" y="285750"/>
+            <a:ext cx="2476500" cy="238125"/>
+          </a:xfrm>
+          <a:prstGeom xmlns:a="http://schemas.openxmlformats.org/drawingml/2006/main" prst="rect">
+            <a:avLst/>
+          </a:prstGeom>
+          <a:noFill xmlns:a="http://schemas.openxmlformats.org/drawingml/2006/main"/>
+          <a:ln xmlns:a="http://schemas.openxmlformats.org/drawingml/2006/main" w="0">
+            <a:noFill/>
+            <a:prstDash val="solid"/>
+          </a:ln>
+        </p:spPr>
+        <p:txBody>
+          <a:bodyPr xmlns:a="http://schemas.openxmlformats.org/drawingml/2006/main" lIns="38100" tIns="38100" rIns="38100" bIns="38100" anchor="t">
+            <a:normAutofit fontScale="77839"/>
+          </a:bodyPr>
+          <a:lstStyle xmlns:a="http://schemas.openxmlformats.org/drawingml/2006/main"/>
+          <a:p xmlns:a="http://schemas.openxmlformats.org/drawingml/2006/main">
+            <a:pPr algn="l">
+              <a:lnSpc>
+                <a:spcPct val="105000"/>
+              </a:lnSpc>
+              <a:buNone/>
+              <a:defRPr sz="1300" b="1">
+                <a:solidFill>
+                  <a:srgbClr val="D8941C"/>
+                </a:solidFill>
+                <a:latin typeface="Aptos"/>
+                <a:ea typeface="Aptos"/>
+                <a:cs typeface="Aptos"/>
+              </a:defRPr>
+            </a:pPr>
+            <a:r>
+              <a:rPr sz="1300" b="1">
+                <a:solidFill>
+                  <a:srgbClr val="D8941C"/>
+                </a:solidFill>
+                <a:latin typeface="Aptos"/>
+                <a:ea typeface="Aptos"/>
+                <a:cs typeface="Aptos"/>
+              </a:rPr>
+              <a:t>THEORY 3 OF 3</a:t>
+            </a:r>
+          </a:p>
+        </p:txBody>
+      </p:sp>
+      <p:sp>
+        <p:nvSpPr>
+          <p:cNvPr id="9" name="">
+            <a:extLst xmlns:a="http://schemas.openxmlformats.org/drawingml/2006/main">
+              <a:ext uri="{FF2B5EF4-FFF2-40B4-BE49-F238E27FC236}">
+                <a16:creationId xmlns:a16="http://schemas.microsoft.com/office/drawing/2014/main" id="{392B6898-CB67-45A2-9BD0-039DA959AA09}"/>
+              </a:ext>
+            </a:extLst>
+          </p:cNvPr>
+          <p:cNvSpPr>
+            <a:spLocks xmlns:a="http://schemas.openxmlformats.org/drawingml/2006/main" noGrp="1"/>
+          </p:cNvSpPr>
+          <p:nvPr/>
+        </p:nvSpPr>
+        <p:spPr>
+          <a:xfrm xmlns:a="http://schemas.openxmlformats.org/drawingml/2006/main">
+            <a:off x="6048375" y="552450"/>
+            <a:ext cx="5619750" cy="5524500"/>
+          </a:xfrm>
+          <a:prstGeom xmlns:a="http://schemas.openxmlformats.org/drawingml/2006/main" prst="roundRect">
+            <a:avLst>
+              <a:gd name="adj" fmla="val 2069"/>
+            </a:avLst>
+          </a:prstGeom>
+          <a:noFill xmlns:a="http://schemas.openxmlformats.org/drawingml/2006/main"/>
+          <a:ln xmlns:a="http://schemas.openxmlformats.org/drawingml/2006/main" w="9525">
+            <a:solidFill>
+              <a:srgbClr val="D8941C"/>
+            </a:solidFill>
+            <a:prstDash val="solid"/>
+          </a:ln>
+        </p:spPr>
+      </p:sp>
+      <p:pic>
+        <p:nvPicPr>
+          <p:cNvPr id="20" name=""/>
+          <p:cNvPicPr>
+            <a:picLocks xmlns:a="http://schemas.openxmlformats.org/drawingml/2006/main" noChangeAspect="1"/>
+          </p:cNvPicPr>
+          <p:nvPr/>
+        </p:nvPicPr>
+        <p:blipFill>
+          <a:blip xmlns:r="http://schemas.openxmlformats.org/officeDocument/2006/relationships" xmlns:a="http://schemas.openxmlformats.org/drawingml/2006/main" r:embed="R5c331bf78560443e"/>
+          <a:srcRect xmlns:a="http://schemas.openxmlformats.org/drawingml/2006/main" l="20354" t="0" r="20354" b="0"/>
+          <a:stretch xmlns:a="http://schemas.openxmlformats.org/drawingml/2006/main">
+            <a:fillRect l="0" t="0" r="0" b="0"/>
+          </a:stretch>
+        </p:blipFill>
+        <p:spPr>
+          <a:xfrm xmlns:a="http://schemas.openxmlformats.org/drawingml/2006/main">
+            <a:off x="6200775" y="704850"/>
+            <a:ext cx="5314950" cy="4000500"/>
+          </a:xfrm>
+          <a:prstGeom xmlns:a="http://schemas.openxmlformats.org/drawingml/2006/main" prst="roundRect">
+            <a:avLst>
+              <a:gd name="adj" fmla="val 2857"/>
+            </a:avLst>
+          </a:prstGeom>
+        </p:spPr>
+      </p:pic>
+      <p:sp>
+        <p:nvSpPr>
+          <p:cNvPr id="11" name="">
+            <a:extLst xmlns:a="http://schemas.openxmlformats.org/drawingml/2006/main">
+              <a:ext uri="{FF2B5EF4-FFF2-40B4-BE49-F238E27FC236}">
+                <a16:creationId xmlns:a16="http://schemas.microsoft.com/office/drawing/2014/main" id="{8A770822-2139-44C5-BD19-07A26685A082}"/>
+              </a:ext>
+            </a:extLst>
+          </p:cNvPr>
+          <p:cNvSpPr>
+            <a:spLocks xmlns:a="http://schemas.openxmlformats.org/drawingml/2006/main" noGrp="1"/>
+          </p:cNvSpPr>
+          <p:nvPr/>
+        </p:nvSpPr>
+        <p:spPr>
+          <a:xfrm xmlns:a="http://schemas.openxmlformats.org/drawingml/2006/main">
+            <a:off x="6267450" y="4810125"/>
+            <a:ext cx="5162550" cy="1123950"/>
+          </a:xfrm>
+          <a:prstGeom xmlns:a="http://schemas.openxmlformats.org/drawingml/2006/main" prst="rect">
+            <a:avLst/>
+          </a:prstGeom>
+          <a:noFill xmlns:a="http://schemas.openxmlformats.org/drawingml/2006/main"/>
+          <a:ln xmlns:a="http://schemas.openxmlformats.org/drawingml/2006/main" w="0">
+            <a:noFill/>
+            <a:prstDash val="solid"/>
+          </a:ln>
+        </p:spPr>
+        <p:txBody>
+          <a:bodyPr xmlns:a="http://schemas.openxmlformats.org/drawingml/2006/main" lIns="38100" tIns="38100" rIns="38100" bIns="38100" anchor="t">
+            <a:normAutofit fontScale="100000"/>
+          </a:bodyPr>
+          <a:lstStyle xmlns:a="http://schemas.openxmlformats.org/drawingml/2006/main"/>
+          <a:p xmlns:a="http://schemas.openxmlformats.org/drawingml/2006/main">
+            <a:pPr algn="l">
+              <a:lnSpc>
+                <a:spcPct val="105000"/>
+              </a:lnSpc>
+              <a:buNone/>
+              <a:defRPr sz="1600" b="0">
+                <a:solidFill>
+                  <a:srgbClr val="5A665F"/>
+                </a:solidFill>
+                <a:latin typeface="Aptos"/>
+                <a:ea typeface="Aptos"/>
+                <a:cs typeface="Aptos"/>
+              </a:defRPr>
+            </a:pPr>
+            <a:r>
+              <a:rPr sz="1600" b="0">
+                <a:solidFill>
+                  <a:srgbClr val="5A665F"/>
+                </a:solidFill>
+                <a:latin typeface="Aptos"/>
+                <a:ea typeface="Aptos"/>
+                <a:cs typeface="Aptos"/>
+              </a:rPr>
+              <a:t>Work from a datum and check each measurement before cutting.</a:t>
             </a:r>
           </a:p>
         </p:txBody>
@@ -3522,6 +4774,13 @@
 <file path=ppt/slides/slide6.xml><?xml version="1.0" encoding="utf-8"?>
 <p:sld xmlns:p="http://schemas.openxmlformats.org/presentationml/2006/main">
   <p:cSld>
+    <p:bg>
+      <p:bgPr>
+        <a:solidFill xmlns:a="http://schemas.openxmlformats.org/drawingml/2006/main">
+          <a:srgbClr val="F8F2E8"/>
+        </a:solidFill>
+      </p:bgPr>
+    </p:bg>
     <p:spTree>
       <p:nvGrpSpPr>
         <p:cNvPr id="1" name=""/>
@@ -3547,19 +4806,441 @@
         </p:nvSpPr>
         <p:spPr>
           <a:xfrm xmlns:a="http://schemas.openxmlformats.org/drawingml/2006/main">
-            <a:off x="11279315" y="6279261"/>
-            <a:ext cx="518922" cy="241268"/>
+            <a:off x="11334750" y="6496050"/>
+            <a:ext cx="400050" cy="190500"/>
           </a:xfrm>
           <a:prstGeom xmlns:a="http://schemas.openxmlformats.org/drawingml/2006/main" prst="rect">
             <a:avLst/>
           </a:prstGeom>
         </p:spPr>
         <p:txBody>
-          <a:bodyPr xmlns:a="http://schemas.openxmlformats.org/drawingml/2006/main" lIns="0" tIns="0" rIns="0" bIns="0" anchor="b"/>
+          <a:bodyPr xmlns:a="http://schemas.openxmlformats.org/drawingml/2006/main" lIns="38100" tIns="38100" rIns="38100" bIns="38100" anchor="ctr">
+            <a:normAutofit fontScale="64935"/>
+          </a:bodyPr>
           <a:lstStyle xmlns:a="http://schemas.openxmlformats.org/drawingml/2006/main"/>
           <a:p xmlns:a="http://schemas.openxmlformats.org/drawingml/2006/main">
             <a:pPr algn="r">
-              <a:defRPr sz="1000">
+              <a:lnSpc>
+                <a:spcPct val="105000"/>
+              </a:lnSpc>
+              <a:buNone/>
+              <a:defRPr sz="1100" b="1">
+                <a:solidFill>
+                  <a:srgbClr val="5A665F"/>
+                </a:solidFill>
+                <a:latin typeface="Aptos"/>
+                <a:ea typeface="Aptos"/>
+                <a:cs typeface="Aptos"/>
+              </a:defRPr>
+            </a:pPr>
+            <a:r>
+              <a:rPr sz="1100" b="1">
+                <a:solidFill>
+                  <a:srgbClr val="5A665F"/>
+                </a:solidFill>
+                <a:latin typeface="Aptos"/>
+                <a:ea typeface="Aptos"/>
+                <a:cs typeface="Aptos"/>
+              </a:rPr>
+              <a:t>6</a:t>
+            </a:r>
+          </a:p>
+        </p:txBody>
+      </p:sp>
+      <p:sp>
+        <p:nvSpPr>
+          <p:cNvPr id="2" name="Title-10-3">
+            <a:extLst xmlns:a="http://schemas.openxmlformats.org/drawingml/2006/main">
+              <a:ext uri="{FF2B5EF4-FFF2-40B4-BE49-F238E27FC236}">
+                <a16:creationId xmlns:a16="http://schemas.microsoft.com/office/drawing/2014/main" id="{C8B22E54-F6DA-47E7-A87E-253D7914750B}"/>
+              </a:ext>
+            </a:extLst>
+          </p:cNvPr>
+          <p:cNvSpPr>
+            <a:spLocks xmlns:a="http://schemas.openxmlformats.org/drawingml/2006/main" noGrp="1"/>
+          </p:cNvSpPr>
+          <p:nvPr/>
+        </p:nvSpPr>
+        <p:spPr>
+          <a:xfrm xmlns:a="http://schemas.openxmlformats.org/drawingml/2006/main">
+            <a:off x="571500" y="533400"/>
+            <a:ext cx="10287000" cy="666750"/>
+          </a:xfrm>
+          <a:prstGeom xmlns:a="http://schemas.openxmlformats.org/drawingml/2006/main" prst="rect">
+            <a:avLst/>
+          </a:prstGeom>
+        </p:spPr>
+        <p:txBody>
+          <a:bodyPr xmlns:a="http://schemas.openxmlformats.org/drawingml/2006/main" lIns="38100" tIns="38100" rIns="38100" bIns="38100" anchor="t">
+            <a:normAutofit fontScale="100000"/>
+          </a:bodyPr>
+          <a:lstStyle xmlns:a="http://schemas.openxmlformats.org/drawingml/2006/main"/>
+          <a:p xmlns:a="http://schemas.openxmlformats.org/drawingml/2006/main">
+            <a:pPr algn="l">
+              <a:lnSpc>
+                <a:spcPct val="105000"/>
+              </a:lnSpc>
+              <a:buNone/>
+              <a:defRPr sz="3600" b="1">
+                <a:solidFill>
+                  <a:srgbClr val="173126"/>
+                </a:solidFill>
+                <a:latin typeface="Aptos"/>
+                <a:ea typeface="Aptos"/>
+                <a:cs typeface="Aptos"/>
+              </a:defRPr>
+            </a:pPr>
+            <a:r>
+              <a:rPr sz="3600" b="1">
+                <a:solidFill>
+                  <a:srgbClr val="173126"/>
+                </a:solidFill>
+                <a:latin typeface="Aptos"/>
+                <a:ea typeface="Aptos"/>
+                <a:cs typeface="Aptos"/>
+              </a:rPr>
+              <a:t>Pause and check what you can explain</a:t>
+            </a:r>
+          </a:p>
+        </p:txBody>
+      </p:sp>
+      <p:cxnSp>
+        <p:nvCxnSpPr>
+          <p:cNvPr id="25" name="Google-Shape-2259-p159-4"/>
+          <p:cNvCxnSpPr/>
+          <p:nvPr/>
+        </p:nvCxnSpPr>
+        <p:spPr>
+          <a:xfrm xmlns:a="http://schemas.openxmlformats.org/drawingml/2006/main">
+            <a:off x="0" y="0"/>
+            <a:ext cx="9525" cy="9525"/>
+          </a:xfrm>
+          <a:prstGeom xmlns:a="http://schemas.openxmlformats.org/drawingml/2006/main" prst="straightConnector1">
+            <a:avLst/>
+          </a:prstGeom>
+          <a:ln xmlns:a="http://schemas.openxmlformats.org/drawingml/2006/main" w="0">
+            <a:noFill/>
+            <a:prstDash val="solid"/>
+          </a:ln>
+        </p:spPr>
+      </p:cxnSp>
+      <p:sp>
+        <p:nvSpPr>
+          <p:cNvPr id="4" name="Google-Shape-2260-p159-5">
+            <a:extLst xmlns:a="http://schemas.openxmlformats.org/drawingml/2006/main">
+              <a:ext uri="{FF2B5EF4-FFF2-40B4-BE49-F238E27FC236}">
+                <a16:creationId xmlns:a16="http://schemas.microsoft.com/office/drawing/2014/main" id="{7C746A1F-96B1-4E54-9EC0-D44929B9F5DE}"/>
+              </a:ext>
+            </a:extLst>
+          </p:cNvPr>
+          <p:cNvSpPr>
+            <a:spLocks xmlns:a="http://schemas.openxmlformats.org/drawingml/2006/main" noGrp="1"/>
+          </p:cNvSpPr>
+          <p:nvPr/>
+        </p:nvSpPr>
+        <p:spPr>
+          <a:xfrm xmlns:a="http://schemas.openxmlformats.org/drawingml/2006/main">
+            <a:off x="0" y="0"/>
+            <a:ext cx="9525" cy="9525"/>
+          </a:xfrm>
+          <a:prstGeom xmlns:a="http://schemas.openxmlformats.org/drawingml/2006/main" prst="ellipse">
+            <a:avLst/>
+          </a:prstGeom>
+          <a:noFill xmlns:a="http://schemas.openxmlformats.org/drawingml/2006/main"/>
+          <a:ln xmlns:a="http://schemas.openxmlformats.org/drawingml/2006/main" w="0">
+            <a:noFill/>
+            <a:prstDash val="solid"/>
+          </a:ln>
+        </p:spPr>
+      </p:sp>
+      <p:sp>
+        <p:nvSpPr>
+          <p:cNvPr id="5" name="Google-Shape-2261-p159-6">
+            <a:extLst xmlns:a="http://schemas.openxmlformats.org/drawingml/2006/main">
+              <a:ext uri="{FF2B5EF4-FFF2-40B4-BE49-F238E27FC236}">
+                <a16:creationId xmlns:a16="http://schemas.microsoft.com/office/drawing/2014/main" id="{6349047A-C691-4DF4-A0E9-4675BF970A6F}"/>
+              </a:ext>
+            </a:extLst>
+          </p:cNvPr>
+          <p:cNvSpPr>
+            <a:spLocks xmlns:a="http://schemas.openxmlformats.org/drawingml/2006/main" noGrp="1"/>
+          </p:cNvSpPr>
+          <p:nvPr/>
+        </p:nvSpPr>
+        <p:spPr>
+          <a:xfrm xmlns:a="http://schemas.openxmlformats.org/drawingml/2006/main">
+            <a:off x="0" y="0"/>
+            <a:ext cx="9525" cy="9525"/>
+          </a:xfrm>
+          <a:prstGeom xmlns:a="http://schemas.openxmlformats.org/drawingml/2006/main" prst="ellipse">
+            <a:avLst/>
+          </a:prstGeom>
+          <a:noFill xmlns:a="http://schemas.openxmlformats.org/drawingml/2006/main"/>
+          <a:ln xmlns:a="http://schemas.openxmlformats.org/drawingml/2006/main" w="0">
+            <a:noFill/>
+            <a:prstDash val="solid"/>
+          </a:ln>
+        </p:spPr>
+      </p:sp>
+      <p:sp>
+        <p:nvSpPr>
+          <p:cNvPr id="6" name="Google-Shape-2262-p159-7">
+            <a:extLst xmlns:a="http://schemas.openxmlformats.org/drawingml/2006/main">
+              <a:ext uri="{FF2B5EF4-FFF2-40B4-BE49-F238E27FC236}">
+                <a16:creationId xmlns:a16="http://schemas.microsoft.com/office/drawing/2014/main" id="{5C1B384A-7189-481A-8587-DEE65E86F34A}"/>
+              </a:ext>
+            </a:extLst>
+          </p:cNvPr>
+          <p:cNvSpPr>
+            <a:spLocks xmlns:a="http://schemas.openxmlformats.org/drawingml/2006/main" noGrp="1"/>
+          </p:cNvSpPr>
+          <p:nvPr/>
+        </p:nvSpPr>
+        <p:spPr>
+          <a:xfrm xmlns:a="http://schemas.openxmlformats.org/drawingml/2006/main">
+            <a:off x="0" y="0"/>
+            <a:ext cx="9525" cy="9525"/>
+          </a:xfrm>
+          <a:prstGeom xmlns:a="http://schemas.openxmlformats.org/drawingml/2006/main" prst="ellipse">
+            <a:avLst/>
+          </a:prstGeom>
+          <a:noFill xmlns:a="http://schemas.openxmlformats.org/drawingml/2006/main"/>
+          <a:ln xmlns:a="http://schemas.openxmlformats.org/drawingml/2006/main" w="0">
+            <a:noFill/>
+            <a:prstDash val="solid"/>
+          </a:ln>
+        </p:spPr>
+      </p:sp>
+      <p:sp>
+        <p:nvSpPr>
+          <p:cNvPr id="7" name="Content-Placeholder-15-8">
+            <a:extLst xmlns:a="http://schemas.openxmlformats.org/drawingml/2006/main">
+              <a:ext uri="{FF2B5EF4-FFF2-40B4-BE49-F238E27FC236}">
+                <a16:creationId xmlns:a16="http://schemas.microsoft.com/office/drawing/2014/main" id="{E49A804C-3639-4BBD-8931-EE2D8EC9CB76}"/>
+              </a:ext>
+            </a:extLst>
+          </p:cNvPr>
+          <p:cNvSpPr>
+            <a:spLocks xmlns:a="http://schemas.openxmlformats.org/drawingml/2006/main" noGrp="1"/>
+          </p:cNvSpPr>
+          <p:nvPr/>
+        </p:nvSpPr>
+        <p:spPr>
+          <a:xfrm xmlns:a="http://schemas.openxmlformats.org/drawingml/2006/main">
+            <a:off x="1000125" y="2266950"/>
+            <a:ext cx="666750" cy="590550"/>
+          </a:xfrm>
+          <a:prstGeom xmlns:a="http://schemas.openxmlformats.org/drawingml/2006/main" prst="rect">
+            <a:avLst/>
+          </a:prstGeom>
+        </p:spPr>
+        <p:txBody>
+          <a:bodyPr xmlns:a="http://schemas.openxmlformats.org/drawingml/2006/main" lIns="38100" tIns="38100" rIns="38100" bIns="38100" anchor="t">
+            <a:normAutofit fontScale="100000"/>
+          </a:bodyPr>
+          <a:lstStyle xmlns:a="http://schemas.openxmlformats.org/drawingml/2006/main"/>
+          <a:p xmlns:a="http://schemas.openxmlformats.org/drawingml/2006/main">
+            <a:pPr algn="l">
+              <a:lnSpc>
+                <a:spcPct val="105000"/>
+              </a:lnSpc>
+              <a:buNone/>
+              <a:defRPr sz="3000" b="1">
+                <a:solidFill>
+                  <a:srgbClr val="D8941C"/>
+                </a:solidFill>
+                <a:latin typeface="Aptos"/>
+                <a:ea typeface="Aptos"/>
+                <a:cs typeface="Aptos"/>
+              </a:defRPr>
+            </a:pPr>
+            <a:r>
+              <a:rPr sz="3000" b="1">
+                <a:solidFill>
+                  <a:srgbClr val="D8941C"/>
+                </a:solidFill>
+                <a:latin typeface="Aptos"/>
+                <a:ea typeface="Aptos"/>
+                <a:cs typeface="Aptos"/>
+              </a:rPr>
+              <a:t>01</a:t>
+            </a:r>
+          </a:p>
+        </p:txBody>
+      </p:sp>
+      <p:sp>
+        <p:nvSpPr>
+          <p:cNvPr id="8" name="Content-Placeholder-15-9">
+            <a:extLst xmlns:a="http://schemas.openxmlformats.org/drawingml/2006/main">
+              <a:ext uri="{FF2B5EF4-FFF2-40B4-BE49-F238E27FC236}">
+                <a16:creationId xmlns:a16="http://schemas.microsoft.com/office/drawing/2014/main" id="{8557D9FE-CAA7-43A6-8C84-5D7DB006151B}"/>
+              </a:ext>
+            </a:extLst>
+          </p:cNvPr>
+          <p:cNvSpPr>
+            <a:spLocks xmlns:a="http://schemas.openxmlformats.org/drawingml/2006/main" noGrp="1"/>
+          </p:cNvSpPr>
+          <p:nvPr/>
+        </p:nvSpPr>
+        <p:spPr>
+          <a:xfrm xmlns:a="http://schemas.openxmlformats.org/drawingml/2006/main">
+            <a:off x="4714875" y="2266950"/>
+            <a:ext cx="666750" cy="590550"/>
+          </a:xfrm>
+          <a:prstGeom xmlns:a="http://schemas.openxmlformats.org/drawingml/2006/main" prst="rect">
+            <a:avLst/>
+          </a:prstGeom>
+        </p:spPr>
+        <p:txBody>
+          <a:bodyPr xmlns:a="http://schemas.openxmlformats.org/drawingml/2006/main" lIns="38100" tIns="38100" rIns="38100" bIns="38100" anchor="t">
+            <a:normAutofit fontScale="100000"/>
+          </a:bodyPr>
+          <a:lstStyle xmlns:a="http://schemas.openxmlformats.org/drawingml/2006/main"/>
+          <a:p xmlns:a="http://schemas.openxmlformats.org/drawingml/2006/main">
+            <a:pPr algn="l">
+              <a:lnSpc>
+                <a:spcPct val="105000"/>
+              </a:lnSpc>
+              <a:buNone/>
+              <a:defRPr sz="3000" b="1">
+                <a:solidFill>
+                  <a:srgbClr val="D8941C"/>
+                </a:solidFill>
+                <a:latin typeface="Aptos"/>
+                <a:ea typeface="Aptos"/>
+                <a:cs typeface="Aptos"/>
+              </a:defRPr>
+            </a:pPr>
+            <a:r>
+              <a:rPr sz="3000" b="1">
+                <a:solidFill>
+                  <a:srgbClr val="D8941C"/>
+                </a:solidFill>
+                <a:latin typeface="Aptos"/>
+                <a:ea typeface="Aptos"/>
+                <a:cs typeface="Aptos"/>
+              </a:rPr>
+              <a:t>02</a:t>
+            </a:r>
+          </a:p>
+        </p:txBody>
+      </p:sp>
+      <p:sp>
+        <p:nvSpPr>
+          <p:cNvPr id="9" name="Content-Placeholder-15-10">
+            <a:extLst xmlns:a="http://schemas.openxmlformats.org/drawingml/2006/main">
+              <a:ext uri="{FF2B5EF4-FFF2-40B4-BE49-F238E27FC236}">
+                <a16:creationId xmlns:a16="http://schemas.microsoft.com/office/drawing/2014/main" id="{9D539B54-B6FF-487A-A0D4-DF8AD1ADAFA9}"/>
+              </a:ext>
+            </a:extLst>
+          </p:cNvPr>
+          <p:cNvSpPr>
+            <a:spLocks xmlns:a="http://schemas.openxmlformats.org/drawingml/2006/main" noGrp="1"/>
+          </p:cNvSpPr>
+          <p:nvPr/>
+        </p:nvSpPr>
+        <p:spPr>
+          <a:xfrm xmlns:a="http://schemas.openxmlformats.org/drawingml/2006/main">
+            <a:off x="8429625" y="2266950"/>
+            <a:ext cx="666750" cy="590550"/>
+          </a:xfrm>
+          <a:prstGeom xmlns:a="http://schemas.openxmlformats.org/drawingml/2006/main" prst="rect">
+            <a:avLst/>
+          </a:prstGeom>
+        </p:spPr>
+        <p:txBody>
+          <a:bodyPr xmlns:a="http://schemas.openxmlformats.org/drawingml/2006/main" lIns="38100" tIns="38100" rIns="38100" bIns="38100" anchor="t">
+            <a:normAutofit fontScale="100000"/>
+          </a:bodyPr>
+          <a:lstStyle xmlns:a="http://schemas.openxmlformats.org/drawingml/2006/main"/>
+          <a:p xmlns:a="http://schemas.openxmlformats.org/drawingml/2006/main">
+            <a:pPr algn="l">
+              <a:lnSpc>
+                <a:spcPct val="105000"/>
+              </a:lnSpc>
+              <a:buNone/>
+              <a:defRPr sz="3000" b="1">
+                <a:solidFill>
+                  <a:srgbClr val="D8941C"/>
+                </a:solidFill>
+                <a:latin typeface="Aptos"/>
+                <a:ea typeface="Aptos"/>
+                <a:cs typeface="Aptos"/>
+              </a:defRPr>
+            </a:pPr>
+            <a:r>
+              <a:rPr sz="3000" b="1">
+                <a:solidFill>
+                  <a:srgbClr val="D8941C"/>
+                </a:solidFill>
+                <a:latin typeface="Aptos"/>
+                <a:ea typeface="Aptos"/>
+                <a:cs typeface="Aptos"/>
+              </a:rPr>
+              <a:t>03</a:t>
+            </a:r>
+          </a:p>
+        </p:txBody>
+      </p:sp>
+      <p:sp>
+        <p:nvSpPr>
+          <p:cNvPr id="10" name="Text-Placeholder-16-11">
+            <a:extLst xmlns:a="http://schemas.openxmlformats.org/drawingml/2006/main">
+              <a:ext uri="{FF2B5EF4-FFF2-40B4-BE49-F238E27FC236}">
+                <a16:creationId xmlns:a16="http://schemas.microsoft.com/office/drawing/2014/main" id="{0F7066E5-C68E-4347-A96B-59B75DBB6516}"/>
+              </a:ext>
+            </a:extLst>
+          </p:cNvPr>
+          <p:cNvSpPr>
+            <a:spLocks xmlns:a="http://schemas.openxmlformats.org/drawingml/2006/main" noGrp="1"/>
+          </p:cNvSpPr>
+          <p:nvPr/>
+        </p:nvSpPr>
+        <p:spPr>
+          <a:xfrm xmlns:a="http://schemas.openxmlformats.org/drawingml/2006/main">
+            <a:off x="1000125" y="2914650"/>
+            <a:ext cx="2667000" cy="1619250"/>
+          </a:xfrm>
+          <a:prstGeom xmlns:a="http://schemas.openxmlformats.org/drawingml/2006/main" prst="rect">
+            <a:avLst/>
+          </a:prstGeom>
+        </p:spPr>
+        <p:txBody>
+          <a:bodyPr xmlns:a="http://schemas.openxmlformats.org/drawingml/2006/main" lIns="38100" tIns="38100" rIns="38100" bIns="38100" anchor="t">
+            <a:normAutofit fontScale="89129"/>
+          </a:bodyPr>
+          <a:lstStyle xmlns:a="http://schemas.openxmlformats.org/drawingml/2006/main"/>
+          <a:p xmlns:a="http://schemas.openxmlformats.org/drawingml/2006/main">
+            <a:pPr algn="l">
+              <a:lnSpc>
+                <a:spcPct val="112000"/>
+              </a:lnSpc>
+              <a:buNone/>
+              <a:defRPr sz="1600" b="0">
+                <a:solidFill>
+                  <a:srgbClr val="173126"/>
+                </a:solidFill>
+                <a:latin typeface="Aptos"/>
+                <a:ea typeface="Aptos"/>
+                <a:cs typeface="Aptos"/>
+              </a:defRPr>
+            </a:pPr>
+            <a:r>
+              <a:rPr sz="1600" b="0">
+                <a:solidFill>
+                  <a:srgbClr val="173126"/>
+                </a:solidFill>
+                <a:latin typeface="Aptos"/>
+                <a:ea typeface="Aptos"/>
+                <a:cs typeface="Aptos"/>
+              </a:rPr>
+              <a:t>What is the key idea in “Communicating the selected design with working drawings”?</a:t>
+            </a:r>
+          </a:p>
+          <a:p xmlns:a="http://schemas.openxmlformats.org/drawingml/2006/main">
+            <a:pPr algn="l">
+              <a:buNone/>
+              <a:defRPr sz="2400">
                 <a:solidFill>
                   <a:srgbClr val="000000"/>
                 </a:solidFill>
@@ -3569,42 +5250,97 @@
               </a:defRPr>
             </a:pPr>
             <a:r>
-              <a:t>6</a:t>
-            </a:r>
-          </a:p>
-        </p:txBody>
-      </p:sp>
-      <p:sp>
-        <p:nvSpPr>
-          <p:cNvPr id="2" name="Title-10-3">
-            <a:extLst xmlns:a="http://schemas.openxmlformats.org/drawingml/2006/main">
-              <a:ext uri="{FF2B5EF4-FFF2-40B4-BE49-F238E27FC236}">
-                <a16:creationId xmlns:a16="http://schemas.microsoft.com/office/drawing/2014/main" id="{C8B22E54-F6DA-47E7-A87E-253D7914750B}"/>
-              </a:ext>
-            </a:extLst>
-          </p:cNvPr>
-          <p:cNvSpPr>
-            <a:spLocks xmlns:a="http://schemas.openxmlformats.org/drawingml/2006/main" noGrp="1"/>
-          </p:cNvSpPr>
-          <p:nvPr/>
-        </p:nvSpPr>
-        <p:spPr>
-          <a:xfrm xmlns:a="http://schemas.openxmlformats.org/drawingml/2006/main">
-            <a:off x="393668" y="344043"/>
-            <a:ext cx="11404568" cy="1047464"/>
+              <a:t/>
+            </a:r>
+          </a:p>
+          <a:p xmlns:a="http://schemas.openxmlformats.org/drawingml/2006/main">
+            <a:pPr algn="l">
+              <a:lnSpc>
+                <a:spcPct val="112000"/>
+              </a:lnSpc>
+              <a:buNone/>
+              <a:defRPr sz="1600" b="0">
+                <a:solidFill>
+                  <a:srgbClr val="173126"/>
+                </a:solidFill>
+                <a:latin typeface="Aptos"/>
+                <a:ea typeface="Aptos"/>
+                <a:cs typeface="Aptos"/>
+              </a:defRPr>
+            </a:pPr>
+            <a:r>
+              <a:rPr sz="1600" b="0">
+                <a:solidFill>
+                  <a:srgbClr val="173126"/>
+                </a:solidFill>
+                <a:latin typeface="Aptos"/>
+                <a:ea typeface="Aptos"/>
+                <a:cs typeface="Aptos"/>
+              </a:rPr>
+              <a:t>What evidence would show that you understood it?</a:t>
+            </a:r>
+          </a:p>
+        </p:txBody>
+      </p:sp>
+      <p:sp>
+        <p:nvSpPr>
+          <p:cNvPr id="11" name="Text-Placeholder-16-12">
+            <a:extLst xmlns:a="http://schemas.openxmlformats.org/drawingml/2006/main">
+              <a:ext uri="{FF2B5EF4-FFF2-40B4-BE49-F238E27FC236}">
+                <a16:creationId xmlns:a16="http://schemas.microsoft.com/office/drawing/2014/main" id="{8673DD7C-A813-458A-959D-4DEA457AEE73}"/>
+              </a:ext>
+            </a:extLst>
+          </p:cNvPr>
+          <p:cNvSpPr>
+            <a:spLocks xmlns:a="http://schemas.openxmlformats.org/drawingml/2006/main" noGrp="1"/>
+          </p:cNvSpPr>
+          <p:nvPr/>
+        </p:nvSpPr>
+        <p:spPr>
+          <a:xfrm xmlns:a="http://schemas.openxmlformats.org/drawingml/2006/main">
+            <a:off x="4714875" y="2914650"/>
+            <a:ext cx="2667000" cy="1619250"/>
           </a:xfrm>
           <a:prstGeom xmlns:a="http://schemas.openxmlformats.org/drawingml/2006/main" prst="rect">
             <a:avLst/>
           </a:prstGeom>
         </p:spPr>
         <p:txBody>
-          <a:bodyPr xmlns:a="http://schemas.openxmlformats.org/drawingml/2006/main" lIns="0" tIns="0" rIns="0" bIns="0" anchor="t">
-            <a:normAutofit fontScale="100000"/>
+          <a:bodyPr xmlns:a="http://schemas.openxmlformats.org/drawingml/2006/main" lIns="38100" tIns="38100" rIns="38100" bIns="38100" anchor="t">
+            <a:normAutofit fontScale="89129"/>
           </a:bodyPr>
           <a:lstStyle xmlns:a="http://schemas.openxmlformats.org/drawingml/2006/main"/>
           <a:p xmlns:a="http://schemas.openxmlformats.org/drawingml/2006/main">
             <a:pPr algn="l">
-              <a:defRPr sz="2900">
+              <a:lnSpc>
+                <a:spcPct val="112000"/>
+              </a:lnSpc>
+              <a:buNone/>
+              <a:defRPr sz="1600" b="0">
+                <a:solidFill>
+                  <a:srgbClr val="173126"/>
+                </a:solidFill>
+                <a:latin typeface="Aptos"/>
+                <a:ea typeface="Aptos"/>
+                <a:cs typeface="Aptos"/>
+              </a:defRPr>
+            </a:pPr>
+            <a:r>
+              <a:rPr sz="1600" b="0">
+                <a:solidFill>
+                  <a:srgbClr val="173126"/>
+                </a:solidFill>
+                <a:latin typeface="Aptos"/>
+                <a:ea typeface="Aptos"/>
+                <a:cs typeface="Aptos"/>
+              </a:rPr>
+              <a:t>What is the key idea in “Cutting lists and a realistic production schedule”?</a:t>
+            </a:r>
+          </a:p>
+          <a:p xmlns:a="http://schemas.openxmlformats.org/drawingml/2006/main">
+            <a:pPr algn="l">
+              <a:buNone/>
+              <a:defRPr sz="2400">
                 <a:solidFill>
                   <a:srgbClr val="000000"/>
                 </a:solidFill>
@@ -3614,428 +5350,298 @@
               </a:defRPr>
             </a:pPr>
             <a:r>
-              <a:t>Mark from a reliable datum</a:t>
-            </a:r>
-          </a:p>
-        </p:txBody>
-      </p:sp>
-      <p:cxnSp>
-        <p:nvCxnSpPr>
-          <p:cNvPr id="15" name="Google-Shape-2259-p159-4"/>
-          <p:cNvCxnSpPr/>
-          <p:nvPr/>
-        </p:nvCxnSpPr>
-        <p:spPr>
-          <a:xfrm xmlns:a="http://schemas.openxmlformats.org/drawingml/2006/main">
-            <a:off x="337757" y="3373755"/>
-            <a:ext cx="12245435" cy="286"/>
-          </a:xfrm>
-          <a:prstGeom xmlns:a="http://schemas.openxmlformats.org/drawingml/2006/main" prst="straightConnector1">
-            <a:avLst/>
-          </a:prstGeom>
+              <a:t/>
+            </a:r>
+          </a:p>
+          <a:p xmlns:a="http://schemas.openxmlformats.org/drawingml/2006/main">
+            <a:pPr algn="l">
+              <a:lnSpc>
+                <a:spcPct val="112000"/>
+              </a:lnSpc>
+              <a:buNone/>
+              <a:defRPr sz="1600" b="0">
+                <a:solidFill>
+                  <a:srgbClr val="173126"/>
+                </a:solidFill>
+                <a:latin typeface="Aptos"/>
+                <a:ea typeface="Aptos"/>
+                <a:cs typeface="Aptos"/>
+              </a:defRPr>
+            </a:pPr>
+            <a:r>
+              <a:rPr sz="1600" b="0">
+                <a:solidFill>
+                  <a:srgbClr val="173126"/>
+                </a:solidFill>
+                <a:latin typeface="Aptos"/>
+                <a:ea typeface="Aptos"/>
+                <a:cs typeface="Aptos"/>
+              </a:rPr>
+              <a:t>What evidence would show that you understood it?</a:t>
+            </a:r>
+          </a:p>
+        </p:txBody>
+      </p:sp>
+      <p:sp>
+        <p:nvSpPr>
+          <p:cNvPr id="12" name="Text-Placeholder-16-13">
+            <a:extLst xmlns:a="http://schemas.openxmlformats.org/drawingml/2006/main">
+              <a:ext uri="{FF2B5EF4-FFF2-40B4-BE49-F238E27FC236}">
+                <a16:creationId xmlns:a16="http://schemas.microsoft.com/office/drawing/2014/main" id="{33B5EBC9-EFC9-49BA-BFCF-A8F980F5B2B8}"/>
+              </a:ext>
+            </a:extLst>
+          </p:cNvPr>
+          <p:cNvSpPr>
+            <a:spLocks xmlns:a="http://schemas.openxmlformats.org/drawingml/2006/main" noGrp="1"/>
+          </p:cNvSpPr>
+          <p:nvPr/>
+        </p:nvSpPr>
+        <p:spPr>
+          <a:xfrm xmlns:a="http://schemas.openxmlformats.org/drawingml/2006/main">
+            <a:off x="8429625" y="2914650"/>
+            <a:ext cx="2667000" cy="1619250"/>
+          </a:xfrm>
+          <a:prstGeom xmlns:a="http://schemas.openxmlformats.org/drawingml/2006/main" prst="rect">
+            <a:avLst/>
+          </a:prstGeom>
+        </p:spPr>
+        <p:txBody>
+          <a:bodyPr xmlns:a="http://schemas.openxmlformats.org/drawingml/2006/main" lIns="38100" tIns="38100" rIns="38100" bIns="38100" anchor="t">
+            <a:normAutofit fontScale="94019"/>
+          </a:bodyPr>
+          <a:lstStyle xmlns:a="http://schemas.openxmlformats.org/drawingml/2006/main"/>
+          <a:p xmlns:a="http://schemas.openxmlformats.org/drawingml/2006/main">
+            <a:pPr algn="l">
+              <a:lnSpc>
+                <a:spcPct val="112000"/>
+              </a:lnSpc>
+              <a:buNone/>
+              <a:defRPr sz="1600" b="0">
+                <a:solidFill>
+                  <a:srgbClr val="173126"/>
+                </a:solidFill>
+                <a:latin typeface="Aptos"/>
+                <a:ea typeface="Aptos"/>
+                <a:cs typeface="Aptos"/>
+              </a:defRPr>
+            </a:pPr>
+            <a:r>
+              <a:rPr sz="1600" b="0">
+                <a:solidFill>
+                  <a:srgbClr val="173126"/>
+                </a:solidFill>
+                <a:latin typeface="Aptos"/>
+                <a:ea typeface="Aptos"/>
+                <a:cs typeface="Aptos"/>
+              </a:rPr>
+              <a:t>What is the key idea in “Datums and accurate marking out”?</a:t>
+            </a:r>
+          </a:p>
+          <a:p xmlns:a="http://schemas.openxmlformats.org/drawingml/2006/main">
+            <a:pPr algn="l">
+              <a:buNone/>
+              <a:defRPr sz="2400">
+                <a:solidFill>
+                  <a:srgbClr val="000000"/>
+                </a:solidFill>
+                <a:latin typeface="Helvetica Neue"/>
+                <a:ea typeface="Helvetica Neue"/>
+                <a:cs typeface="Helvetica Neue"/>
+              </a:defRPr>
+            </a:pPr>
+            <a:r>
+              <a:t/>
+            </a:r>
+          </a:p>
+          <a:p xmlns:a="http://schemas.openxmlformats.org/drawingml/2006/main">
+            <a:pPr algn="l">
+              <a:lnSpc>
+                <a:spcPct val="112000"/>
+              </a:lnSpc>
+              <a:buNone/>
+              <a:defRPr sz="1600" b="0">
+                <a:solidFill>
+                  <a:srgbClr val="173126"/>
+                </a:solidFill>
+                <a:latin typeface="Aptos"/>
+                <a:ea typeface="Aptos"/>
+                <a:cs typeface="Aptos"/>
+              </a:defRPr>
+            </a:pPr>
+            <a:r>
+              <a:rPr sz="1600" b="0">
+                <a:solidFill>
+                  <a:srgbClr val="173126"/>
+                </a:solidFill>
+                <a:latin typeface="Aptos"/>
+                <a:ea typeface="Aptos"/>
+                <a:cs typeface="Aptos"/>
+              </a:rPr>
+              <a:t>What evidence would show that you understood it?</a:t>
+            </a:r>
+          </a:p>
+        </p:txBody>
+      </p:sp>
+      <p:sp>
+        <p:nvSpPr>
+          <p:cNvPr id="19" name="">
+            <a:extLst xmlns:a="http://schemas.openxmlformats.org/drawingml/2006/main">
+              <a:ext uri="{FF2B5EF4-FFF2-40B4-BE49-F238E27FC236}">
+                <a16:creationId xmlns:a16="http://schemas.microsoft.com/office/drawing/2014/main" id="{9F1467D8-C2C1-44C8-9082-D4D98C798B1F}"/>
+              </a:ext>
+            </a:extLst>
+          </p:cNvPr>
+          <p:cNvSpPr>
+            <a:spLocks xmlns:a="http://schemas.openxmlformats.org/drawingml/2006/main" noGrp="1"/>
+          </p:cNvSpPr>
+          <p:nvPr/>
+        </p:nvSpPr>
+        <p:spPr>
+          <a:xfrm xmlns:a="http://schemas.openxmlformats.org/drawingml/2006/main">
+            <a:off x="590550" y="1200150"/>
+            <a:ext cx="8382000" cy="342900"/>
+          </a:xfrm>
+          <a:prstGeom xmlns:a="http://schemas.openxmlformats.org/drawingml/2006/main" prst="rect">
+            <a:avLst/>
+          </a:prstGeom>
+          <a:noFill xmlns:a="http://schemas.openxmlformats.org/drawingml/2006/main"/>
+          <a:ln xmlns:a="http://schemas.openxmlformats.org/drawingml/2006/main" w="0">
+            <a:noFill/>
+            <a:prstDash val="solid"/>
+          </a:ln>
+        </p:spPr>
+        <p:txBody>
+          <a:bodyPr xmlns:a="http://schemas.openxmlformats.org/drawingml/2006/main" lIns="38100" tIns="38100" rIns="38100" bIns="38100" anchor="t">
+            <a:normAutofit fontScale="83333"/>
+          </a:bodyPr>
+          <a:lstStyle xmlns:a="http://schemas.openxmlformats.org/drawingml/2006/main"/>
+          <a:p xmlns:a="http://schemas.openxmlformats.org/drawingml/2006/main">
+            <a:pPr algn="l">
+              <a:lnSpc>
+                <a:spcPct val="105000"/>
+              </a:lnSpc>
+              <a:buNone/>
+              <a:defRPr sz="2000" b="0">
+                <a:solidFill>
+                  <a:srgbClr val="5A665F"/>
+                </a:solidFill>
+                <a:latin typeface="Aptos"/>
+                <a:ea typeface="Aptos"/>
+                <a:cs typeface="Aptos"/>
+              </a:defRPr>
+            </a:pPr>
+            <a:r>
+              <a:rPr sz="2000" b="0">
+                <a:solidFill>
+                  <a:srgbClr val="5A665F"/>
+                </a:solidFill>
+                <a:latin typeface="Aptos"/>
+                <a:ea typeface="Aptos"/>
+                <a:cs typeface="Aptos"/>
+              </a:rPr>
+              <a:t>Answer aloud or jot one clear sentence for each question.</a:t>
+            </a:r>
+          </a:p>
+        </p:txBody>
+      </p:sp>
+      <p:sp>
+        <p:nvSpPr>
+          <p:cNvPr id="20" name="">
+            <a:extLst xmlns:a="http://schemas.openxmlformats.org/drawingml/2006/main">
+              <a:ext uri="{FF2B5EF4-FFF2-40B4-BE49-F238E27FC236}">
+                <a16:creationId xmlns:a16="http://schemas.microsoft.com/office/drawing/2014/main" id="{E7546D7A-C0F0-4A0B-BDA7-7FA16D802526}"/>
+              </a:ext>
+            </a:extLst>
+          </p:cNvPr>
+          <p:cNvSpPr>
+            <a:spLocks xmlns:a="http://schemas.openxmlformats.org/drawingml/2006/main" noGrp="1"/>
+          </p:cNvSpPr>
+          <p:nvPr/>
+        </p:nvSpPr>
+        <p:spPr>
+          <a:xfrm xmlns:a="http://schemas.openxmlformats.org/drawingml/2006/main">
+            <a:off x="714375" y="2057400"/>
+            <a:ext cx="3238500" cy="2781300"/>
+          </a:xfrm>
+          <a:prstGeom xmlns:a="http://schemas.openxmlformats.org/drawingml/2006/main" prst="roundRect">
+            <a:avLst>
+              <a:gd name="adj" fmla="val 4110"/>
+            </a:avLst>
+          </a:prstGeom>
+          <a:noFill xmlns:a="http://schemas.openxmlformats.org/drawingml/2006/main"/>
           <a:ln xmlns:a="http://schemas.openxmlformats.org/drawingml/2006/main" w="9525">
             <a:solidFill>
-              <a:srgbClr val="000000"/>
+              <a:srgbClr val="EAD2AE"/>
             </a:solidFill>
             <a:prstDash val="solid"/>
           </a:ln>
         </p:spPr>
-      </p:cxnSp>
-      <p:sp>
-        <p:nvSpPr>
-          <p:cNvPr id="4" name="Google-Shape-2260-p159-5">
-            <a:extLst xmlns:a="http://schemas.openxmlformats.org/drawingml/2006/main">
-              <a:ext uri="{FF2B5EF4-FFF2-40B4-BE49-F238E27FC236}">
-                <a16:creationId xmlns:a16="http://schemas.microsoft.com/office/drawing/2014/main" id="{7C746A1F-96B1-4E54-9EC0-D44929B9F5DE}"/>
-              </a:ext>
-            </a:extLst>
-          </p:cNvPr>
-          <p:cNvSpPr>
-            <a:spLocks xmlns:a="http://schemas.openxmlformats.org/drawingml/2006/main" noGrp="1"/>
-          </p:cNvSpPr>
-          <p:nvPr/>
-        </p:nvSpPr>
-        <p:spPr>
-          <a:xfrm xmlns:a="http://schemas.openxmlformats.org/drawingml/2006/main">
-            <a:off x="337757" y="3320225"/>
-            <a:ext cx="107061" cy="107061"/>
-          </a:xfrm>
-          <a:prstGeom xmlns:a="http://schemas.openxmlformats.org/drawingml/2006/main" prst="ellipse">
-            <a:avLst/>
-          </a:prstGeom>
-          <a:solidFill xmlns:a="http://schemas.openxmlformats.org/drawingml/2006/main">
-            <a:srgbClr val="000000"/>
-          </a:solidFill>
-        </p:spPr>
-      </p:sp>
-      <p:sp>
-        <p:nvSpPr>
-          <p:cNvPr id="5" name="Google-Shape-2261-p159-6">
-            <a:extLst xmlns:a="http://schemas.openxmlformats.org/drawingml/2006/main">
-              <a:ext uri="{FF2B5EF4-FFF2-40B4-BE49-F238E27FC236}">
-                <a16:creationId xmlns:a16="http://schemas.microsoft.com/office/drawing/2014/main" id="{6349047A-C691-4DF4-A0E9-4675BF970A6F}"/>
-              </a:ext>
-            </a:extLst>
-          </p:cNvPr>
-          <p:cNvSpPr>
-            <a:spLocks xmlns:a="http://schemas.openxmlformats.org/drawingml/2006/main" noGrp="1"/>
-          </p:cNvSpPr>
-          <p:nvPr/>
-        </p:nvSpPr>
-        <p:spPr>
-          <a:xfrm xmlns:a="http://schemas.openxmlformats.org/drawingml/2006/main">
-            <a:off x="4251770" y="3320225"/>
-            <a:ext cx="107061" cy="107061"/>
-          </a:xfrm>
-          <a:prstGeom xmlns:a="http://schemas.openxmlformats.org/drawingml/2006/main" prst="ellipse">
-            <a:avLst/>
-          </a:prstGeom>
-          <a:solidFill xmlns:a="http://schemas.openxmlformats.org/drawingml/2006/main">
-            <a:srgbClr val="000000"/>
-          </a:solidFill>
-        </p:spPr>
-      </p:sp>
-      <p:sp>
-        <p:nvSpPr>
-          <p:cNvPr id="6" name="Google-Shape-2262-p159-7">
-            <a:extLst xmlns:a="http://schemas.openxmlformats.org/drawingml/2006/main">
-              <a:ext uri="{FF2B5EF4-FFF2-40B4-BE49-F238E27FC236}">
-                <a16:creationId xmlns:a16="http://schemas.microsoft.com/office/drawing/2014/main" id="{5C1B384A-7189-481A-8587-DEE65E86F34A}"/>
-              </a:ext>
-            </a:extLst>
-          </p:cNvPr>
-          <p:cNvSpPr>
-            <a:spLocks xmlns:a="http://schemas.openxmlformats.org/drawingml/2006/main" noGrp="1"/>
-          </p:cNvSpPr>
-          <p:nvPr/>
-        </p:nvSpPr>
-        <p:spPr>
-          <a:xfrm xmlns:a="http://schemas.openxmlformats.org/drawingml/2006/main">
-            <a:off x="8176070" y="3320225"/>
-            <a:ext cx="107061" cy="107061"/>
-          </a:xfrm>
-          <a:prstGeom xmlns:a="http://schemas.openxmlformats.org/drawingml/2006/main" prst="ellipse">
-            <a:avLst/>
-          </a:prstGeom>
-          <a:solidFill xmlns:a="http://schemas.openxmlformats.org/drawingml/2006/main">
-            <a:srgbClr val="000000"/>
-          </a:solidFill>
-        </p:spPr>
-      </p:sp>
-      <p:sp>
-        <p:nvSpPr>
-          <p:cNvPr id="7" name="Content-Placeholder-15-8">
-            <a:extLst xmlns:a="http://schemas.openxmlformats.org/drawingml/2006/main">
-              <a:ext uri="{FF2B5EF4-FFF2-40B4-BE49-F238E27FC236}">
-                <a16:creationId xmlns:a16="http://schemas.microsoft.com/office/drawing/2014/main" id="{E49A804C-3639-4BBD-8931-EE2D8EC9CB76}"/>
-              </a:ext>
-            </a:extLst>
-          </p:cNvPr>
-          <p:cNvSpPr>
-            <a:spLocks xmlns:a="http://schemas.openxmlformats.org/drawingml/2006/main" noGrp="1"/>
-          </p:cNvSpPr>
-          <p:nvPr/>
-        </p:nvSpPr>
-        <p:spPr>
-          <a:xfrm xmlns:a="http://schemas.openxmlformats.org/drawingml/2006/main">
-            <a:off x="393668" y="2843308"/>
-            <a:ext cx="1612868" cy="262414"/>
-          </a:xfrm>
-          <a:prstGeom xmlns:a="http://schemas.openxmlformats.org/drawingml/2006/main" prst="rect">
-            <a:avLst/>
-          </a:prstGeom>
-        </p:spPr>
-        <p:txBody>
-          <a:bodyPr xmlns:a="http://schemas.openxmlformats.org/drawingml/2006/main" lIns="0" tIns="0" rIns="0" bIns="0">
-            <a:noAutofit/>
-          </a:bodyPr>
-          <a:lstStyle xmlns:a="http://schemas.openxmlformats.org/drawingml/2006/main"/>
-          <a:p xmlns:a="http://schemas.openxmlformats.org/drawingml/2006/main">
-            <a:pPr algn="l">
-              <a:defRPr sz="1600">
-                <a:solidFill>
-                  <a:srgbClr val="000000"/>
-                </a:solidFill>
-                <a:latin typeface="Helvetica Neue"/>
-                <a:ea typeface="Helvetica Neue"/>
-                <a:cs typeface="Helvetica Neue"/>
-              </a:defRPr>
-            </a:pPr>
-            <a:r>
-              <a:t>PREPARE</a:t>
-            </a:r>
-          </a:p>
-        </p:txBody>
-      </p:sp>
-      <p:sp>
-        <p:nvSpPr>
-          <p:cNvPr id="8" name="Content-Placeholder-15-9">
-            <a:extLst xmlns:a="http://schemas.openxmlformats.org/drawingml/2006/main">
-              <a:ext uri="{FF2B5EF4-FFF2-40B4-BE49-F238E27FC236}">
-                <a16:creationId xmlns:a16="http://schemas.microsoft.com/office/drawing/2014/main" id="{8557D9FE-CAA7-43A6-8C84-5D7DB006151B}"/>
-              </a:ext>
-            </a:extLst>
-          </p:cNvPr>
-          <p:cNvSpPr>
-            <a:spLocks xmlns:a="http://schemas.openxmlformats.org/drawingml/2006/main" noGrp="1"/>
-          </p:cNvSpPr>
-          <p:nvPr/>
-        </p:nvSpPr>
-        <p:spPr>
-          <a:xfrm xmlns:a="http://schemas.openxmlformats.org/drawingml/2006/main">
-            <a:off x="4294156" y="2843308"/>
-            <a:ext cx="1612868" cy="262414"/>
-          </a:xfrm>
-          <a:prstGeom xmlns:a="http://schemas.openxmlformats.org/drawingml/2006/main" prst="rect">
-            <a:avLst/>
-          </a:prstGeom>
-        </p:spPr>
-        <p:txBody>
-          <a:bodyPr xmlns:a="http://schemas.openxmlformats.org/drawingml/2006/main" lIns="0" tIns="0" rIns="0" bIns="0">
-            <a:noAutofit/>
-          </a:bodyPr>
-          <a:lstStyle xmlns:a="http://schemas.openxmlformats.org/drawingml/2006/main"/>
-          <a:p xmlns:a="http://schemas.openxmlformats.org/drawingml/2006/main">
-            <a:pPr algn="l">
-              <a:defRPr sz="1600">
-                <a:solidFill>
-                  <a:srgbClr val="000000"/>
-                </a:solidFill>
-                <a:latin typeface="Helvetica Neue"/>
-                <a:ea typeface="Helvetica Neue"/>
-                <a:cs typeface="Helvetica Neue"/>
-              </a:defRPr>
-            </a:pPr>
-            <a:r>
-              <a:t>CHECK</a:t>
-            </a:r>
-          </a:p>
-        </p:txBody>
-      </p:sp>
-      <p:sp>
-        <p:nvSpPr>
-          <p:cNvPr id="9" name="Content-Placeholder-15-10">
-            <a:extLst xmlns:a="http://schemas.openxmlformats.org/drawingml/2006/main">
-              <a:ext uri="{FF2B5EF4-FFF2-40B4-BE49-F238E27FC236}">
-                <a16:creationId xmlns:a16="http://schemas.microsoft.com/office/drawing/2014/main" id="{9D539B54-B6FF-487A-A0D4-DF8AD1ADAFA9}"/>
-              </a:ext>
-            </a:extLst>
-          </p:cNvPr>
-          <p:cNvSpPr>
-            <a:spLocks xmlns:a="http://schemas.openxmlformats.org/drawingml/2006/main" noGrp="1"/>
-          </p:cNvSpPr>
-          <p:nvPr/>
-        </p:nvSpPr>
-        <p:spPr>
-          <a:xfrm xmlns:a="http://schemas.openxmlformats.org/drawingml/2006/main">
-            <a:off x="8223218" y="2843308"/>
-            <a:ext cx="1612868" cy="262414"/>
-          </a:xfrm>
-          <a:prstGeom xmlns:a="http://schemas.openxmlformats.org/drawingml/2006/main" prst="rect">
-            <a:avLst/>
-          </a:prstGeom>
-        </p:spPr>
-        <p:txBody>
-          <a:bodyPr xmlns:a="http://schemas.openxmlformats.org/drawingml/2006/main" lIns="0" tIns="0" rIns="0" bIns="0">
-            <a:noAutofit/>
-          </a:bodyPr>
-          <a:lstStyle xmlns:a="http://schemas.openxmlformats.org/drawingml/2006/main"/>
-          <a:p xmlns:a="http://schemas.openxmlformats.org/drawingml/2006/main">
-            <a:pPr algn="l">
-              <a:defRPr sz="1600">
-                <a:solidFill>
-                  <a:srgbClr val="000000"/>
-                </a:solidFill>
-                <a:latin typeface="Helvetica Neue"/>
-                <a:ea typeface="Helvetica Neue"/>
-                <a:cs typeface="Helvetica Neue"/>
-              </a:defRPr>
-            </a:pPr>
-            <a:r>
-              <a:t>RECORD</a:t>
-            </a:r>
-          </a:p>
-        </p:txBody>
-      </p:sp>
-      <p:sp>
-        <p:nvSpPr>
-          <p:cNvPr id="10" name="Text-Placeholder-16-11">
-            <a:extLst xmlns:a="http://schemas.openxmlformats.org/drawingml/2006/main">
-              <a:ext uri="{FF2B5EF4-FFF2-40B4-BE49-F238E27FC236}">
-                <a16:creationId xmlns:a16="http://schemas.microsoft.com/office/drawing/2014/main" id="{0F7066E5-C68E-4347-A96B-59B75DBB6516}"/>
-              </a:ext>
-            </a:extLst>
-          </p:cNvPr>
-          <p:cNvSpPr>
-            <a:spLocks xmlns:a="http://schemas.openxmlformats.org/drawingml/2006/main" noGrp="1"/>
-          </p:cNvSpPr>
-          <p:nvPr/>
-        </p:nvSpPr>
-        <p:spPr>
-          <a:xfrm xmlns:a="http://schemas.openxmlformats.org/drawingml/2006/main">
-            <a:off x="4317111" y="3822668"/>
-            <a:ext cx="3156109" cy="1586294"/>
-          </a:xfrm>
-          <a:prstGeom xmlns:a="http://schemas.openxmlformats.org/drawingml/2006/main" prst="rect">
-            <a:avLst/>
-          </a:prstGeom>
-        </p:spPr>
-        <p:txBody>
-          <a:bodyPr xmlns:a="http://schemas.openxmlformats.org/drawingml/2006/main" lIns="0" tIns="0" rIns="0" bIns="0">
-            <a:noAutofit/>
-          </a:bodyPr>
-          <a:lstStyle xmlns:a="http://schemas.openxmlformats.org/drawingml/2006/main"/>
-          <a:p xmlns:a="http://schemas.openxmlformats.org/drawingml/2006/main">
-            <a:pPr algn="l">
-              <a:defRPr sz="2400">
-                <a:solidFill>
-                  <a:srgbClr val="000000"/>
-                </a:solidFill>
-                <a:latin typeface="Helvetica Neue"/>
-                <a:ea typeface="Helvetica Neue"/>
-                <a:cs typeface="Helvetica Neue"/>
-              </a:defRPr>
-            </a:pPr>
-            <a:r>
-              <a:t>During</a:t>
-            </a:r>
-          </a:p>
-          <a:p xmlns:a="http://schemas.openxmlformats.org/drawingml/2006/main">
-            <a:pPr algn="l">
-              <a:defRPr sz="2400">
-                <a:solidFill>
-                  <a:srgbClr val="000000"/>
-                </a:solidFill>
-                <a:latin typeface="Helvetica Neue"/>
-                <a:ea typeface="Helvetica Neue"/>
-                <a:cs typeface="Helvetica Neue"/>
-              </a:defRPr>
-            </a:pPr>
-            <a:r>
-              <a:t>Mark orientation and the waste side</a:t>
-            </a:r>
-          </a:p>
-        </p:txBody>
-      </p:sp>
-      <p:sp>
-        <p:nvSpPr>
-          <p:cNvPr id="11" name="Text-Placeholder-16-12">
-            <a:extLst xmlns:a="http://schemas.openxmlformats.org/drawingml/2006/main">
-              <a:ext uri="{FF2B5EF4-FFF2-40B4-BE49-F238E27FC236}">
-                <a16:creationId xmlns:a16="http://schemas.microsoft.com/office/drawing/2014/main" id="{8673DD7C-A813-458A-959D-4DEA457AEE73}"/>
-              </a:ext>
-            </a:extLst>
-          </p:cNvPr>
-          <p:cNvSpPr>
-            <a:spLocks xmlns:a="http://schemas.openxmlformats.org/drawingml/2006/main" noGrp="1"/>
-          </p:cNvSpPr>
-          <p:nvPr/>
-        </p:nvSpPr>
-        <p:spPr>
-          <a:xfrm xmlns:a="http://schemas.openxmlformats.org/drawingml/2006/main">
-            <a:off x="399859" y="3822668"/>
-            <a:ext cx="3156109" cy="1586294"/>
-          </a:xfrm>
-          <a:prstGeom xmlns:a="http://schemas.openxmlformats.org/drawingml/2006/main" prst="rect">
-            <a:avLst/>
-          </a:prstGeom>
-        </p:spPr>
-        <p:txBody>
-          <a:bodyPr xmlns:a="http://schemas.openxmlformats.org/drawingml/2006/main" lIns="0" tIns="0" rIns="0" bIns="0">
-            <a:noAutofit/>
-          </a:bodyPr>
-          <a:lstStyle xmlns:a="http://schemas.openxmlformats.org/drawingml/2006/main"/>
-          <a:p xmlns:a="http://schemas.openxmlformats.org/drawingml/2006/main">
-            <a:pPr algn="l">
-              <a:defRPr sz="2400">
-                <a:solidFill>
-                  <a:srgbClr val="000000"/>
-                </a:solidFill>
-                <a:latin typeface="Helvetica Neue"/>
-                <a:ea typeface="Helvetica Neue"/>
-                <a:cs typeface="Helvetica Neue"/>
-              </a:defRPr>
-            </a:pPr>
-            <a:r>
-              <a:t>Before</a:t>
-            </a:r>
-          </a:p>
-          <a:p xmlns:a="http://schemas.openxmlformats.org/drawingml/2006/main">
-            <a:pPr algn="l">
-              <a:defRPr sz="2400">
-                <a:solidFill>
-                  <a:srgbClr val="000000"/>
-                </a:solidFill>
-                <a:latin typeface="Helvetica Neue"/>
-                <a:ea typeface="Helvetica Neue"/>
-                <a:cs typeface="Helvetica Neue"/>
-              </a:defRPr>
-            </a:pPr>
-            <a:r>
-              <a:t>Align the rule zero with the datum</a:t>
-            </a:r>
-          </a:p>
-        </p:txBody>
-      </p:sp>
-      <p:sp>
-        <p:nvSpPr>
-          <p:cNvPr id="12" name="Text-Placeholder-16-13">
-            <a:extLst xmlns:a="http://schemas.openxmlformats.org/drawingml/2006/main">
-              <a:ext uri="{FF2B5EF4-FFF2-40B4-BE49-F238E27FC236}">
-                <a16:creationId xmlns:a16="http://schemas.microsoft.com/office/drawing/2014/main" id="{33B5EBC9-EFC9-49BA-BFCF-A8F980F5B2B8}"/>
-              </a:ext>
-            </a:extLst>
-          </p:cNvPr>
-          <p:cNvSpPr>
-            <a:spLocks xmlns:a="http://schemas.openxmlformats.org/drawingml/2006/main" noGrp="1"/>
-          </p:cNvSpPr>
-          <p:nvPr/>
-        </p:nvSpPr>
-        <p:spPr>
-          <a:xfrm xmlns:a="http://schemas.openxmlformats.org/drawingml/2006/main">
-            <a:off x="8177879" y="3822668"/>
-            <a:ext cx="3156109" cy="1586294"/>
-          </a:xfrm>
-          <a:prstGeom xmlns:a="http://schemas.openxmlformats.org/drawingml/2006/main" prst="rect">
-            <a:avLst/>
-          </a:prstGeom>
-        </p:spPr>
-        <p:txBody>
-          <a:bodyPr xmlns:a="http://schemas.openxmlformats.org/drawingml/2006/main" lIns="0" tIns="0" rIns="0" bIns="0">
-            <a:noAutofit/>
-          </a:bodyPr>
-          <a:lstStyle xmlns:a="http://schemas.openxmlformats.org/drawingml/2006/main"/>
-          <a:p xmlns:a="http://schemas.openxmlformats.org/drawingml/2006/main">
-            <a:pPr algn="l">
-              <a:defRPr sz="2400">
-                <a:solidFill>
-                  <a:srgbClr val="000000"/>
-                </a:solidFill>
-                <a:latin typeface="Helvetica Neue"/>
-                <a:ea typeface="Helvetica Neue"/>
-                <a:cs typeface="Helvetica Neue"/>
-              </a:defRPr>
-            </a:pPr>
-            <a:r>
-              <a:t>After</a:t>
-            </a:r>
-          </a:p>
-          <a:p xmlns:a="http://schemas.openxmlformats.org/drawingml/2006/main">
-            <a:pPr algn="l">
-              <a:defRPr sz="2400">
-                <a:solidFill>
-                  <a:srgbClr val="000000"/>
-                </a:solidFill>
-                <a:latin typeface="Helvetica Neue"/>
-                <a:ea typeface="Helvetica Neue"/>
-                <a:cs typeface="Helvetica Neue"/>
-              </a:defRPr>
-            </a:pPr>
-            <a:r>
-              <a:t>Compare matching parts before cutting</a:t>
-            </a:r>
-          </a:p>
-        </p:txBody>
+      </p:sp>
+      <p:sp>
+        <p:nvSpPr>
+          <p:cNvPr id="21" name="">
+            <a:extLst xmlns:a="http://schemas.openxmlformats.org/drawingml/2006/main">
+              <a:ext uri="{FF2B5EF4-FFF2-40B4-BE49-F238E27FC236}">
+                <a16:creationId xmlns:a16="http://schemas.microsoft.com/office/drawing/2014/main" id="{3F18DFD4-31B1-482E-8764-4AA5C78FE3E2}"/>
+              </a:ext>
+            </a:extLst>
+          </p:cNvPr>
+          <p:cNvSpPr>
+            <a:spLocks xmlns:a="http://schemas.openxmlformats.org/drawingml/2006/main" noGrp="1"/>
+          </p:cNvSpPr>
+          <p:nvPr/>
+        </p:nvSpPr>
+        <p:spPr>
+          <a:xfrm xmlns:a="http://schemas.openxmlformats.org/drawingml/2006/main">
+            <a:off x="4429125" y="2057400"/>
+            <a:ext cx="3238500" cy="2781300"/>
+          </a:xfrm>
+          <a:prstGeom xmlns:a="http://schemas.openxmlformats.org/drawingml/2006/main" prst="roundRect">
+            <a:avLst>
+              <a:gd name="adj" fmla="val 4110"/>
+            </a:avLst>
+          </a:prstGeom>
+          <a:noFill xmlns:a="http://schemas.openxmlformats.org/drawingml/2006/main"/>
+          <a:ln xmlns:a="http://schemas.openxmlformats.org/drawingml/2006/main" w="9525">
+            <a:solidFill>
+              <a:srgbClr val="D8941C"/>
+            </a:solidFill>
+            <a:prstDash val="solid"/>
+          </a:ln>
+        </p:spPr>
+      </p:sp>
+      <p:sp>
+        <p:nvSpPr>
+          <p:cNvPr id="22" name="">
+            <a:extLst xmlns:a="http://schemas.openxmlformats.org/drawingml/2006/main">
+              <a:ext uri="{FF2B5EF4-FFF2-40B4-BE49-F238E27FC236}">
+                <a16:creationId xmlns:a16="http://schemas.microsoft.com/office/drawing/2014/main" id="{56370668-17D8-4DA2-AF4D-D51BA4FB3DAE}"/>
+              </a:ext>
+            </a:extLst>
+          </p:cNvPr>
+          <p:cNvSpPr>
+            <a:spLocks xmlns:a="http://schemas.openxmlformats.org/drawingml/2006/main" noGrp="1"/>
+          </p:cNvSpPr>
+          <p:nvPr/>
+        </p:nvSpPr>
+        <p:spPr>
+          <a:xfrm xmlns:a="http://schemas.openxmlformats.org/drawingml/2006/main">
+            <a:off x="8143875" y="2057400"/>
+            <a:ext cx="3238500" cy="2781300"/>
+          </a:xfrm>
+          <a:prstGeom xmlns:a="http://schemas.openxmlformats.org/drawingml/2006/main" prst="roundRect">
+            <a:avLst>
+              <a:gd name="adj" fmla="val 4110"/>
+            </a:avLst>
+          </a:prstGeom>
+          <a:noFill xmlns:a="http://schemas.openxmlformats.org/drawingml/2006/main"/>
+          <a:ln xmlns:a="http://schemas.openxmlformats.org/drawingml/2006/main" w="9525">
+            <a:solidFill>
+              <a:srgbClr val="EAD2AE"/>
+            </a:solidFill>
+            <a:prstDash val="solid"/>
+          </a:ln>
+        </p:spPr>
       </p:sp>
     </p:spTree>
     <p:extLst>
@@ -4050,6 +5656,13 @@
 <file path=ppt/slides/slide7.xml><?xml version="1.0" encoding="utf-8"?>
 <p:sld xmlns:p="http://schemas.openxmlformats.org/presentationml/2006/main">
   <p:cSld>
+    <p:bg>
+      <p:bgPr>
+        <a:solidFill xmlns:a="http://schemas.openxmlformats.org/drawingml/2006/main">
+          <a:srgbClr val="F8F2E8"/>
+        </a:solidFill>
+      </p:bgPr>
+    </p:bg>
     <p:spTree>
       <p:nvGrpSpPr>
         <p:cNvPr id="1" name=""/>
@@ -4075,28 +5688,42 @@
         </p:nvSpPr>
         <p:spPr>
           <a:xfrm xmlns:a="http://schemas.openxmlformats.org/drawingml/2006/main">
-            <a:off x="11279219" y="6278594"/>
-            <a:ext cx="519113" cy="241268"/>
+            <a:off x="11334750" y="6496050"/>
+            <a:ext cx="400050" cy="190500"/>
           </a:xfrm>
           <a:prstGeom xmlns:a="http://schemas.openxmlformats.org/drawingml/2006/main" prst="rect">
             <a:avLst/>
           </a:prstGeom>
         </p:spPr>
         <p:txBody>
-          <a:bodyPr xmlns:a="http://schemas.openxmlformats.org/drawingml/2006/main" lIns="0" tIns="0" rIns="0" bIns="0" anchor="b"/>
+          <a:bodyPr xmlns:a="http://schemas.openxmlformats.org/drawingml/2006/main" lIns="38100" tIns="38100" rIns="38100" bIns="38100" anchor="ctr">
+            <a:normAutofit fontScale="64935"/>
+          </a:bodyPr>
           <a:lstStyle xmlns:a="http://schemas.openxmlformats.org/drawingml/2006/main"/>
           <a:p xmlns:a="http://schemas.openxmlformats.org/drawingml/2006/main">
             <a:pPr algn="r">
-              <a:defRPr sz="1000">
-                <a:solidFill>
-                  <a:srgbClr val="000000"/>
-                </a:solidFill>
-                <a:latin typeface="Helvetica Neue"/>
-                <a:ea typeface="Helvetica Neue"/>
-                <a:cs typeface="Helvetica Neue"/>
-              </a:defRPr>
-            </a:pPr>
-            <a:r>
+              <a:lnSpc>
+                <a:spcPct val="105000"/>
+              </a:lnSpc>
+              <a:buNone/>
+              <a:defRPr sz="1100" b="1">
+                <a:solidFill>
+                  <a:srgbClr val="5A665F"/>
+                </a:solidFill>
+                <a:latin typeface="Aptos"/>
+                <a:ea typeface="Aptos"/>
+                <a:cs typeface="Aptos"/>
+              </a:defRPr>
+            </a:pPr>
+            <a:r>
+              <a:rPr sz="1100" b="1">
+                <a:solidFill>
+                  <a:srgbClr val="5A665F"/>
+                </a:solidFill>
+                <a:latin typeface="Aptos"/>
+                <a:ea typeface="Aptos"/>
+                <a:cs typeface="Aptos"/>
+              </a:rPr>
               <a:t>7</a:t>
             </a:r>
           </a:p>
@@ -4118,31 +5745,43 @@
         </p:nvSpPr>
         <p:spPr>
           <a:xfrm xmlns:a="http://schemas.openxmlformats.org/drawingml/2006/main">
-            <a:off x="393668" y="344043"/>
-            <a:ext cx="11404568" cy="1047464"/>
+            <a:off x="571500" y="514350"/>
+            <a:ext cx="10287000" cy="666750"/>
           </a:xfrm>
           <a:prstGeom xmlns:a="http://schemas.openxmlformats.org/drawingml/2006/main" prst="rect">
             <a:avLst/>
           </a:prstGeom>
         </p:spPr>
         <p:txBody>
-          <a:bodyPr xmlns:a="http://schemas.openxmlformats.org/drawingml/2006/main" lIns="0" tIns="0" rIns="0" bIns="0" anchor="t">
+          <a:bodyPr xmlns:a="http://schemas.openxmlformats.org/drawingml/2006/main" lIns="38100" tIns="38100" rIns="38100" bIns="38100" anchor="t">
             <a:normAutofit fontScale="100000"/>
           </a:bodyPr>
           <a:lstStyle xmlns:a="http://schemas.openxmlformats.org/drawingml/2006/main"/>
           <a:p xmlns:a="http://schemas.openxmlformats.org/drawingml/2006/main">
             <a:pPr algn="l">
-              <a:defRPr sz="2900">
-                <a:solidFill>
-                  <a:srgbClr val="000000"/>
-                </a:solidFill>
-                <a:latin typeface="Helvetica Neue"/>
-                <a:ea typeface="Helvetica Neue"/>
-                <a:cs typeface="Helvetica Neue"/>
-              </a:defRPr>
-            </a:pPr>
-            <a:r>
-              <a:t>Save evidence that shows your own decisions</a:t>
+              <a:lnSpc>
+                <a:spcPct val="105000"/>
+              </a:lnSpc>
+              <a:buNone/>
+              <a:defRPr sz="3600" b="1">
+                <a:solidFill>
+                  <a:srgbClr val="173126"/>
+                </a:solidFill>
+                <a:latin typeface="Aptos"/>
+                <a:ea typeface="Aptos"/>
+                <a:cs typeface="Aptos"/>
+              </a:defRPr>
+            </a:pPr>
+            <a:r>
+              <a:rPr sz="3600" b="1">
+                <a:solidFill>
+                  <a:srgbClr val="173126"/>
+                </a:solidFill>
+                <a:latin typeface="Aptos"/>
+                <a:ea typeface="Aptos"/>
+                <a:cs typeface="Aptos"/>
+              </a:rPr>
+              <a:t>Build a response that shows your thinking</a:t>
             </a:r>
           </a:p>
         </p:txBody>
@@ -4163,222 +5802,578 @@
         </p:nvSpPr>
         <p:spPr>
           <a:xfrm xmlns:a="http://schemas.openxmlformats.org/drawingml/2006/main">
-            <a:off x="393668" y="2031968"/>
-            <a:ext cx="5537168" cy="1643063"/>
+            <a:off x="742950" y="2381250"/>
+            <a:ext cx="2095500" cy="1600200"/>
           </a:xfrm>
           <a:prstGeom xmlns:a="http://schemas.openxmlformats.org/drawingml/2006/main" prst="rect">
             <a:avLst/>
           </a:prstGeom>
         </p:spPr>
         <p:txBody>
-          <a:bodyPr xmlns:a="http://schemas.openxmlformats.org/drawingml/2006/main" lIns="91440" tIns="45720" rIns="91440" bIns="45720"/>
-          <a:lstStyle xmlns:a="http://schemas.openxmlformats.org/drawingml/2006/main"/>
-          <a:p xmlns:a="http://schemas.openxmlformats.org/drawingml/2006/main">
-            <a:pPr algn="l">
-              <a:defRPr sz="2400">
-                <a:solidFill>
-                  <a:srgbClr val="000000"/>
-                </a:solidFill>
-                <a:latin typeface="Helvetica Neue"/>
-                <a:ea typeface="Helvetica Neue"/>
-                <a:cs typeface="Helvetica Neue"/>
-              </a:defRPr>
-            </a:pPr>
-            <a:r>
-              <a:t>1</a:t>
-            </a:r>
-          </a:p>
-          <a:p xmlns:a="http://schemas.openxmlformats.org/drawingml/2006/main">
-            <a:pPr algn="l">
-              <a:defRPr sz="2400">
-                <a:solidFill>
-                  <a:srgbClr val="000000"/>
-                </a:solidFill>
-                <a:latin typeface="Helvetica Neue"/>
-                <a:ea typeface="Helvetica Neue"/>
-                <a:cs typeface="Helvetica Neue"/>
-              </a:defRPr>
-            </a:pPr>
-            <a:r>
-              <a:t>Approved drawing set</a:t>
-            </a:r>
-          </a:p>
-        </p:txBody>
-      </p:sp>
-      <p:sp>
-        <p:nvSpPr>
-          <p:cNvPr id="4" name="Content-Placeholder-10-5">
-            <a:extLst xmlns:a="http://schemas.openxmlformats.org/drawingml/2006/main">
-              <a:ext uri="{FF2B5EF4-FFF2-40B4-BE49-F238E27FC236}">
-                <a16:creationId xmlns:a16="http://schemas.microsoft.com/office/drawing/2014/main" id="{30EC1560-0E4E-4109-99BA-93F849745A18}"/>
-              </a:ext>
-            </a:extLst>
-          </p:cNvPr>
-          <p:cNvSpPr>
-            <a:spLocks xmlns:a="http://schemas.openxmlformats.org/drawingml/2006/main" noGrp="1"/>
-          </p:cNvSpPr>
-          <p:nvPr/>
-        </p:nvSpPr>
-        <p:spPr>
-          <a:xfrm xmlns:a="http://schemas.openxmlformats.org/drawingml/2006/main">
-            <a:off x="6256592" y="2031968"/>
-            <a:ext cx="5537168" cy="1643063"/>
-          </a:xfrm>
-          <a:prstGeom xmlns:a="http://schemas.openxmlformats.org/drawingml/2006/main" prst="rect">
-            <a:avLst/>
-          </a:prstGeom>
-        </p:spPr>
-        <p:txBody>
-          <a:bodyPr xmlns:a="http://schemas.openxmlformats.org/drawingml/2006/main" lIns="91440" tIns="45720" rIns="91440" bIns="45720"/>
-          <a:lstStyle xmlns:a="http://schemas.openxmlformats.org/drawingml/2006/main"/>
-          <a:p xmlns:a="http://schemas.openxmlformats.org/drawingml/2006/main">
-            <a:pPr algn="l">
-              <a:defRPr sz="2400">
-                <a:solidFill>
-                  <a:srgbClr val="000000"/>
-                </a:solidFill>
-                <a:latin typeface="Helvetica Neue"/>
-                <a:ea typeface="Helvetica Neue"/>
-                <a:cs typeface="Helvetica Neue"/>
-              </a:defRPr>
-            </a:pPr>
-            <a:r>
-              <a:t>2</a:t>
-            </a:r>
-          </a:p>
-          <a:p xmlns:a="http://schemas.openxmlformats.org/drawingml/2006/main">
-            <a:pPr algn="l">
-              <a:defRPr sz="2400">
-                <a:solidFill>
-                  <a:srgbClr val="000000"/>
-                </a:solidFill>
-                <a:latin typeface="Helvetica Neue"/>
-                <a:ea typeface="Helvetica Neue"/>
-                <a:cs typeface="Helvetica Neue"/>
-              </a:defRPr>
-            </a:pPr>
-            <a:r>
-              <a:t>Checked cutting list</a:t>
-            </a:r>
-          </a:p>
-        </p:txBody>
-      </p:sp>
-      <p:sp>
-        <p:nvSpPr>
-          <p:cNvPr id="5" name="Content-Placeholder-9-6">
-            <a:extLst xmlns:a="http://schemas.openxmlformats.org/drawingml/2006/main">
-              <a:ext uri="{FF2B5EF4-FFF2-40B4-BE49-F238E27FC236}">
-                <a16:creationId xmlns:a16="http://schemas.microsoft.com/office/drawing/2014/main" id="{6289737C-8E25-4900-BBFE-86DD5BF24ABF}"/>
-              </a:ext>
-            </a:extLst>
-          </p:cNvPr>
-          <p:cNvSpPr>
-            <a:spLocks xmlns:a="http://schemas.openxmlformats.org/drawingml/2006/main" noGrp="1"/>
-          </p:cNvSpPr>
-          <p:nvPr/>
-        </p:nvSpPr>
-        <p:spPr>
-          <a:xfrm xmlns:a="http://schemas.openxmlformats.org/drawingml/2006/main">
-            <a:off x="393668" y="4016978"/>
-            <a:ext cx="5537168" cy="1643158"/>
-          </a:xfrm>
-          <a:prstGeom xmlns:a="http://schemas.openxmlformats.org/drawingml/2006/main" prst="rect">
-            <a:avLst/>
-          </a:prstGeom>
-        </p:spPr>
-        <p:txBody>
-          <a:bodyPr xmlns:a="http://schemas.openxmlformats.org/drawingml/2006/main" lIns="0" tIns="0" rIns="0" bIns="0">
+          <a:bodyPr xmlns:a="http://schemas.openxmlformats.org/drawingml/2006/main" lIns="38100" tIns="38100" rIns="38100" bIns="38100" anchor="ctr">
             <a:normAutofit fontScale="100000"/>
           </a:bodyPr>
           <a:lstStyle xmlns:a="http://schemas.openxmlformats.org/drawingml/2006/main"/>
           <a:p xmlns:a="http://schemas.openxmlformats.org/drawingml/2006/main">
             <a:pPr algn="l">
-              <a:defRPr sz="2400">
-                <a:solidFill>
-                  <a:srgbClr val="000000"/>
-                </a:solidFill>
-                <a:latin typeface="Helvetica Neue"/>
-                <a:ea typeface="Helvetica Neue"/>
-                <a:cs typeface="Helvetica Neue"/>
-              </a:defRPr>
-            </a:pPr>
-            <a:r>
-              <a:t>3</a:t>
-            </a:r>
-          </a:p>
-          <a:p xmlns:a="http://schemas.openxmlformats.org/drawingml/2006/main">
-            <a:pPr algn="l">
-              <a:defRPr sz="2400">
-                <a:solidFill>
-                  <a:srgbClr val="000000"/>
-                </a:solidFill>
-                <a:latin typeface="Helvetica Neue"/>
-                <a:ea typeface="Helvetica Neue"/>
-                <a:cs typeface="Helvetica Neue"/>
-              </a:defRPr>
-            </a:pPr>
-            <a:r>
-              <a:t>Production schedule</a:t>
-            </a:r>
-          </a:p>
-        </p:txBody>
-      </p:sp>
-      <p:sp>
-        <p:nvSpPr>
-          <p:cNvPr id="6" name="Content-Placeholder-10-7">
-            <a:extLst xmlns:a="http://schemas.openxmlformats.org/drawingml/2006/main">
-              <a:ext uri="{FF2B5EF4-FFF2-40B4-BE49-F238E27FC236}">
-                <a16:creationId xmlns:a16="http://schemas.microsoft.com/office/drawing/2014/main" id="{EB0B90AB-6B1A-4019-BCE0-2F4353FF04C5}"/>
-              </a:ext>
-            </a:extLst>
-          </p:cNvPr>
-          <p:cNvSpPr>
-            <a:spLocks xmlns:a="http://schemas.openxmlformats.org/drawingml/2006/main" noGrp="1"/>
-          </p:cNvSpPr>
-          <p:nvPr/>
-        </p:nvSpPr>
-        <p:spPr>
-          <a:xfrm xmlns:a="http://schemas.openxmlformats.org/drawingml/2006/main">
-            <a:off x="6256592" y="4016978"/>
-            <a:ext cx="5537168" cy="1643158"/>
+              <a:lnSpc>
+                <a:spcPct val="112000"/>
+              </a:lnSpc>
+              <a:buNone/>
+              <a:defRPr sz="2000" b="0">
+                <a:solidFill>
+                  <a:srgbClr val="173126"/>
+                </a:solidFill>
+                <a:latin typeface="Aptos"/>
+                <a:ea typeface="Aptos"/>
+                <a:cs typeface="Aptos"/>
+              </a:defRPr>
+            </a:pPr>
+            <a:r>
+              <a:rPr sz="2000" b="0">
+                <a:solidFill>
+                  <a:srgbClr val="173126"/>
+                </a:solidFill>
+                <a:latin typeface="Aptos"/>
+                <a:ea typeface="Aptos"/>
+                <a:cs typeface="Aptos"/>
+              </a:rPr>
+              <a:t>READ</a:t>
+            </a:r>
+          </a:p>
+          <a:p xmlns:a="http://schemas.openxmlformats.org/drawingml/2006/main">
+            <a:pPr algn="l">
+              <a:lnSpc>
+                <a:spcPct val="112000"/>
+              </a:lnSpc>
+              <a:buNone/>
+              <a:defRPr sz="2000" b="0">
+                <a:solidFill>
+                  <a:srgbClr val="173126"/>
+                </a:solidFill>
+                <a:latin typeface="Aptos"/>
+                <a:ea typeface="Aptos"/>
+                <a:cs typeface="Aptos"/>
+              </a:defRPr>
+            </a:pPr>
+            <a:r>
+              <a:rPr sz="2000" b="0">
+                <a:solidFill>
+                  <a:srgbClr val="173126"/>
+                </a:solidFill>
+                <a:latin typeface="Aptos"/>
+                <a:ea typeface="Aptos"/>
+                <a:cs typeface="Aptos"/>
+              </a:rPr>
+              <a:t>What is the question asking?</a:t>
+            </a:r>
+          </a:p>
+        </p:txBody>
+      </p:sp>
+      <p:sp>
+        <p:nvSpPr>
+          <p:cNvPr id="4" name="Content-Placeholder-10-5">
+            <a:extLst xmlns:a="http://schemas.openxmlformats.org/drawingml/2006/main">
+              <a:ext uri="{FF2B5EF4-FFF2-40B4-BE49-F238E27FC236}">
+                <a16:creationId xmlns:a16="http://schemas.microsoft.com/office/drawing/2014/main" id="{30EC1560-0E4E-4109-99BA-93F849745A18}"/>
+              </a:ext>
+            </a:extLst>
+          </p:cNvPr>
+          <p:cNvSpPr>
+            <a:spLocks xmlns:a="http://schemas.openxmlformats.org/drawingml/2006/main" noGrp="1"/>
+          </p:cNvSpPr>
+          <p:nvPr/>
+        </p:nvSpPr>
+        <p:spPr>
+          <a:xfrm xmlns:a="http://schemas.openxmlformats.org/drawingml/2006/main">
+            <a:off x="3648075" y="2381250"/>
+            <a:ext cx="2095500" cy="1600200"/>
           </a:xfrm>
           <a:prstGeom xmlns:a="http://schemas.openxmlformats.org/drawingml/2006/main" prst="rect">
             <a:avLst/>
           </a:prstGeom>
         </p:spPr>
         <p:txBody>
-          <a:bodyPr xmlns:a="http://schemas.openxmlformats.org/drawingml/2006/main" lIns="0" tIns="0" rIns="0" bIns="0">
+          <a:bodyPr xmlns:a="http://schemas.openxmlformats.org/drawingml/2006/main" lIns="38100" tIns="38100" rIns="38100" bIns="38100" anchor="ctr">
             <a:normAutofit fontScale="100000"/>
           </a:bodyPr>
           <a:lstStyle xmlns:a="http://schemas.openxmlformats.org/drawingml/2006/main"/>
           <a:p xmlns:a="http://schemas.openxmlformats.org/drawingml/2006/main">
             <a:pPr algn="l">
-              <a:defRPr sz="2400">
-                <a:solidFill>
-                  <a:srgbClr val="000000"/>
-                </a:solidFill>
-                <a:latin typeface="Helvetica Neue"/>
-                <a:ea typeface="Helvetica Neue"/>
-                <a:cs typeface="Helvetica Neue"/>
-              </a:defRPr>
-            </a:pPr>
-            <a:r>
-              <a:t>4</a:t>
-            </a:r>
-          </a:p>
-          <a:p xmlns:a="http://schemas.openxmlformats.org/drawingml/2006/main">
-            <a:pPr algn="l">
-              <a:defRPr sz="2400">
-                <a:solidFill>
-                  <a:srgbClr val="000000"/>
-                </a:solidFill>
-                <a:latin typeface="Helvetica Neue"/>
-                <a:ea typeface="Helvetica Neue"/>
-                <a:cs typeface="Helvetica Neue"/>
-              </a:defRPr>
-            </a:pPr>
-            <a:r>
-              <a:t>Datum-based mark-out check</a:t>
+              <a:lnSpc>
+                <a:spcPct val="112000"/>
+              </a:lnSpc>
+              <a:buNone/>
+              <a:defRPr sz="2000" b="0">
+                <a:solidFill>
+                  <a:srgbClr val="173126"/>
+                </a:solidFill>
+                <a:latin typeface="Aptos"/>
+                <a:ea typeface="Aptos"/>
+                <a:cs typeface="Aptos"/>
+              </a:defRPr>
+            </a:pPr>
+            <a:r>
+              <a:rPr sz="2000" b="0">
+                <a:solidFill>
+                  <a:srgbClr val="173126"/>
+                </a:solidFill>
+                <a:latin typeface="Aptos"/>
+                <a:ea typeface="Aptos"/>
+                <a:cs typeface="Aptos"/>
+              </a:rPr>
+              <a:t>SELECT</a:t>
+            </a:r>
+          </a:p>
+          <a:p xmlns:a="http://schemas.openxmlformats.org/drawingml/2006/main">
+            <a:pPr algn="l">
+              <a:lnSpc>
+                <a:spcPct val="112000"/>
+              </a:lnSpc>
+              <a:buNone/>
+              <a:defRPr sz="2000" b="0">
+                <a:solidFill>
+                  <a:srgbClr val="173126"/>
+                </a:solidFill>
+                <a:latin typeface="Aptos"/>
+                <a:ea typeface="Aptos"/>
+                <a:cs typeface="Aptos"/>
+              </a:defRPr>
+            </a:pPr>
+            <a:r>
+              <a:rPr sz="2000" b="0">
+                <a:solidFill>
+                  <a:srgbClr val="173126"/>
+                </a:solidFill>
+                <a:latin typeface="Aptos"/>
+                <a:ea typeface="Aptos"/>
+                <a:cs typeface="Aptos"/>
+              </a:rPr>
+              <a:t>Return to the precise theory.</a:t>
+            </a:r>
+          </a:p>
+        </p:txBody>
+      </p:sp>
+      <p:sp>
+        <p:nvSpPr>
+          <p:cNvPr id="5" name="Content-Placeholder-9-6">
+            <a:extLst xmlns:a="http://schemas.openxmlformats.org/drawingml/2006/main">
+              <a:ext uri="{FF2B5EF4-FFF2-40B4-BE49-F238E27FC236}">
+                <a16:creationId xmlns:a16="http://schemas.microsoft.com/office/drawing/2014/main" id="{6289737C-8E25-4900-BBFE-86DD5BF24ABF}"/>
+              </a:ext>
+            </a:extLst>
+          </p:cNvPr>
+          <p:cNvSpPr>
+            <a:spLocks xmlns:a="http://schemas.openxmlformats.org/drawingml/2006/main" noGrp="1"/>
+          </p:cNvSpPr>
+          <p:nvPr/>
+        </p:nvSpPr>
+        <p:spPr>
+          <a:xfrm xmlns:a="http://schemas.openxmlformats.org/drawingml/2006/main">
+            <a:off x="6553200" y="2381250"/>
+            <a:ext cx="2095500" cy="1600200"/>
+          </a:xfrm>
+          <a:prstGeom xmlns:a="http://schemas.openxmlformats.org/drawingml/2006/main" prst="rect">
+            <a:avLst/>
+          </a:prstGeom>
+        </p:spPr>
+        <p:txBody>
+          <a:bodyPr xmlns:a="http://schemas.openxmlformats.org/drawingml/2006/main" lIns="38100" tIns="38100" rIns="38100" bIns="38100" anchor="ctr">
+            <a:normAutofit fontScale="100000"/>
+          </a:bodyPr>
+          <a:lstStyle xmlns:a="http://schemas.openxmlformats.org/drawingml/2006/main"/>
+          <a:p xmlns:a="http://schemas.openxmlformats.org/drawingml/2006/main">
+            <a:pPr algn="l">
+              <a:lnSpc>
+                <a:spcPct val="112000"/>
+              </a:lnSpc>
+              <a:buNone/>
+              <a:defRPr sz="2000" b="0">
+                <a:solidFill>
+                  <a:srgbClr val="173126"/>
+                </a:solidFill>
+                <a:latin typeface="Aptos"/>
+                <a:ea typeface="Aptos"/>
+                <a:cs typeface="Aptos"/>
+              </a:defRPr>
+            </a:pPr>
+            <a:r>
+              <a:rPr sz="2000" b="0">
+                <a:solidFill>
+                  <a:srgbClr val="173126"/>
+                </a:solidFill>
+                <a:latin typeface="Aptos"/>
+                <a:ea typeface="Aptos"/>
+                <a:cs typeface="Aptos"/>
+              </a:rPr>
+              <a:t>EXPLAIN</a:t>
+            </a:r>
+          </a:p>
+          <a:p xmlns:a="http://schemas.openxmlformats.org/drawingml/2006/main">
+            <a:pPr algn="l">
+              <a:lnSpc>
+                <a:spcPct val="112000"/>
+              </a:lnSpc>
+              <a:buNone/>
+              <a:defRPr sz="2000" b="0">
+                <a:solidFill>
+                  <a:srgbClr val="173126"/>
+                </a:solidFill>
+                <a:latin typeface="Aptos"/>
+                <a:ea typeface="Aptos"/>
+                <a:cs typeface="Aptos"/>
+              </a:defRPr>
+            </a:pPr>
+            <a:r>
+              <a:rPr sz="2000" b="0">
+                <a:solidFill>
+                  <a:srgbClr val="173126"/>
+                </a:solidFill>
+                <a:latin typeface="Aptos"/>
+                <a:ea typeface="Aptos"/>
+                <a:cs typeface="Aptos"/>
+              </a:rPr>
+              <a:t>Connect the idea to your evidence.</a:t>
+            </a:r>
+          </a:p>
+        </p:txBody>
+      </p:sp>
+      <p:sp>
+        <p:nvSpPr>
+          <p:cNvPr id="6" name="Content-Placeholder-10-7">
+            <a:extLst xmlns:a="http://schemas.openxmlformats.org/drawingml/2006/main">
+              <a:ext uri="{FF2B5EF4-FFF2-40B4-BE49-F238E27FC236}">
+                <a16:creationId xmlns:a16="http://schemas.microsoft.com/office/drawing/2014/main" id="{EB0B90AB-6B1A-4019-BCE0-2F4353FF04C5}"/>
+              </a:ext>
+            </a:extLst>
+          </p:cNvPr>
+          <p:cNvSpPr>
+            <a:spLocks xmlns:a="http://schemas.openxmlformats.org/drawingml/2006/main" noGrp="1"/>
+          </p:cNvSpPr>
+          <p:nvPr/>
+        </p:nvSpPr>
+        <p:spPr>
+          <a:xfrm xmlns:a="http://schemas.openxmlformats.org/drawingml/2006/main">
+            <a:off x="9458325" y="2381250"/>
+            <a:ext cx="2095500" cy="1600200"/>
+          </a:xfrm>
+          <a:prstGeom xmlns:a="http://schemas.openxmlformats.org/drawingml/2006/main" prst="rect">
+            <a:avLst/>
+          </a:prstGeom>
+        </p:spPr>
+        <p:txBody>
+          <a:bodyPr xmlns:a="http://schemas.openxmlformats.org/drawingml/2006/main" lIns="38100" tIns="38100" rIns="38100" bIns="38100" anchor="ctr">
+            <a:normAutofit fontScale="100000"/>
+          </a:bodyPr>
+          <a:lstStyle xmlns:a="http://schemas.openxmlformats.org/drawingml/2006/main"/>
+          <a:p xmlns:a="http://schemas.openxmlformats.org/drawingml/2006/main">
+            <a:pPr algn="l">
+              <a:lnSpc>
+                <a:spcPct val="112000"/>
+              </a:lnSpc>
+              <a:buNone/>
+              <a:defRPr sz="2000" b="0">
+                <a:solidFill>
+                  <a:srgbClr val="173126"/>
+                </a:solidFill>
+                <a:latin typeface="Aptos"/>
+                <a:ea typeface="Aptos"/>
+                <a:cs typeface="Aptos"/>
+              </a:defRPr>
+            </a:pPr>
+            <a:r>
+              <a:rPr sz="2000" b="0">
+                <a:solidFill>
+                  <a:srgbClr val="173126"/>
+                </a:solidFill>
+                <a:latin typeface="Aptos"/>
+                <a:ea typeface="Aptos"/>
+                <a:cs typeface="Aptos"/>
+              </a:rPr>
+              <a:t>CHECK</a:t>
+            </a:r>
+          </a:p>
+          <a:p xmlns:a="http://schemas.openxmlformats.org/drawingml/2006/main">
+            <a:pPr algn="l">
+              <a:lnSpc>
+                <a:spcPct val="112000"/>
+              </a:lnSpc>
+              <a:buNone/>
+              <a:defRPr sz="2000" b="0">
+                <a:solidFill>
+                  <a:srgbClr val="173126"/>
+                </a:solidFill>
+                <a:latin typeface="Aptos"/>
+                <a:ea typeface="Aptos"/>
+                <a:cs typeface="Aptos"/>
+              </a:defRPr>
+            </a:pPr>
+            <a:r>
+              <a:rPr sz="2000" b="0">
+                <a:solidFill>
+                  <a:srgbClr val="173126"/>
+                </a:solidFill>
+                <a:latin typeface="Aptos"/>
+                <a:ea typeface="Aptos"/>
+                <a:cs typeface="Aptos"/>
+              </a:rPr>
+              <a:t>Answer every part in your own words.</a:t>
+            </a:r>
+          </a:p>
+        </p:txBody>
+      </p:sp>
+      <p:sp>
+        <p:nvSpPr>
+          <p:cNvPr id="8" name="">
+            <a:extLst xmlns:a="http://schemas.openxmlformats.org/drawingml/2006/main">
+              <a:ext uri="{FF2B5EF4-FFF2-40B4-BE49-F238E27FC236}">
+                <a16:creationId xmlns:a16="http://schemas.microsoft.com/office/drawing/2014/main" id="{7068BC53-1E03-43D7-9109-79AC1725D473}"/>
+              </a:ext>
+            </a:extLst>
+          </p:cNvPr>
+          <p:cNvSpPr>
+            <a:spLocks xmlns:a="http://schemas.openxmlformats.org/drawingml/2006/main" noGrp="1"/>
+          </p:cNvSpPr>
+          <p:nvPr/>
+        </p:nvSpPr>
+        <p:spPr>
+          <a:xfrm xmlns:a="http://schemas.openxmlformats.org/drawingml/2006/main">
+            <a:off x="590550" y="1219200"/>
+            <a:ext cx="10001250" cy="381000"/>
+          </a:xfrm>
+          <a:prstGeom xmlns:a="http://schemas.openxmlformats.org/drawingml/2006/main" prst="rect">
+            <a:avLst/>
+          </a:prstGeom>
+          <a:noFill xmlns:a="http://schemas.openxmlformats.org/drawingml/2006/main"/>
+          <a:ln xmlns:a="http://schemas.openxmlformats.org/drawingml/2006/main" w="0">
+            <a:noFill/>
+            <a:prstDash val="solid"/>
+          </a:ln>
+        </p:spPr>
+        <p:txBody>
+          <a:bodyPr xmlns:a="http://schemas.openxmlformats.org/drawingml/2006/main" lIns="38100" tIns="38100" rIns="38100" bIns="38100" anchor="t">
+            <a:normAutofit fontScale="95238"/>
+          </a:bodyPr>
+          <a:lstStyle xmlns:a="http://schemas.openxmlformats.org/drawingml/2006/main"/>
+          <a:p xmlns:a="http://schemas.openxmlformats.org/drawingml/2006/main">
+            <a:pPr algn="l">
+              <a:lnSpc>
+                <a:spcPct val="105000"/>
+              </a:lnSpc>
+              <a:buNone/>
+              <a:defRPr sz="2000" b="0">
+                <a:solidFill>
+                  <a:srgbClr val="5A665F"/>
+                </a:solidFill>
+                <a:latin typeface="Aptos"/>
+                <a:ea typeface="Aptos"/>
+                <a:cs typeface="Aptos"/>
+              </a:defRPr>
+            </a:pPr>
+            <a:r>
+              <a:rPr sz="2000" b="0">
+                <a:solidFill>
+                  <a:srgbClr val="5A665F"/>
+                </a:solidFill>
+                <a:latin typeface="Aptos"/>
+                <a:ea typeface="Aptos"/>
+                <a:cs typeface="Aptos"/>
+              </a:rPr>
+              <a:t>Prompt: Explain one decision from this module and justify it with evidence.</a:t>
+            </a:r>
+          </a:p>
+        </p:txBody>
+      </p:sp>
+      <p:sp>
+        <p:nvSpPr>
+          <p:cNvPr id="9" name="">
+            <a:extLst xmlns:a="http://schemas.openxmlformats.org/drawingml/2006/main">
+              <a:ext uri="{FF2B5EF4-FFF2-40B4-BE49-F238E27FC236}">
+                <a16:creationId xmlns:a16="http://schemas.microsoft.com/office/drawing/2014/main" id="{FA6A9EA3-95E5-4D5F-BB92-2DD1A0F219AF}"/>
+              </a:ext>
+            </a:extLst>
+          </p:cNvPr>
+          <p:cNvSpPr>
+            <a:spLocks xmlns:a="http://schemas.openxmlformats.org/drawingml/2006/main" noGrp="1"/>
+          </p:cNvSpPr>
+          <p:nvPr/>
+        </p:nvSpPr>
+        <p:spPr>
+          <a:xfrm xmlns:a="http://schemas.openxmlformats.org/drawingml/2006/main">
+            <a:off x="495300" y="2114550"/>
+            <a:ext cx="2619375" cy="2381250"/>
+          </a:xfrm>
+          <a:prstGeom xmlns:a="http://schemas.openxmlformats.org/drawingml/2006/main" prst="roundRect">
+            <a:avLst>
+              <a:gd name="adj" fmla="val 4800"/>
+            </a:avLst>
+          </a:prstGeom>
+          <a:noFill xmlns:a="http://schemas.openxmlformats.org/drawingml/2006/main"/>
+          <a:ln xmlns:a="http://schemas.openxmlformats.org/drawingml/2006/main" w="9525">
+            <a:solidFill>
+              <a:srgbClr val="EAD2AE"/>
+            </a:solidFill>
+            <a:prstDash val="solid"/>
+          </a:ln>
+        </p:spPr>
+      </p:sp>
+      <p:sp>
+        <p:nvSpPr>
+          <p:cNvPr id="10" name="">
+            <a:extLst xmlns:a="http://schemas.openxmlformats.org/drawingml/2006/main">
+              <a:ext uri="{FF2B5EF4-FFF2-40B4-BE49-F238E27FC236}">
+                <a16:creationId xmlns:a16="http://schemas.microsoft.com/office/drawing/2014/main" id="{25271B85-927D-4F07-BEBC-5B039156D456}"/>
+              </a:ext>
+            </a:extLst>
+          </p:cNvPr>
+          <p:cNvSpPr>
+            <a:spLocks xmlns:a="http://schemas.openxmlformats.org/drawingml/2006/main" noGrp="1"/>
+          </p:cNvSpPr>
+          <p:nvPr/>
+        </p:nvSpPr>
+        <p:spPr>
+          <a:xfrm xmlns:a="http://schemas.openxmlformats.org/drawingml/2006/main">
+            <a:off x="3400425" y="2114550"/>
+            <a:ext cx="2619375" cy="2381250"/>
+          </a:xfrm>
+          <a:prstGeom xmlns:a="http://schemas.openxmlformats.org/drawingml/2006/main" prst="roundRect">
+            <a:avLst>
+              <a:gd name="adj" fmla="val 4800"/>
+            </a:avLst>
+          </a:prstGeom>
+          <a:noFill xmlns:a="http://schemas.openxmlformats.org/drawingml/2006/main"/>
+          <a:ln xmlns:a="http://schemas.openxmlformats.org/drawingml/2006/main" w="9525">
+            <a:solidFill>
+              <a:srgbClr val="EAD2AE"/>
+            </a:solidFill>
+            <a:prstDash val="solid"/>
+          </a:ln>
+        </p:spPr>
+      </p:sp>
+      <p:sp>
+        <p:nvSpPr>
+          <p:cNvPr id="11" name="">
+            <a:extLst xmlns:a="http://schemas.openxmlformats.org/drawingml/2006/main">
+              <a:ext uri="{FF2B5EF4-FFF2-40B4-BE49-F238E27FC236}">
+                <a16:creationId xmlns:a16="http://schemas.microsoft.com/office/drawing/2014/main" id="{624A77A5-D7E5-4164-8A22-C5E5F6D5E8D9}"/>
+              </a:ext>
+            </a:extLst>
+          </p:cNvPr>
+          <p:cNvSpPr>
+            <a:spLocks xmlns:a="http://schemas.openxmlformats.org/drawingml/2006/main" noGrp="1"/>
+          </p:cNvSpPr>
+          <p:nvPr/>
+        </p:nvSpPr>
+        <p:spPr>
+          <a:xfrm xmlns:a="http://schemas.openxmlformats.org/drawingml/2006/main">
+            <a:off x="6305550" y="2114550"/>
+            <a:ext cx="2619375" cy="2381250"/>
+          </a:xfrm>
+          <a:prstGeom xmlns:a="http://schemas.openxmlformats.org/drawingml/2006/main" prst="roundRect">
+            <a:avLst>
+              <a:gd name="adj" fmla="val 4800"/>
+            </a:avLst>
+          </a:prstGeom>
+          <a:noFill xmlns:a="http://schemas.openxmlformats.org/drawingml/2006/main"/>
+          <a:ln xmlns:a="http://schemas.openxmlformats.org/drawingml/2006/main" w="9525">
+            <a:solidFill>
+              <a:srgbClr val="D8941C"/>
+            </a:solidFill>
+            <a:prstDash val="solid"/>
+          </a:ln>
+        </p:spPr>
+      </p:sp>
+      <p:sp>
+        <p:nvSpPr>
+          <p:cNvPr id="12" name="">
+            <a:extLst xmlns:a="http://schemas.openxmlformats.org/drawingml/2006/main">
+              <a:ext uri="{FF2B5EF4-FFF2-40B4-BE49-F238E27FC236}">
+                <a16:creationId xmlns:a16="http://schemas.microsoft.com/office/drawing/2014/main" id="{0E8952F6-C27A-4D96-AD74-3A918560314C}"/>
+              </a:ext>
+            </a:extLst>
+          </p:cNvPr>
+          <p:cNvSpPr>
+            <a:spLocks xmlns:a="http://schemas.openxmlformats.org/drawingml/2006/main" noGrp="1"/>
+          </p:cNvSpPr>
+          <p:nvPr/>
+        </p:nvSpPr>
+        <p:spPr>
+          <a:xfrm xmlns:a="http://schemas.openxmlformats.org/drawingml/2006/main">
+            <a:off x="9210675" y="2114550"/>
+            <a:ext cx="2619375" cy="2381250"/>
+          </a:xfrm>
+          <a:prstGeom xmlns:a="http://schemas.openxmlformats.org/drawingml/2006/main" prst="roundRect">
+            <a:avLst>
+              <a:gd name="adj" fmla="val 4800"/>
+            </a:avLst>
+          </a:prstGeom>
+          <a:noFill xmlns:a="http://schemas.openxmlformats.org/drawingml/2006/main"/>
+          <a:ln xmlns:a="http://schemas.openxmlformats.org/drawingml/2006/main" w="9525">
+            <a:solidFill>
+              <a:srgbClr val="EAD2AE"/>
+            </a:solidFill>
+            <a:prstDash val="solid"/>
+          </a:ln>
+        </p:spPr>
+      </p:sp>
+      <p:sp>
+        <p:nvSpPr>
+          <p:cNvPr id="13" name="">
+            <a:extLst xmlns:a="http://schemas.openxmlformats.org/drawingml/2006/main">
+              <a:ext uri="{FF2B5EF4-FFF2-40B4-BE49-F238E27FC236}">
+                <a16:creationId xmlns:a16="http://schemas.microsoft.com/office/drawing/2014/main" id="{0B854EB8-D8C9-4177-B370-EEA97194B193}"/>
+              </a:ext>
+            </a:extLst>
+          </p:cNvPr>
+          <p:cNvSpPr>
+            <a:spLocks xmlns:a="http://schemas.openxmlformats.org/drawingml/2006/main" noGrp="1"/>
+          </p:cNvSpPr>
+          <p:nvPr/>
+        </p:nvSpPr>
+        <p:spPr>
+          <a:xfrm xmlns:a="http://schemas.openxmlformats.org/drawingml/2006/main">
+            <a:off x="704850" y="4972050"/>
+            <a:ext cx="10477500" cy="438150"/>
+          </a:xfrm>
+          <a:prstGeom xmlns:a="http://schemas.openxmlformats.org/drawingml/2006/main" prst="rect">
+            <a:avLst/>
+          </a:prstGeom>
+          <a:noFill xmlns:a="http://schemas.openxmlformats.org/drawingml/2006/main"/>
+          <a:ln xmlns:a="http://schemas.openxmlformats.org/drawingml/2006/main" w="0">
+            <a:noFill/>
+            <a:prstDash val="solid"/>
+          </a:ln>
+        </p:spPr>
+        <p:txBody>
+          <a:bodyPr xmlns:a="http://schemas.openxmlformats.org/drawingml/2006/main" lIns="38100" tIns="38100" rIns="38100" bIns="38100" anchor="t">
+            <a:normAutofit fontScale="100000"/>
+          </a:bodyPr>
+          <a:lstStyle xmlns:a="http://schemas.openxmlformats.org/drawingml/2006/main"/>
+          <a:p xmlns:a="http://schemas.openxmlformats.org/drawingml/2006/main">
+            <a:pPr algn="l">
+              <a:lnSpc>
+                <a:spcPct val="105000"/>
+              </a:lnSpc>
+              <a:buNone/>
+              <a:defRPr sz="1700" b="1">
+                <a:solidFill>
+                  <a:srgbClr val="5A665F"/>
+                </a:solidFill>
+                <a:latin typeface="Aptos"/>
+                <a:ea typeface="Aptos"/>
+                <a:cs typeface="Aptos"/>
+              </a:defRPr>
+            </a:pPr>
+            <a:r>
+              <a:rPr sz="1700" b="1">
+                <a:solidFill>
+                  <a:srgbClr val="5A665F"/>
+                </a:solidFill>
+                <a:latin typeface="Aptos"/>
+                <a:ea typeface="Aptos"/>
+                <a:cs typeface="Aptos"/>
+              </a:rPr>
+              <a:t>Sentence starter: I chose … because … The evidence I will save is …</a:t>
             </a:r>
           </a:p>
         </p:txBody>
@@ -4396,6 +6391,13 @@
 <file path=ppt/slides/slide8.xml><?xml version="1.0" encoding="utf-8"?>
 <p:sld xmlns:p="http://schemas.openxmlformats.org/presentationml/2006/main">
   <p:cSld>
+    <p:bg>
+      <p:bgPr>
+        <a:solidFill xmlns:a="http://schemas.openxmlformats.org/drawingml/2006/main">
+          <a:srgbClr val="F8F2E8"/>
+        </a:solidFill>
+      </p:bgPr>
+    </p:bg>
     <p:spTree>
       <p:nvGrpSpPr>
         <p:cNvPr id="1" name=""/>
@@ -4421,21 +6423,106 @@
         </p:nvSpPr>
         <p:spPr>
           <a:xfrm xmlns:a="http://schemas.openxmlformats.org/drawingml/2006/main">
-            <a:off x="393668" y="1738789"/>
-            <a:ext cx="9448800" cy="2491454"/>
+            <a:off x="628650" y="1352550"/>
+            <a:ext cx="5810250" cy="1257300"/>
           </a:xfrm>
           <a:prstGeom xmlns:a="http://schemas.openxmlformats.org/drawingml/2006/main" prst="rect">
             <a:avLst/>
           </a:prstGeom>
         </p:spPr>
         <p:txBody>
-          <a:bodyPr xmlns:a="http://schemas.openxmlformats.org/drawingml/2006/main" lIns="0" tIns="0" rIns="0" bIns="0" anchor="b">
-            <a:noAutofit/>
+          <a:bodyPr xmlns:a="http://schemas.openxmlformats.org/drawingml/2006/main" lIns="38100" tIns="38100" rIns="38100" bIns="38100" anchor="t">
+            <a:normAutofit fontScale="94145"/>
           </a:bodyPr>
           <a:lstStyle xmlns:a="http://schemas.openxmlformats.org/drawingml/2006/main"/>
           <a:p xmlns:a="http://schemas.openxmlformats.org/drawingml/2006/main">
             <a:pPr algn="l">
-              <a:defRPr sz="6000">
+              <a:lnSpc>
+                <a:spcPct val="98000"/>
+              </a:lnSpc>
+              <a:buNone/>
+              <a:defRPr sz="4200" b="1">
+                <a:solidFill>
+                  <a:srgbClr val="173126"/>
+                </a:solidFill>
+                <a:latin typeface="Aptos"/>
+                <a:ea typeface="Aptos"/>
+                <a:cs typeface="Aptos"/>
+              </a:defRPr>
+            </a:pPr>
+            <a:r>
+              <a:rPr sz="4200" b="1">
+                <a:solidFill>
+                  <a:srgbClr val="173126"/>
+                </a:solidFill>
+                <a:latin typeface="Aptos"/>
+                <a:ea typeface="Aptos"/>
+                <a:cs typeface="Aptos"/>
+              </a:rPr>
+              <a:t>Exit ticket: prove what you learned</a:t>
+            </a:r>
+          </a:p>
+        </p:txBody>
+      </p:sp>
+      <p:sp>
+        <p:nvSpPr>
+          <p:cNvPr id="2" name="Subtitle-4-2">
+            <a:extLst xmlns:a="http://schemas.openxmlformats.org/drawingml/2006/main">
+              <a:ext uri="{FF2B5EF4-FFF2-40B4-BE49-F238E27FC236}">
+                <a16:creationId xmlns:a16="http://schemas.microsoft.com/office/drawing/2014/main" id="{59A667BD-6E05-4D2B-B757-03521D08857D}"/>
+              </a:ext>
+            </a:extLst>
+          </p:cNvPr>
+          <p:cNvSpPr>
+            <a:spLocks xmlns:a="http://schemas.openxmlformats.org/drawingml/2006/main" noGrp="1"/>
+          </p:cNvSpPr>
+          <p:nvPr/>
+        </p:nvSpPr>
+        <p:spPr>
+          <a:xfrm xmlns:a="http://schemas.openxmlformats.org/drawingml/2006/main">
+            <a:off x="666750" y="3048000"/>
+            <a:ext cx="5429250" cy="2095500"/>
+          </a:xfrm>
+          <a:prstGeom xmlns:a="http://schemas.openxmlformats.org/drawingml/2006/main" prst="rect">
+            <a:avLst/>
+          </a:prstGeom>
+        </p:spPr>
+        <p:txBody>
+          <a:bodyPr xmlns:a="http://schemas.openxmlformats.org/drawingml/2006/main" lIns="38100" tIns="38100" rIns="38100" bIns="38100" anchor="t">
+            <a:normAutofit fontScale="100000"/>
+          </a:bodyPr>
+          <a:lstStyle xmlns:a="http://schemas.openxmlformats.org/drawingml/2006/main"/>
+          <a:p xmlns:a="http://schemas.openxmlformats.org/drawingml/2006/main">
+            <a:pPr algn="l">
+              <a:lnSpc>
+                <a:spcPct val="115000"/>
+              </a:lnSpc>
+              <a:buNone/>
+              <a:defRPr sz="2200" b="0">
+                <a:solidFill>
+                  <a:srgbClr val="173126"/>
+                </a:solidFill>
+                <a:latin typeface="Aptos"/>
+                <a:ea typeface="Aptos"/>
+                <a:cs typeface="Aptos"/>
+              </a:defRPr>
+            </a:pPr>
+            <a:r>
+              <a:rPr sz="2200" b="0">
+                <a:solidFill>
+                  <a:srgbClr val="173126"/>
+                </a:solidFill>
+                <a:latin typeface="Aptos"/>
+                <a:ea typeface="Aptos"/>
+                <a:cs typeface="Aptos"/>
+              </a:rPr>
+              <a:t>1. Name one decision you can now justify.</a:t>
+            </a:r>
+          </a:p>
+          <a:p xmlns:a="http://schemas.openxmlformats.org/drawingml/2006/main">
+            <a:pPr algn="l">
+              <a:buNone/>
+              <a:defRPr sz="2400">
                 <a:solidFill>
                   <a:srgbClr val="000000"/>
                 </a:solidFill>
@@ -4445,41 +6532,39 @@
               </a:defRPr>
             </a:pPr>
             <a:r>
-              <a:t>Return to the module</a:t>
-            </a:r>
-          </a:p>
-        </p:txBody>
-      </p:sp>
-      <p:sp>
-        <p:nvSpPr>
-          <p:cNvPr id="2" name="Subtitle-4-2">
-            <a:extLst xmlns:a="http://schemas.openxmlformats.org/drawingml/2006/main">
-              <a:ext uri="{FF2B5EF4-FFF2-40B4-BE49-F238E27FC236}">
-                <a16:creationId xmlns:a16="http://schemas.microsoft.com/office/drawing/2014/main" id="{59A667BD-6E05-4D2B-B757-03521D08857D}"/>
-              </a:ext>
-            </a:extLst>
-          </p:cNvPr>
-          <p:cNvSpPr>
-            <a:spLocks xmlns:a="http://schemas.openxmlformats.org/drawingml/2006/main" noGrp="1"/>
-          </p:cNvSpPr>
-          <p:nvPr/>
-        </p:nvSpPr>
-        <p:spPr>
-          <a:xfrm xmlns:a="http://schemas.openxmlformats.org/drawingml/2006/main">
-            <a:off x="393668" y="4973288"/>
-            <a:ext cx="3568732" cy="1080230"/>
-          </a:xfrm>
-          <a:prstGeom xmlns:a="http://schemas.openxmlformats.org/drawingml/2006/main" prst="rect">
-            <a:avLst/>
-          </a:prstGeom>
-        </p:spPr>
-        <p:txBody>
-          <a:bodyPr xmlns:a="http://schemas.openxmlformats.org/drawingml/2006/main" lIns="0" tIns="0" rIns="0" bIns="0">
-            <a:noAutofit/>
-          </a:bodyPr>
-          <a:lstStyle xmlns:a="http://schemas.openxmlformats.org/drawingml/2006/main"/>
-          <a:p xmlns:a="http://schemas.openxmlformats.org/drawingml/2006/main">
-            <a:pPr algn="l">
+              <a:t/>
+            </a:r>
+          </a:p>
+          <a:p xmlns:a="http://schemas.openxmlformats.org/drawingml/2006/main">
+            <a:pPr algn="l">
+              <a:lnSpc>
+                <a:spcPct val="115000"/>
+              </a:lnSpc>
+              <a:buNone/>
+              <a:defRPr sz="2200" b="0">
+                <a:solidFill>
+                  <a:srgbClr val="173126"/>
+                </a:solidFill>
+                <a:latin typeface="Aptos"/>
+                <a:ea typeface="Aptos"/>
+                <a:cs typeface="Aptos"/>
+              </a:defRPr>
+            </a:pPr>
+            <a:r>
+              <a:rPr sz="2200" b="0">
+                <a:solidFill>
+                  <a:srgbClr val="173126"/>
+                </a:solidFill>
+                <a:latin typeface="Aptos"/>
+                <a:ea typeface="Aptos"/>
+                <a:cs typeface="Aptos"/>
+              </a:rPr>
+              <a:t>2. Identify the evidence you will save.</a:t>
+            </a:r>
+          </a:p>
+          <a:p xmlns:a="http://schemas.openxmlformats.org/drawingml/2006/main">
+            <a:pPr algn="l">
+              <a:buNone/>
               <a:defRPr sz="2400">
                 <a:solidFill>
                   <a:srgbClr val="000000"/>
@@ -4490,37 +6575,34 @@
               </a:defRPr>
             </a:pPr>
             <a:r>
-              <a:t>Complete the knowledge checks.</a:t>
-            </a:r>
-          </a:p>
-          <a:p xmlns:a="http://schemas.openxmlformats.org/drawingml/2006/main">
-            <a:pPr algn="l">
-              <a:defRPr sz="2400">
-                <a:solidFill>
-                  <a:srgbClr val="000000"/>
-                </a:solidFill>
-                <a:latin typeface="Helvetica Neue"/>
-                <a:ea typeface="Helvetica Neue"/>
-                <a:cs typeface="Helvetica Neue"/>
-              </a:defRPr>
-            </a:pPr>
-            <a:r>
-              <a:t>Write your guided response.</a:t>
-            </a:r>
-          </a:p>
-          <a:p xmlns:a="http://schemas.openxmlformats.org/drawingml/2006/main">
-            <a:pPr algn="l">
-              <a:defRPr sz="2400">
-                <a:solidFill>
-                  <a:srgbClr val="000000"/>
-                </a:solidFill>
-                <a:latin typeface="Helvetica Neue"/>
-                <a:ea typeface="Helvetica Neue"/>
-                <a:cs typeface="Helvetica Neue"/>
-              </a:defRPr>
-            </a:pPr>
-            <a:r>
-              <a:t>Save the mapped folio evidence.</a:t>
+              <a:t/>
+            </a:r>
+          </a:p>
+          <a:p xmlns:a="http://schemas.openxmlformats.org/drawingml/2006/main">
+            <a:pPr algn="l">
+              <a:lnSpc>
+                <a:spcPct val="115000"/>
+              </a:lnSpc>
+              <a:buNone/>
+              <a:defRPr sz="2200" b="0">
+                <a:solidFill>
+                  <a:srgbClr val="173126"/>
+                </a:solidFill>
+                <a:latin typeface="Aptos"/>
+                <a:ea typeface="Aptos"/>
+                <a:cs typeface="Aptos"/>
+              </a:defRPr>
+            </a:pPr>
+            <a:r>
+              <a:rPr sz="2200" b="0">
+                <a:solidFill>
+                  <a:srgbClr val="173126"/>
+                </a:solidFill>
+                <a:latin typeface="Aptos"/>
+                <a:ea typeface="Aptos"/>
+                <a:cs typeface="Aptos"/>
+              </a:rPr>
+              <a:t>3. State your next safe, accurate action.</a:t>
             </a:r>
           </a:p>
         </p:txBody>
@@ -4541,35 +6623,72 @@
         </p:nvSpPr>
         <p:spPr>
           <a:xfrm xmlns:a="http://schemas.openxmlformats.org/drawingml/2006/main">
-            <a:off x="393668" y="392240"/>
-            <a:ext cx="1612868" cy="649129"/>
+            <a:off x="666750" y="819150"/>
+            <a:ext cx="2857500" cy="266700"/>
           </a:xfrm>
           <a:prstGeom xmlns:a="http://schemas.openxmlformats.org/drawingml/2006/main" prst="rect">
             <a:avLst/>
           </a:prstGeom>
         </p:spPr>
         <p:txBody>
-          <a:bodyPr xmlns:a="http://schemas.openxmlformats.org/drawingml/2006/main" lIns="0" tIns="0" rIns="0" bIns="0">
-            <a:noAutofit/>
+          <a:bodyPr xmlns:a="http://schemas.openxmlformats.org/drawingml/2006/main" lIns="38100" tIns="38100" rIns="38100" bIns="38100" anchor="t">
+            <a:normAutofit fontScale="85034"/>
           </a:bodyPr>
           <a:lstStyle xmlns:a="http://schemas.openxmlformats.org/drawingml/2006/main"/>
           <a:p xmlns:a="http://schemas.openxmlformats.org/drawingml/2006/main">
             <a:pPr algn="l">
-              <a:defRPr sz="2400">
-                <a:solidFill>
-                  <a:srgbClr val="000000"/>
-                </a:solidFill>
-                <a:latin typeface="Helvetica Neue"/>
-                <a:ea typeface="Helvetica Neue"/>
-                <a:cs typeface="Helvetica Neue"/>
-              </a:defRPr>
-            </a:pPr>
-            <a:r>
-              <a:t>NEXT STEP</a:t>
-            </a:r>
-          </a:p>
-        </p:txBody>
-      </p:sp>
+              <a:lnSpc>
+                <a:spcPct val="105000"/>
+              </a:lnSpc>
+              <a:buNone/>
+              <a:defRPr sz="1400" b="1">
+                <a:solidFill>
+                  <a:srgbClr val="D8941C"/>
+                </a:solidFill>
+                <a:latin typeface="Aptos"/>
+                <a:ea typeface="Aptos"/>
+                <a:cs typeface="Aptos"/>
+              </a:defRPr>
+            </a:pPr>
+            <a:r>
+              <a:rPr sz="1400" b="1">
+                <a:solidFill>
+                  <a:srgbClr val="D8941C"/>
+                </a:solidFill>
+                <a:latin typeface="Aptos"/>
+                <a:ea typeface="Aptos"/>
+                <a:cs typeface="Aptos"/>
+              </a:rPr>
+              <a:t>YOUR NEXT MOVE</a:t>
+            </a:r>
+          </a:p>
+        </p:txBody>
+      </p:sp>
+      <p:pic>
+        <p:nvPicPr>
+          <p:cNvPr id="9" name=""/>
+          <p:cNvPicPr>
+            <a:picLocks xmlns:a="http://schemas.openxmlformats.org/drawingml/2006/main" noChangeAspect="1"/>
+          </p:cNvPicPr>
+          <p:nvPr/>
+        </p:nvPicPr>
+        <p:blipFill>
+          <a:blip xmlns:r="http://schemas.openxmlformats.org/officeDocument/2006/relationships" xmlns:a="http://schemas.openxmlformats.org/drawingml/2006/main" r:embed="R671be92f98bc4c82"/>
+          <a:srcRect xmlns:a="http://schemas.openxmlformats.org/drawingml/2006/main" l="11806" t="0" r="11806" b="0"/>
+          <a:stretch xmlns:a="http://schemas.openxmlformats.org/drawingml/2006/main">
+            <a:fillRect l="0" t="0" r="0" b="0"/>
+          </a:stretch>
+        </p:blipFill>
+        <p:spPr>
+          <a:xfrm xmlns:a="http://schemas.openxmlformats.org/drawingml/2006/main">
+            <a:off x="6953250" y="0"/>
+            <a:ext cx="5238750" cy="6858000"/>
+          </a:xfrm>
+          <a:prstGeom xmlns:a="http://schemas.openxmlformats.org/drawingml/2006/main" prst="rect">
+            <a:avLst/>
+          </a:prstGeom>
+        </p:spPr>
+      </p:pic>
     </p:spTree>
     <p:extLst>
       <p:ext uri="{BB962C8B-B14F-4D97-AF65-F5344CB8AC3E}">
